--- a/DocSnap_Presentation.pptx
+++ b/DocSnap_Presentation.pptx
@@ -25,9 +25,10 @@
     <p:sldId id="273" r:id="rId19"/>
     <p:sldId id="274" r:id="rId20"/>
     <p:sldId id="275" r:id="rId21"/>
+    <p:sldId id="276" r:id="rId22"/>
   </p:sldIdLst>
   <p:notesMasterIdLst>
-    <p:notesMasterId r:id="rId22"/>
+    <p:notesMasterId r:id="rId23"/>
   </p:notesMasterIdLst>
   <p:sldSz cx="12192000" cy="6858000"/>
   <p:notesSz cx="6858000" cy="12192000"/>
@@ -1601,6 +1602,94 @@
             <a:fld id="{F7021451-1387-4CA6-816F-3879F97B5CBC}" type="slidenum">
               <a:rPr lang="en-US"/>
               <a:t>20</a:t>
+            </a:fld>
+            <a:endParaRPr lang="en-US"/>
+          </a:p>
+        </p:txBody>
+      </p:sp>
+    </p:spTree>
+    <p:extLst>
+      <p:ext uri="{BB962C8B-B14F-4D97-AF65-F5344CB8AC3E}">
+        <p14:creationId xmlns:p14="http://schemas.microsoft.com/office/powerpoint/2010/main" val="1024086991"/>
+      </p:ext>
+    </p:extLst>
+  </p:cSld>
+  <p:clrMapOvr>
+    <a:masterClrMapping/>
+  </p:clrMapOvr>
+</p:notes>
+</file>
+
+<file path=ppt/notesSlides/notesSlide21.xml><?xml version="1.0" encoding="utf-8"?>
+<p:notes xmlns:a="http://schemas.openxmlformats.org/drawingml/2006/main" xmlns:r="http://schemas.openxmlformats.org/officeDocument/2006/relationships" xmlns:p="http://schemas.openxmlformats.org/presentationml/2006/main">
+  <p:cSld>
+    <p:spTree>
+      <p:nvGrpSpPr>
+        <p:cNvPr id="1" name=""/>
+        <p:cNvGrpSpPr/>
+        <p:nvPr/>
+      </p:nvGrpSpPr>
+      <p:grpSpPr>
+        <a:xfrm>
+          <a:off x="0" y="0"/>
+          <a:ext cx="0" cy="0"/>
+          <a:chOff x="0" y="0"/>
+          <a:chExt cx="0" cy="0"/>
+        </a:xfrm>
+      </p:grpSpPr>
+      <p:sp>
+        <p:nvSpPr>
+          <p:cNvPr id="2" name="Slide Image Placeholder 1"/>
+          <p:cNvSpPr>
+            <a:spLocks noGrp="1" noRot="1" noChangeAspect="1"/>
+          </p:cNvSpPr>
+          <p:nvPr>
+            <p:ph type="sldImg"/>
+          </p:nvPr>
+        </p:nvSpPr>
+        <p:spPr/>
+      </p:sp>
+      <p:sp>
+        <p:nvSpPr>
+          <p:cNvPr id="3" name="Notes Placeholder 2"/>
+          <p:cNvSpPr>
+            <a:spLocks noGrp="1"/>
+          </p:cNvSpPr>
+          <p:nvPr>
+            <p:ph type="body" idx="1"/>
+          </p:nvPr>
+        </p:nvSpPr>
+        <p:spPr/>
+        <p:txBody>
+          <a:bodyPr/>
+          <a:lstStyle/>
+          <a:p>
+            <a:r>
+              <a:rPr lang="en-US" dirty="0"/>
+              <a:t/>
+            </a:r>
+            <a:endParaRPr lang="en-US" dirty="0"/>
+          </a:p>
+        </p:txBody>
+      </p:sp>
+      <p:sp>
+        <p:nvSpPr>
+          <p:cNvPr id="4" name="Slide Number Placeholder 3"/>
+          <p:cNvSpPr>
+            <a:spLocks noGrp="1"/>
+          </p:cNvSpPr>
+          <p:nvPr>
+            <p:ph type="sldNum" sz="quarter" idx="10"/>
+          </p:nvPr>
+        </p:nvSpPr>
+        <p:spPr/>
+        <p:txBody>
+          <a:bodyPr/>
+          <a:lstStyle/>
+          <a:p>
+            <a:fld id="{F7021451-1387-4CA6-816F-3879F97B5CBC}" type="slidenum">
+              <a:rPr lang="en-US"/>
+              <a:t>21</a:t>
             </a:fld>
             <a:endParaRPr lang="en-US"/>
           </a:p>
@@ -10227,7 +10316,7 @@
                 <a:ea typeface="Calibri" pitchFamily="34" charset="-122"/>
                 <a:cs typeface="Calibri" pitchFamily="34" charset="-120"/>
               </a:rPr>
-              <a:t>Flask API: 2.07s response time. Streamlit UI: 1.79s. HuggingFace Spaces live with T5-base 892MB model. Sub-3-second performance meets professional requirements.</a:t>
+              <a:t>Flask API: 2.07s (Colab T4 GPU). Streamlit UI: 1.79s (Colab T4 GPU). HuggingFace Spaces live on CPU — warm inference ~8–15s. Quantization recommended for sub-2s CPU deployment.</a:t>
             </a:r>
             <a:endParaRPr lang="en-US" sz="1100" dirty="0"/>
           </a:p>
@@ -10373,7 +10462,7 @@
                 <a:ea typeface="Calibri" pitchFamily="34" charset="-122"/>
                 <a:cs typeface="Calibri" pitchFamily="34" charset="-120"/>
               </a:rPr>
-              <a:t>Production-grade deployment meeting professional sub-3-second targets</a:t>
+              <a:t>Latency measured on Google Colab T4 GPU — see training_details.md for CPU vs GPU breakdown</a:t>
             </a:r>
             <a:endParaRPr lang="en-US" sz="1400" dirty="0"/>
           </a:p>
@@ -10478,7 +10567,7 @@
                 <a:ea typeface="Calibri" pitchFamily="34" charset="-122"/>
                 <a:cs typeface="Calibri" pitchFamily="34" charset="-120"/>
               </a:rPr>
-              <a:t>Flask API Response</a:t>
+              <a:t>Flask API (Colab T4 GPU)</a:t>
             </a:r>
             <a:endParaRPr lang="en-US" sz="1100" dirty="0"/>
           </a:p>
@@ -10583,7 +10672,7 @@
                 <a:ea typeface="Calibri" pitchFamily="34" charset="-122"/>
                 <a:cs typeface="Calibri" pitchFamily="34" charset="-120"/>
               </a:rPr>
-              <a:t>Streamlit UI Response</a:t>
+              <a:t>Streamlit UI (Colab T4 GPU)</a:t>
             </a:r>
             <a:endParaRPr lang="en-US" sz="1100" dirty="0"/>
           </a:p>
@@ -13981,7 +14070,7 @@
                 <a:ea typeface="Calibri" pitchFamily="34" charset="-122"/>
                 <a:cs typeface="Calibri" pitchFamily="34" charset="-120"/>
               </a:rPr>
-              <a:t>A fully deployed, publicly accessible application with sub-2-second response times demonstrates the feasibility of AI summarization for professional knowledge management.</a:t>
+              <a:t>A fully deployed application with 2.07s GPU response time and live HuggingFace Spaces URL demonstrates the feasibility of AI summarization for professional knowledge management.</a:t>
             </a:r>
             <a:endParaRPr lang="en-US" sz="1200" dirty="0"/>
           </a:p>
@@ -15324,6 +15413,732 @@
 <file path=ppt/slides/slide20.xml><?xml version="1.0" encoding="utf-8"?>
 <p:sld xmlns:a="http://schemas.openxmlformats.org/drawingml/2006/main" xmlns:r="http://schemas.openxmlformats.org/officeDocument/2006/relationships" xmlns:p="http://schemas.openxmlformats.org/presentationml/2006/main">
   <p:cSld name="Slide 20">
+    <p:bg>
+      <p:bgPr>
+        <a:solidFill>
+          <a:srgbClr val="F7F6F2"/>
+        </a:solidFill>
+      </p:bgPr>
+    </p:bg>
+    <p:spTree>
+      <p:nvGrpSpPr>
+        <p:cNvPr id="1" name=""/>
+        <p:cNvGrpSpPr/>
+        <p:nvPr/>
+      </p:nvGrpSpPr>
+      <p:grpSpPr>
+        <a:xfrm>
+          <a:off x="0" y="0"/>
+          <a:ext cx="0" cy="0"/>
+          <a:chOff x="0" y="0"/>
+          <a:chExt cx="0" cy="0"/>
+        </a:xfrm>
+      </p:grpSpPr>
+      <p:sp>
+        <p:nvSpPr>
+          <p:cNvPr id="2" name="Text 0"/>
+          <p:cNvSpPr/>
+          <p:nvPr/>
+        </p:nvSpPr>
+        <p:spPr>
+          <a:xfrm>
+            <a:off x="365760" y="137160"/>
+            <a:ext cx="2743200" cy="228600"/>
+          </a:xfrm>
+          <a:prstGeom prst="rect">
+            <a:avLst/>
+          </a:prstGeom>
+          <a:noFill/>
+          <a:ln/>
+        </p:spPr>
+        <p:txBody>
+          <a:bodyPr wrap="square" rtlCol="0" anchor="ctr"/>
+          <a:lstStyle/>
+          <a:p>
+            <a:pPr indent="0" marL="0">
+              <a:buNone/>
+            </a:pPr>
+            <a:r>
+              <a:rPr lang="en-US" sz="900" b="1" spc="200" kern="0" dirty="0">
+                <a:solidFill>
+                  <a:srgbClr val="01696F"/>
+                </a:solidFill>
+              </a:rPr>
+              <a:t>METHODOLOGY — CLARIFICATIONS</a:t>
+            </a:r>
+            <a:endParaRPr lang="en-US" sz="900" dirty="0"/>
+          </a:p>
+        </p:txBody>
+      </p:sp>
+      <p:sp>
+        <p:nvSpPr>
+          <p:cNvPr id="3" name="Text 1"/>
+          <p:cNvSpPr/>
+          <p:nvPr/>
+        </p:nvSpPr>
+        <p:spPr>
+          <a:xfrm>
+            <a:off x="365760" y="457200"/>
+            <a:ext cx="11430000" cy="640080"/>
+          </a:xfrm>
+          <a:prstGeom prst="rect">
+            <a:avLst/>
+          </a:prstGeom>
+          <a:noFill/>
+          <a:ln/>
+        </p:spPr>
+        <p:txBody>
+          <a:bodyPr wrap="square" rtlCol="0" anchor="ctr"/>
+          <a:lstStyle/>
+          <a:p>
+            <a:pPr indent="0" marL="0">
+              <a:buNone/>
+            </a:pPr>
+            <a:r>
+              <a:rPr lang="en-US" sz="3200" b="1" dirty="0">
+                <a:solidFill>
+                  <a:srgbClr val="28251D"/>
+                </a:solidFill>
+                <a:latin typeface="Trebuchet MS" pitchFamily="34" charset="0"/>
+                <a:ea typeface="Trebuchet MS" pitchFamily="34" charset="-122"/>
+                <a:cs typeface="Trebuchet MS" pitchFamily="34" charset="-120"/>
+              </a:rPr>
+              <a:t>Key Methodology Notes</a:t>
+            </a:r>
+            <a:endParaRPr lang="en-US" sz="3200" dirty="0"/>
+          </a:p>
+        </p:txBody>
+      </p:sp>
+      <p:sp>
+        <p:nvSpPr>
+          <p:cNvPr id="4" name="Text 2"/>
+          <p:cNvSpPr/>
+          <p:nvPr/>
+        </p:nvSpPr>
+        <p:spPr>
+          <a:xfrm>
+            <a:off x="365760" y="1051560"/>
+            <a:ext cx="11430000" cy="320040"/>
+          </a:xfrm>
+          <a:prstGeom prst="rect">
+            <a:avLst/>
+          </a:prstGeom>
+          <a:noFill/>
+          <a:ln/>
+        </p:spPr>
+        <p:txBody>
+          <a:bodyPr wrap="square" rtlCol="0" anchor="ctr"/>
+          <a:lstStyle/>
+          <a:p>
+            <a:pPr indent="0" marL="0">
+              <a:buNone/>
+            </a:pPr>
+            <a:r>
+              <a:rPr lang="en-US" sz="1400" dirty="0">
+                <a:solidFill>
+                  <a:srgbClr val="7A7974"/>
+                </a:solidFill>
+                <a:latin typeface="Calibri" pitchFamily="34" charset="0"/>
+                <a:ea typeface="Calibri" pitchFamily="34" charset="-122"/>
+                <a:cs typeface="Calibri" pitchFamily="34" charset="-120"/>
+              </a:rPr>
+              <a:t>Addressing common evaluation questions on timeline, sample size, and deployment</a:t>
+            </a:r>
+            <a:endParaRPr lang="en-US" sz="1400" dirty="0"/>
+          </a:p>
+        </p:txBody>
+      </p:sp>
+      <p:sp>
+        <p:nvSpPr>
+          <p:cNvPr id="5" name="Shape 3"/>
+          <p:cNvSpPr/>
+          <p:nvPr/>
+        </p:nvSpPr>
+        <p:spPr>
+          <a:xfrm>
+            <a:off x="365760" y="1463040"/>
+            <a:ext cx="5577840" cy="2103120"/>
+          </a:xfrm>
+          <a:prstGeom prst="roundRect">
+            <a:avLst>
+              <a:gd name="adj" fmla="val 4348"/>
+            </a:avLst>
+          </a:prstGeom>
+          <a:solidFill>
+            <a:srgbClr val="E6ECE9"/>
+          </a:solidFill>
+          <a:ln w="19050">
+            <a:solidFill>
+              <a:srgbClr val="01696F"/>
+            </a:solidFill>
+            <a:prstDash val="solid"/>
+          </a:ln>
+        </p:spPr>
+      </p:sp>
+      <p:sp>
+        <p:nvSpPr>
+          <p:cNvPr id="6" name="Shape 4"/>
+          <p:cNvSpPr/>
+          <p:nvPr/>
+        </p:nvSpPr>
+        <p:spPr>
+          <a:xfrm>
+            <a:off x="365760" y="1463040"/>
+            <a:ext cx="5577840" cy="347472"/>
+          </a:xfrm>
+          <a:prstGeom prst="rect">
+            <a:avLst/>
+          </a:prstGeom>
+          <a:solidFill>
+            <a:srgbClr val="01696F"/>
+          </a:solidFill>
+          <a:ln w="12700">
+            <a:solidFill>
+              <a:srgbClr val="01696F"/>
+            </a:solidFill>
+            <a:prstDash val="solid"/>
+          </a:ln>
+        </p:spPr>
+      </p:sp>
+      <p:sp>
+        <p:nvSpPr>
+          <p:cNvPr id="7" name="Text 5"/>
+          <p:cNvSpPr/>
+          <p:nvPr/>
+        </p:nvSpPr>
+        <p:spPr>
+          <a:xfrm>
+            <a:off x="502920" y="1499616"/>
+            <a:ext cx="5303520" cy="274320"/>
+          </a:xfrm>
+          <a:prstGeom prst="rect">
+            <a:avLst/>
+          </a:prstGeom>
+          <a:noFill/>
+          <a:ln/>
+        </p:spPr>
+        <p:txBody>
+          <a:bodyPr wrap="square" rtlCol="0" anchor="ctr"/>
+          <a:lstStyle/>
+          <a:p>
+            <a:pPr indent="0" marL="0">
+              <a:buNone/>
+            </a:pPr>
+            <a:r>
+              <a:rPr lang="en-US" sz="1200" b="1" dirty="0">
+                <a:solidFill>
+                  <a:srgbClr val="FFFFFF"/>
+                </a:solidFill>
+                <a:latin typeface="Calibri" pitchFamily="34" charset="0"/>
+                <a:ea typeface="Calibri" pitchFamily="34" charset="-122"/>
+                <a:cs typeface="Calibri" pitchFamily="34" charset="-120"/>
+              </a:rPr>
+              <a:t>Timeline — 5 Phases, Not 5 Weeks</a:t>
+            </a:r>
+            <a:endParaRPr lang="en-US" sz="1200" dirty="0"/>
+          </a:p>
+        </p:txBody>
+      </p:sp>
+      <p:sp>
+        <p:nvSpPr>
+          <p:cNvPr id="8" name="Text 6"/>
+          <p:cNvSpPr/>
+          <p:nvPr/>
+        </p:nvSpPr>
+        <p:spPr>
+          <a:xfrm>
+            <a:off x="548640" y="1920240"/>
+            <a:ext cx="5212080" cy="1508760"/>
+          </a:xfrm>
+          <a:prstGeom prst="rect">
+            <a:avLst/>
+          </a:prstGeom>
+          <a:noFill/>
+          <a:ln/>
+        </p:spPr>
+        <p:txBody>
+          <a:bodyPr wrap="square" rtlCol="0" anchor="ctr"/>
+          <a:lstStyle/>
+          <a:p>
+            <a:pPr indent="0" marL="0">
+              <a:buNone/>
+            </a:pPr>
+            <a:r>
+              <a:rPr lang="en-US" sz="1100" dirty="0">
+                <a:solidFill>
+                  <a:srgbClr val="28251D"/>
+                </a:solidFill>
+                <a:latin typeface="Calibri" pitchFamily="34" charset="0"/>
+                <a:ea typeface="Calibri" pitchFamily="34" charset="-122"/>
+                <a:cs typeface="Calibri" pitchFamily="34" charset="-120"/>
+              </a:rPr>
+              <a:t>The 5 notebooks represent sequential project phases (Data → EDA → Models → Evaluation → Deployment), completed across the full semester. Each phase spans multiple calendar weeks.</a:t>
+            </a:r>
+            <a:endParaRPr lang="en-US" sz="1100" dirty="0"/>
+          </a:p>
+        </p:txBody>
+      </p:sp>
+      <p:sp>
+        <p:nvSpPr>
+          <p:cNvPr id="9" name="Shape 7"/>
+          <p:cNvSpPr/>
+          <p:nvPr/>
+        </p:nvSpPr>
+        <p:spPr>
+          <a:xfrm>
+            <a:off x="6217920" y="1463040"/>
+            <a:ext cx="5577840" cy="2103120"/>
+          </a:xfrm>
+          <a:prstGeom prst="roundRect">
+            <a:avLst>
+              <a:gd name="adj" fmla="val 4348"/>
+            </a:avLst>
+          </a:prstGeom>
+          <a:solidFill>
+            <a:srgbClr val="EEE9EE"/>
+          </a:solidFill>
+          <a:ln w="19050">
+            <a:solidFill>
+              <a:srgbClr val="7A39BB"/>
+            </a:solidFill>
+            <a:prstDash val="solid"/>
+          </a:ln>
+        </p:spPr>
+      </p:sp>
+      <p:sp>
+        <p:nvSpPr>
+          <p:cNvPr id="10" name="Shape 8"/>
+          <p:cNvSpPr/>
+          <p:nvPr/>
+        </p:nvSpPr>
+        <p:spPr>
+          <a:xfrm>
+            <a:off x="6217920" y="1463040"/>
+            <a:ext cx="5577840" cy="347472"/>
+          </a:xfrm>
+          <a:prstGeom prst="rect">
+            <a:avLst/>
+          </a:prstGeom>
+          <a:solidFill>
+            <a:srgbClr val="7A39BB"/>
+          </a:solidFill>
+          <a:ln w="12700">
+            <a:solidFill>
+              <a:srgbClr val="7A39BB"/>
+            </a:solidFill>
+            <a:prstDash val="solid"/>
+          </a:ln>
+        </p:spPr>
+      </p:sp>
+      <p:sp>
+        <p:nvSpPr>
+          <p:cNvPr id="11" name="Text 9"/>
+          <p:cNvSpPr/>
+          <p:nvPr/>
+        </p:nvSpPr>
+        <p:spPr>
+          <a:xfrm>
+            <a:off x="6355080" y="1499616"/>
+            <a:ext cx="5303520" cy="274320"/>
+          </a:xfrm>
+          <a:prstGeom prst="rect">
+            <a:avLst/>
+          </a:prstGeom>
+          <a:noFill/>
+          <a:ln/>
+        </p:spPr>
+        <p:txBody>
+          <a:bodyPr wrap="square" rtlCol="0" anchor="ctr"/>
+          <a:lstStyle/>
+          <a:p>
+            <a:pPr indent="0" marL="0">
+              <a:buNone/>
+            </a:pPr>
+            <a:r>
+              <a:rPr lang="en-US" sz="1200" b="1" dirty="0">
+                <a:solidFill>
+                  <a:srgbClr val="FFFFFF"/>
+                </a:solidFill>
+                <a:latin typeface="Calibri" pitchFamily="34" charset="0"/>
+                <a:ea typeface="Calibri" pitchFamily="34" charset="-122"/>
+                <a:cs typeface="Calibri" pitchFamily="34" charset="-120"/>
+              </a:rPr>
+              <a:t>Train / Validation Split</a:t>
+            </a:r>
+            <a:endParaRPr lang="en-US" sz="1200" dirty="0"/>
+          </a:p>
+        </p:txBody>
+      </p:sp>
+      <p:sp>
+        <p:nvSpPr>
+          <p:cNvPr id="12" name="Text 10"/>
+          <p:cNvSpPr/>
+          <p:nvPr/>
+        </p:nvSpPr>
+        <p:spPr>
+          <a:xfrm>
+            <a:off x="6400800" y="1920240"/>
+            <a:ext cx="5212080" cy="1508760"/>
+          </a:xfrm>
+          <a:prstGeom prst="rect">
+            <a:avLst/>
+          </a:prstGeom>
+          <a:noFill/>
+          <a:ln/>
+        </p:spPr>
+        <p:txBody>
+          <a:bodyPr wrap="square" rtlCol="0" anchor="ctr"/>
+          <a:lstStyle/>
+          <a:p>
+            <a:pPr indent="0" marL="0">
+              <a:buNone/>
+            </a:pPr>
+            <a:r>
+              <a:rPr lang="en-US" sz="1100" dirty="0">
+                <a:solidFill>
+                  <a:srgbClr val="28251D"/>
+                </a:solidFill>
+                <a:latin typeface="Calibri" pitchFamily="34" charset="0"/>
+                <a:ea typeface="Calibri" pitchFamily="34" charset="-122"/>
+                <a:cs typeface="Calibri" pitchFamily="34" charset="-120"/>
+              </a:rPr>
+              <a:t>500 fine-tuning articles split 80/20: 400 training + 100 validation. The 50 ROUGE evaluation articles are from the separate official CNN/DailyMail test split — no data leakage.</a:t>
+            </a:r>
+            <a:endParaRPr lang="en-US" sz="1100" dirty="0"/>
+          </a:p>
+        </p:txBody>
+      </p:sp>
+      <p:sp>
+        <p:nvSpPr>
+          <p:cNvPr id="13" name="Shape 11"/>
+          <p:cNvSpPr/>
+          <p:nvPr/>
+        </p:nvSpPr>
+        <p:spPr>
+          <a:xfrm>
+            <a:off x="365760" y="3794760"/>
+            <a:ext cx="5577840" cy="2103120"/>
+          </a:xfrm>
+          <a:prstGeom prst="roundRect">
+            <a:avLst>
+              <a:gd name="adj" fmla="val 4348"/>
+            </a:avLst>
+          </a:prstGeom>
+          <a:solidFill>
+            <a:srgbClr val="F5EDE1"/>
+          </a:solidFill>
+          <a:ln w="19050">
+            <a:solidFill>
+              <a:srgbClr val="DA7101"/>
+            </a:solidFill>
+            <a:prstDash val="solid"/>
+          </a:ln>
+        </p:spPr>
+      </p:sp>
+      <p:sp>
+        <p:nvSpPr>
+          <p:cNvPr id="14" name="Shape 12"/>
+          <p:cNvSpPr/>
+          <p:nvPr/>
+        </p:nvSpPr>
+        <p:spPr>
+          <a:xfrm>
+            <a:off x="365760" y="3794760"/>
+            <a:ext cx="5577840" cy="347472"/>
+          </a:xfrm>
+          <a:prstGeom prst="rect">
+            <a:avLst/>
+          </a:prstGeom>
+          <a:solidFill>
+            <a:srgbClr val="DA7101"/>
+          </a:solidFill>
+          <a:ln w="12700">
+            <a:solidFill>
+              <a:srgbClr val="DA7101"/>
+            </a:solidFill>
+            <a:prstDash val="solid"/>
+          </a:ln>
+        </p:spPr>
+      </p:sp>
+      <p:sp>
+        <p:nvSpPr>
+          <p:cNvPr id="15" name="Text 13"/>
+          <p:cNvSpPr/>
+          <p:nvPr/>
+        </p:nvSpPr>
+        <p:spPr>
+          <a:xfrm>
+            <a:off x="502920" y="3831336"/>
+            <a:ext cx="5303520" cy="274320"/>
+          </a:xfrm>
+          <a:prstGeom prst="rect">
+            <a:avLst/>
+          </a:prstGeom>
+          <a:noFill/>
+          <a:ln/>
+        </p:spPr>
+        <p:txBody>
+          <a:bodyPr wrap="square" rtlCol="0" anchor="ctr"/>
+          <a:lstStyle/>
+          <a:p>
+            <a:pPr indent="0" marL="0">
+              <a:buNone/>
+            </a:pPr>
+            <a:r>
+              <a:rPr lang="en-US" sz="1200" b="1" dirty="0">
+                <a:solidFill>
+                  <a:srgbClr val="FFFFFF"/>
+                </a:solidFill>
+                <a:latin typeface="Calibri" pitchFamily="34" charset="0"/>
+                <a:ea typeface="Calibri" pitchFamily="34" charset="-122"/>
+                <a:cs typeface="Calibri" pitchFamily="34" charset="-120"/>
+              </a:rPr>
+              <a:t>Sample Size Justification (50 Articles)</a:t>
+            </a:r>
+            <a:endParaRPr lang="en-US" sz="1200" dirty="0"/>
+          </a:p>
+        </p:txBody>
+      </p:sp>
+      <p:sp>
+        <p:nvSpPr>
+          <p:cNvPr id="16" name="Text 14"/>
+          <p:cNvSpPr/>
+          <p:nvPr/>
+        </p:nvSpPr>
+        <p:spPr>
+          <a:xfrm>
+            <a:off x="548640" y="4251960"/>
+            <a:ext cx="5212080" cy="1508760"/>
+          </a:xfrm>
+          <a:prstGeom prst="rect">
+            <a:avLst/>
+          </a:prstGeom>
+          <a:noFill/>
+          <a:ln/>
+        </p:spPr>
+        <p:txBody>
+          <a:bodyPr wrap="square" rtlCol="0" anchor="ctr"/>
+          <a:lstStyle/>
+          <a:p>
+            <a:pPr indent="0" marL="0">
+              <a:buNone/>
+            </a:pPr>
+            <a:r>
+              <a:rPr lang="en-US" sz="1100" dirty="0">
+                <a:solidFill>
+                  <a:srgbClr val="28251D"/>
+                </a:solidFill>
+                <a:latin typeface="Calibri" pitchFamily="34" charset="0"/>
+                <a:ea typeface="Calibri" pitchFamily="34" charset="-122"/>
+                <a:cs typeface="Calibri" pitchFamily="34" charset="-120"/>
+              </a:rPr>
+              <a:t>Google Colab free tier limits sessions to ~90 mins. Full 11,490 article evaluation would take 6–7 hours. At n=50, CI is ±0.028 — T5-base leads TextRank by 0.1854 (6× the margin), making H1 conclusive.</a:t>
+            </a:r>
+            <a:endParaRPr lang="en-US" sz="1100" dirty="0"/>
+          </a:p>
+        </p:txBody>
+      </p:sp>
+      <p:sp>
+        <p:nvSpPr>
+          <p:cNvPr id="17" name="Shape 15"/>
+          <p:cNvSpPr/>
+          <p:nvPr/>
+        </p:nvSpPr>
+        <p:spPr>
+          <a:xfrm>
+            <a:off x="6217920" y="3794760"/>
+            <a:ext cx="5577840" cy="2103120"/>
+          </a:xfrm>
+          <a:prstGeom prst="roundRect">
+            <a:avLst>
+              <a:gd name="adj" fmla="val 4348"/>
+            </a:avLst>
+          </a:prstGeom>
+          <a:solidFill>
+            <a:srgbClr val="F1E8E6"/>
+          </a:solidFill>
+          <a:ln w="19050">
+            <a:solidFill>
+              <a:srgbClr val="A13544"/>
+            </a:solidFill>
+            <a:prstDash val="solid"/>
+          </a:ln>
+        </p:spPr>
+      </p:sp>
+      <p:sp>
+        <p:nvSpPr>
+          <p:cNvPr id="18" name="Shape 16"/>
+          <p:cNvSpPr/>
+          <p:nvPr/>
+        </p:nvSpPr>
+        <p:spPr>
+          <a:xfrm>
+            <a:off x="6217920" y="3794760"/>
+            <a:ext cx="5577840" cy="347472"/>
+          </a:xfrm>
+          <a:prstGeom prst="rect">
+            <a:avLst/>
+          </a:prstGeom>
+          <a:solidFill>
+            <a:srgbClr val="A13544"/>
+          </a:solidFill>
+          <a:ln w="12700">
+            <a:solidFill>
+              <a:srgbClr val="A13544"/>
+            </a:solidFill>
+            <a:prstDash val="solid"/>
+          </a:ln>
+        </p:spPr>
+      </p:sp>
+      <p:sp>
+        <p:nvSpPr>
+          <p:cNvPr id="19" name="Text 17"/>
+          <p:cNvSpPr/>
+          <p:nvPr/>
+        </p:nvSpPr>
+        <p:spPr>
+          <a:xfrm>
+            <a:off x="6355080" y="3831336"/>
+            <a:ext cx="5303520" cy="274320"/>
+          </a:xfrm>
+          <a:prstGeom prst="rect">
+            <a:avLst/>
+          </a:prstGeom>
+          <a:noFill/>
+          <a:ln/>
+        </p:spPr>
+        <p:txBody>
+          <a:bodyPr wrap="square" rtlCol="0" anchor="ctr"/>
+          <a:lstStyle/>
+          <a:p>
+            <a:pPr indent="0" marL="0">
+              <a:buNone/>
+            </a:pPr>
+            <a:r>
+              <a:rPr lang="en-US" sz="1200" b="1" dirty="0">
+                <a:solidFill>
+                  <a:srgbClr val="FFFFFF"/>
+                </a:solidFill>
+                <a:latin typeface="Calibri" pitchFamily="34" charset="0"/>
+                <a:ea typeface="Calibri" pitchFamily="34" charset="-122"/>
+                <a:cs typeface="Calibri" pitchFamily="34" charset="-120"/>
+              </a:rPr>
+              <a:t>GPU vs CPU Latency</a:t>
+            </a:r>
+            <a:endParaRPr lang="en-US" sz="1200" dirty="0"/>
+          </a:p>
+        </p:txBody>
+      </p:sp>
+      <p:sp>
+        <p:nvSpPr>
+          <p:cNvPr id="20" name="Text 18"/>
+          <p:cNvSpPr/>
+          <p:nvPr/>
+        </p:nvSpPr>
+        <p:spPr>
+          <a:xfrm>
+            <a:off x="6400800" y="4251960"/>
+            <a:ext cx="5212080" cy="1508760"/>
+          </a:xfrm>
+          <a:prstGeom prst="rect">
+            <a:avLst/>
+          </a:prstGeom>
+          <a:noFill/>
+          <a:ln/>
+        </p:spPr>
+        <p:txBody>
+          <a:bodyPr wrap="square" rtlCol="0" anchor="ctr"/>
+          <a:lstStyle/>
+          <a:p>
+            <a:pPr indent="0" marL="0">
+              <a:buNone/>
+            </a:pPr>
+            <a:r>
+              <a:rPr lang="en-US" sz="1100" dirty="0">
+                <a:solidFill>
+                  <a:srgbClr val="28251D"/>
+                </a:solidFill>
+                <a:latin typeface="Calibri" pitchFamily="34" charset="0"/>
+                <a:ea typeface="Calibri" pitchFamily="34" charset="-122"/>
+                <a:cs typeface="Calibri" pitchFamily="34" charset="-120"/>
+              </a:rPr>
+              <a:t>2.07s (Flask) and 1.79s (Streamlit) measured on Colab T4 GPU. HuggingFace Spaces (free CPU tier): warm inference ~8–15s, cold start ~15–30s. Quantization (INT8) would achieve sub-2s on CPU.</a:t>
+            </a:r>
+            <a:endParaRPr lang="en-US" sz="1100" dirty="0"/>
+          </a:p>
+        </p:txBody>
+      </p:sp>
+      <p:sp>
+        <p:nvSpPr>
+          <p:cNvPr id="21" name="Text 19"/>
+          <p:cNvSpPr/>
+          <p:nvPr/>
+        </p:nvSpPr>
+        <p:spPr>
+          <a:xfrm>
+            <a:off x="365760" y="6336792"/>
+            <a:ext cx="11430000" cy="228600"/>
+          </a:xfrm>
+          <a:prstGeom prst="rect">
+            <a:avLst/>
+          </a:prstGeom>
+          <a:noFill/>
+          <a:ln/>
+        </p:spPr>
+        <p:txBody>
+          <a:bodyPr wrap="square" rtlCol="0" anchor="ctr"/>
+          <a:lstStyle/>
+          <a:p>
+            <a:pPr indent="0" marL="0">
+              <a:buNone/>
+            </a:pPr>
+            <a:r>
+              <a:rPr lang="en-US" sz="900" dirty="0">
+                <a:solidFill>
+                  <a:srgbClr val="7A7974"/>
+                </a:solidFill>
+                <a:latin typeface="Calibri" pitchFamily="34" charset="0"/>
+                <a:ea typeface="Calibri" pitchFamily="34" charset="-122"/>
+                <a:cs typeface="Calibri" pitchFamily="34" charset="-120"/>
+              </a:rPr>
+              <a:t>Full details: </a:t>
+            </a:r>
+            <a:pPr indent="0" marL="0">
+              <a:buNone/>
+            </a:pPr>
+            <a:r>
+              <a:rPr lang="en-US" sz="900" u="sng" dirty="0">
+                <a:solidFill>
+                  <a:srgbClr val="7A7974"/>
+                </a:solidFill>
+                <a:latin typeface="Calibri" pitchFamily="34" charset="0"/>
+                <a:ea typeface="Calibri" pitchFamily="34" charset="-122"/>
+                <a:cs typeface="Calibri" pitchFamily="34" charset="-120"/>
+                <a:hlinkClick r:id="rId1" invalidUrl="" action="" tgtFrame="" tooltip="" history="1" highlightClick="0" endSnd="0">
+                  <a:extLst>
+                    <a:ext uri="{A12FA001-AC4F-418D-AE19-62706E023703}">
+                      <ahyp:hlinkClr xmlns:ahyp="http://schemas.microsoft.com/office/drawing/2018/hyperlinkcolor" val="tx"/>
+                    </a:ext>
+                  </a:extLst>
+                </a:hlinkClick>
+              </a:rPr>
+              <a:t>github.com/CNShivani7/DocSnap-Intelligent-Summarization/blob/main/training_details.md</a:t>
+            </a:r>
+            <a:endParaRPr lang="en-US" sz="900" dirty="0"/>
+          </a:p>
+        </p:txBody>
+      </p:sp>
+    </p:spTree>
+  </p:cSld>
+  <p:clrMapOvr>
+    <a:masterClrMapping/>
+  </p:clrMapOvr>
+</p:sld>
+</file>
+
+<file path=ppt/slides/slide21.xml><?xml version="1.0" encoding="utf-8"?>
+<p:sld xmlns:a="http://schemas.openxmlformats.org/drawingml/2006/main" xmlns:r="http://schemas.openxmlformats.org/officeDocument/2006/relationships" xmlns:p="http://schemas.openxmlformats.org/presentationml/2006/main">
+  <p:cSld name="Slide 21">
     <p:bg>
       <p:bgPr>
         <a:solidFill>

--- a/DocSnap_Presentation.pptx
+++ b/DocSnap_Presentation.pptx
@@ -6073,7 +6073,7 @@
                 <a:ea typeface="Calibri" pitchFamily="34" charset="-122"/>
                 <a:cs typeface="Calibri" pitchFamily="34" charset="-120"/>
               </a:rPr>
-              <a:t>• Exceeds BART baseline</a:t>
+              <a:t>• On par with BART baseline</a:t>
             </a:r>
             <a:endParaRPr lang="en-US" sz="1100" dirty="0"/>
           </a:p>
@@ -8006,7 +8006,7 @@
                 <a:ea typeface="Calibri" pitchFamily="34" charset="-122"/>
                 <a:cs typeface="Calibri" pitchFamily="34" charset="-120"/>
               </a:rPr>
-              <a:t>50 held-out CNN/DailyMail test articles — T5-base exceeds BART baseline by 3.8%</a:t>
+              <a:t>50 held-out CNN/DailyMail test articles — T5-base (0.4584) is comparable to BART baseline (0.4416)</a:t>
             </a:r>
             <a:endParaRPr lang="en-US" sz="1400" dirty="0"/>
           </a:p>
@@ -8516,7 +8516,7 @@
                 <a:ea typeface="Trebuchet MS" pitchFamily="34" charset="-122"/>
                 <a:cs typeface="Trebuchet MS" pitchFamily="34" charset="-120"/>
               </a:rPr>
-              <a:t>+3.8%</a:t>
+              <a:t>~Parity</a:t>
             </a:r>
             <a:endParaRPr lang="en-US" sz="2200" dirty="0"/>
           </a:p>
@@ -8555,7 +8555,7 @@
                 <a:ea typeface="Calibri" pitchFamily="34" charset="-122"/>
                 <a:cs typeface="Calibri" pitchFamily="34" charset="-120"/>
               </a:rPr>
-              <a:t>DocSnap exceeds baseline</a:t>
+              <a:t>Comparable to BART baseline</a:t>
             </a:r>
             <a:endParaRPr lang="en-US" sz="1100" dirty="0"/>
           </a:p>
@@ -9499,7 +9499,7 @@
                 <a:ea typeface="Trebuchet MS" pitchFamily="34" charset="-122"/>
                 <a:cs typeface="Trebuchet MS" pitchFamily="34" charset="-120"/>
               </a:rPr>
-              <a:t>+3.8%</a:t>
+              <a:t>Comparable</a:t>
             </a:r>
             <a:endParaRPr lang="en-US" sz="3600" dirty="0"/>
           </a:p>
@@ -9555,7 +9555,7 @@
                 <a:ea typeface="Calibri" pitchFamily="34" charset="-122"/>
                 <a:cs typeface="Calibri" pitchFamily="34" charset="-120"/>
               </a:rPr>
-              <a:t>over Lewis 2020</a:t>
+              <a:t>(0.4584 vs 0.4416)</a:t>
             </a:r>
             <a:endParaRPr lang="en-US" sz="1100" dirty="0"/>
           </a:p>
@@ -9594,7 +9594,7 @@
                 <a:ea typeface="Calibri" pitchFamily="34" charset="-122"/>
                 <a:cs typeface="Calibri" pitchFamily="34" charset="-120"/>
               </a:rPr>
-              <a:t>Conclusion: The 68.1% improvement in ROUGE-1 (T5-base 0.4584 vs TextRank 0.2730) provides definitive empirical evidence that abstractive summarization substantially outperforms extractive methods on CNN/DailyMail.</a:t>
+              <a:t>Conclusion: The 68.1% improvement in ROUGE-1 (T5-base 0.4584 vs TextRank 0.2730) strongly supports H1 on this evaluation set that abstractive summarization substantially outperforms extractive methods on CNN/DailyMail.</a:t>
             </a:r>
             <a:endParaRPr lang="en-US" sz="1100" dirty="0"/>
           </a:p>
@@ -9989,7 +9989,7 @@
                 <a:ea typeface="Trebuchet MS" pitchFamily="34" charset="-122"/>
                 <a:cs typeface="Trebuchet MS" pitchFamily="34" charset="-120"/>
               </a:rPr>
-              <a:t>Exceeds Published Baseline</a:t>
+              <a:t>Comparable to Published Baseline</a:t>
             </a:r>
             <a:endParaRPr lang="en-US" sz="1500" dirty="0"/>
           </a:p>
@@ -10028,7 +10028,7 @@
                 <a:ea typeface="Calibri" pitchFamily="34" charset="-122"/>
                 <a:cs typeface="Calibri" pitchFamily="34" charset="-120"/>
               </a:rPr>
-              <a:t>T5-base ROUGE-1 = 0.4584 surpasses Lewis et al. 2020 BART baseline of 0.4416 by 3.8% — demonstrating fine-tuned T5 can rival BART-class systems.</a:t>
+              <a:t>T5-base ROUGE-1 = 0.4584 is comparable to the Lewis et al. 2020 BART baseline of 0.4416 — notable given T5-base uses half the parameters (220M vs 400M) and was fine-tuned on only 500 articles vs the full dataset.</a:t>
             </a:r>
             <a:endParaRPr lang="en-US" sz="1100" dirty="0"/>
           </a:p>
@@ -13940,7 +13940,7 @@
                 <a:ea typeface="Calibri" pitchFamily="34" charset="-122"/>
                 <a:cs typeface="Calibri" pitchFamily="34" charset="-120"/>
               </a:rPr>
-              <a:t>T5-base ROUGE-1 of 0.4584 exceeds the published BART/Lewis et al. 2020 baseline of 0.4416 — confirming DocSnap's place in the competitive landscape of NLP summarization.</a:t>
+              <a:t>T5-base ROUGE-1 of 0.4584 is comparable to the published BART baseline (Lewis et al. 2020: 0.4416) — achieved with half the parameters and 0.17% of the training data, confirming DocSnap's competitiveness.</a:t>
             </a:r>
             <a:endParaRPr lang="en-US" sz="1200" dirty="0"/>
           </a:p>
@@ -14410,7 +14410,7 @@
                 <a:ea typeface="Calibri" pitchFamily="34" charset="-122"/>
                 <a:cs typeface="Calibri" pitchFamily="34" charset="-120"/>
               </a:rPr>
-              <a:t>+3.8% vs BART baseline</a:t>
+              <a:t>Comparable to BART baseline</a:t>
             </a:r>
             <a:endParaRPr lang="en-US" sz="1100" dirty="0"/>
           </a:p>
@@ -15932,7 +15932,7 @@
                 <a:ea typeface="Calibri" pitchFamily="34" charset="-122"/>
                 <a:cs typeface="Calibri" pitchFamily="34" charset="-120"/>
               </a:rPr>
-              <a:t>Google Colab free tier limits sessions to ~90 mins. Full 11,490 article evaluation would take 6–7 hours. At n=50, CI is ±0.028 — T5-base leads TextRank by 0.1854 (6× the margin), making H1 conclusive.</a:t>
+              <a:t>Google Colab free tier limits sessions to ~90 mins. Full 11,490 article evaluation would take 6–7 hours. At n=50, CI is ±0.028 — T5-base leads TextRank by 0.1854 (6× the margin), strongly supporting H1.</a:t>
             </a:r>
             <a:endParaRPr lang="en-US" sz="1100" dirty="0"/>
           </a:p>
@@ -20336,7 +20336,7 @@
                 <a:ea typeface="Calibri" pitchFamily="34" charset="-122"/>
                 <a:cs typeface="Calibri" pitchFamily="34" charset="-120"/>
               </a:rPr>
-              <a:t>T5-base fine-tuned — ROUGE-1: 0.4584, exceeding BART baseline by 3.8%.</a:t>
+              <a:t>T5-base fine-tuned — ROUGE-1: 0.4584, comparable to BART baseline (0.4416). Achieved with half the parameters.</a:t>
             </a:r>
             <a:endParaRPr lang="en-US" sz="1100" dirty="0"/>
           </a:p>
@@ -20770,7 +20770,7 @@
                 <a:ea typeface="Calibri" pitchFamily="34" charset="-122"/>
                 <a:cs typeface="Calibri" pitchFamily="34" charset="-120"/>
               </a:rPr>
-              <a:t>T5-base  |  ROUGE-1: 0.4584 ✓</a:t>
+              <a:t>T5-base ✓  |  ROUGE-1: 0.4584 (on par with BART)</a:t>
             </a:r>
             <a:endParaRPr lang="en-US" sz="1100" dirty="0"/>
           </a:p>

--- a/DocSnap_Presentation.pptx
+++ b/DocSnap_Presentation.pptx
@@ -3026,7 +3026,7 @@
                 <a:ea typeface="Trebuchet MS" pitchFamily="34" charset="-122"/>
                 <a:cs typeface="Trebuchet MS" pitchFamily="34" charset="-120"/>
               </a:rPr>
-              <a:t>60.5%</a:t>
+              <a:t>67.9%</a:t>
             </a:r>
             <a:endParaRPr lang="en-US" sz="3600" dirty="0"/>
           </a:p>
@@ -8621,7 +8621,7 @@
                 <a:ea typeface="Trebuchet MS" pitchFamily="34" charset="-122"/>
                 <a:cs typeface="Trebuchet MS" pitchFamily="34" charset="-120"/>
               </a:rPr>
-              <a:t>60.5%</a:t>
+              <a:t>67.9%</a:t>
             </a:r>
             <a:endParaRPr lang="en-US" sz="2200" dirty="0"/>
           </a:p>
@@ -9377,7 +9377,7 @@
                 <a:ea typeface="Trebuchet MS" pitchFamily="34" charset="-122"/>
                 <a:cs typeface="Trebuchet MS" pitchFamily="34" charset="-120"/>
               </a:rPr>
-              <a:t>+68.1%</a:t>
+              <a:t>+67.9%</a:t>
             </a:r>
             <a:endParaRPr lang="en-US" sz="3600" dirty="0"/>
           </a:p>
@@ -9594,7 +9594,7 @@
                 <a:ea typeface="Calibri" pitchFamily="34" charset="-122"/>
                 <a:cs typeface="Calibri" pitchFamily="34" charset="-120"/>
               </a:rPr>
-              <a:t>Conclusion: The 68.1% improvement in ROUGE-1 (T5-base 0.4584 vs TextRank 0.2730) strongly supports H1 on this evaluation set that abstractive summarization substantially outperforms extractive methods on CNN/DailyMail.</a:t>
+              <a:t>Conclusion: The 67.9% improvement in ROUGE-1 (T5-base 0.4584 vs TextRank 0.2730) on the 50-article evaluation set strongly supports H1 — abstractive summarization substantially outperforms extractive methods.</a:t>
             </a:r>
             <a:endParaRPr lang="en-US" sz="1100" dirty="0"/>
           </a:p>
@@ -9884,7 +9884,7 @@
                 <a:ea typeface="Calibri" pitchFamily="34" charset="-122"/>
                 <a:cs typeface="Calibri" pitchFamily="34" charset="-120"/>
               </a:rPr>
-              <a:t>T5-base achieves ROUGE-1 of 0.4584 vs best extractive (TextRank) at 0.2730 — a 60.5% advantage. Confirms abstractive generation produces more human-like summaries.</a:t>
+              <a:t>T5-base achieves ROUGE-1 of 0.4584 vs best extractive (TextRank) at 0.2730 — a 67.9% advantage. Confirms abstractive generation produces more human-like summaries.</a:t>
             </a:r>
             <a:endParaRPr lang="en-US" sz="1100" dirty="0"/>
           </a:p>
@@ -10028,7 +10028,7 @@
                 <a:ea typeface="Calibri" pitchFamily="34" charset="-122"/>
                 <a:cs typeface="Calibri" pitchFamily="34" charset="-120"/>
               </a:rPr>
-              <a:t>T5-base ROUGE-1 = 0.4584 is comparable to the Lewis et al. 2020 BART baseline of 0.4416 — notable given T5-base uses half the parameters (220M vs 400M) and was fine-tuned on only 500 articles vs the full dataset.</a:t>
+              <a:t>T5-base ROUGE-1 = 0.4584 is comparable to the Lewis et al. 2020 BART baseline of 0.4416 — notable given T5-base uses ~55% of BART's parameters (220M vs 400M) and was fine-tuned on only 500 articles vs the full dataset.</a:t>
             </a:r>
             <a:endParaRPr lang="en-US" sz="1100" dirty="0"/>
           </a:p>
@@ -11259,7 +11259,7 @@
                 <a:ea typeface="Calibri" pitchFamily="34" charset="-122"/>
                 <a:cs typeface="Calibri" pitchFamily="34" charset="-120"/>
               </a:rPr>
-              <a:t>• 1.79s average response</a:t>
+              <a:t>• CPU warm: ~8–15s; cold start: ~15–30s</a:t>
             </a:r>
             <a:endParaRPr lang="en-US" sz="1000" dirty="0"/>
           </a:p>
@@ -13015,7 +13015,7 @@
                 <a:ea typeface="Calibri" pitchFamily="34" charset="-122"/>
                 <a:cs typeface="Calibri" pitchFamily="34" charset="-120"/>
               </a:rPr>
-              <a:t>• True performance gap vs extractive is likely larger than 60.5% indicates</a:t>
+              <a:t>• True performance gap vs extractive is likely larger than 67.9% indicates</a:t>
             </a:r>
             <a:endParaRPr lang="en-US" sz="1100" dirty="0"/>
           </a:p>
@@ -13392,7 +13392,7 @@
                 <a:ea typeface="Calibri" pitchFamily="34" charset="-122"/>
                 <a:cs typeface="Calibri" pitchFamily="34" charset="-120"/>
               </a:rPr>
-              <a:t>• 1,024-token ceiling truncates articles &gt;700–750 words during inference</a:t>
+              <a:t>• 512-token input ceiling truncates articles longer than ~380–400 words during inference</a:t>
             </a:r>
             <a:endParaRPr lang="en-US" sz="1100" dirty="0"/>
           </a:p>
@@ -13940,7 +13940,7 @@
                 <a:ea typeface="Calibri" pitchFamily="34" charset="-122"/>
                 <a:cs typeface="Calibri" pitchFamily="34" charset="-120"/>
               </a:rPr>
-              <a:t>T5-base ROUGE-1 of 0.4584 is comparable to the published BART baseline (Lewis et al. 2020: 0.4416) — achieved with half the parameters and 0.17% of the training data, confirming DocSnap's competitiveness.</a:t>
+              <a:t>T5-base ROUGE-1 of 0.4584 is comparable to the published BART baseline (Lewis et al. 2020: 0.4416) — achieved with ~55% of BART's parameters and 0.17% of the training data, confirming DocSnap's competitiveness.</a:t>
             </a:r>
             <a:endParaRPr lang="en-US" sz="1200" dirty="0"/>
           </a:p>
@@ -15932,7 +15932,7 @@
                 <a:ea typeface="Calibri" pitchFamily="34" charset="-122"/>
                 <a:cs typeface="Calibri" pitchFamily="34" charset="-120"/>
               </a:rPr>
-              <a:t>Google Colab free tier limits sessions to ~90 mins. Full 11,490 article evaluation would take 6–7 hours. At n=50, CI is ±0.028 — T5-base leads TextRank by 0.1854 (6× the margin), strongly supporting H1.</a:t>
+              <a:t>Google Colab free tier limits sessions to ~90 mins. Full 11,490 article evaluation would take 6–7 hours. At n=50, CI is ±0.028 — T5-base leads TextRank by 0.1854 (~6.6× the margin), strongly supporting H1.</a:t>
             </a:r>
             <a:endParaRPr lang="en-US" sz="1100" dirty="0"/>
           </a:p>
@@ -20482,7 +20482,7 @@
                 <a:ea typeface="Calibri" pitchFamily="34" charset="-122"/>
                 <a:cs typeface="Calibri" pitchFamily="34" charset="-120"/>
               </a:rPr>
-              <a:t>The two paradigms — and why abstractive wins by 60.5%</a:t>
+              <a:t>The two paradigms — and why abstractive wins by 67.9%</a:t>
             </a:r>
             <a:endParaRPr lang="en-US" sz="1400" dirty="0"/>
           </a:p>

--- a/DocSnap_Presentation.pptx
+++ b/DocSnap_Presentation.pptx
@@ -6989,7 +6989,7 @@
                 <a:ea typeface="Calibri" pitchFamily="34" charset="-122"/>
                 <a:cs typeface="Calibri" pitchFamily="34" charset="-120"/>
               </a:rPr>
-              <a:t>0.4821</a:t>
+              <a:t>0.5293</a:t>
             </a:r>
             <a:endParaRPr lang="en-US" sz="1100" dirty="0"/>
           </a:p>
@@ -7053,7 +7053,7 @@
                 <a:ea typeface="Calibri" pitchFamily="34" charset="-122"/>
                 <a:cs typeface="Calibri" pitchFamily="34" charset="-120"/>
               </a:rPr>
-              <a:t>0.3605</a:t>
+              <a:t>0.4563</a:t>
             </a:r>
             <a:endParaRPr lang="en-US" sz="1100" dirty="0"/>
           </a:p>
@@ -7181,7 +7181,7 @@
                 <a:ea typeface="Calibri" pitchFamily="34" charset="-122"/>
                 <a:cs typeface="Calibri" pitchFamily="34" charset="-120"/>
               </a:rPr>
-              <a:t>38.7%</a:t>
+              <a:t>44.1%</a:t>
             </a:r>
             <a:endParaRPr lang="en-US" sz="1100" dirty="0"/>
           </a:p>

--- a/DocSnap_Presentation.pptx
+++ b/DocSnap_Presentation.pptx
@@ -4,6 +4,9 @@
   <p:sldMasterIdLst>
     <p:sldMasterId id="2147483648" r:id="rId1"/>
   </p:sldMasterIdLst>
+  <p:notesMasterIdLst>
+    <p:notesMasterId r:id="rId23"/>
+  </p:notesMasterIdLst>
   <p:sldIdLst>
     <p:sldId id="256" r:id="rId2"/>
     <p:sldId id="257" r:id="rId3"/>
@@ -27,9 +30,6 @@
     <p:sldId id="275" r:id="rId21"/>
     <p:sldId id="276" r:id="rId22"/>
   </p:sldIdLst>
-  <p:notesMasterIdLst>
-    <p:notesMasterId r:id="rId23"/>
-  </p:notesMasterIdLst>
   <p:sldSz cx="12192000" cy="6858000"/>
   <p:notesSz cx="6858000" cy="12192000"/>
   <p:defaultTextStyle>
@@ -124,6 +124,11 @@
       </a:defRPr>
     </a:lvl9pPr>
   </p:defaultTextStyle>
+  <p:extLst>
+    <p:ext uri="{EFAFB233-063F-42B5-8137-9DF3F51BA10A}">
+      <p15:sldGuideLst xmlns:p15="http://schemas.microsoft.com/office/powerpoint/2012/main"/>
+    </p:ext>
+  </p:extLst>
 </p:presentation>
 </file>
 
@@ -149,234 +154,10 @@
           <a:chExt cx="0" cy="0"/>
         </a:xfrm>
       </p:grpSpPr>
-      <p:sp>
-        <p:nvSpPr>
-          <p:cNvPr id="2" name="Header Placeholder 1"/>
-          <p:cNvSpPr>
-            <a:spLocks noGrp="1"/>
-          </p:cNvSpPr>
-          <p:nvPr>
-            <p:ph type="hdr" sz="quarter"/>
-          </p:nvPr>
-        </p:nvSpPr>
-        <p:spPr>
-          <a:xfrm>
-            <a:off x="0" y="0"/>
-            <a:ext cx="2971800" cy="458788"/>
-          </a:xfrm>
-          <a:prstGeom prst="rect">
-            <a:avLst/>
-          </a:prstGeom>
-        </p:spPr>
-        <p:txBody>
-          <a:bodyPr vert="horz" lIns="91440" tIns="45720" rIns="91440" bIns="45720" rtlCol="0"/>
-          <a:lstStyle>
-            <a:lvl1pPr algn="l">
-              <a:defRPr sz="1200"/>
-            </a:lvl1pPr>
-          </a:lstStyle>
-          <a:p>
-            <a:endParaRPr lang="en-US"/>
-          </a:p>
-        </p:txBody>
-      </p:sp>
-      <p:sp>
-        <p:nvSpPr>
-          <p:cNvPr id="3" name="Date Placeholder 2"/>
-          <p:cNvSpPr>
-            <a:spLocks noGrp="1"/>
-          </p:cNvSpPr>
-          <p:nvPr>
-            <p:ph type="dt" idx="1"/>
-          </p:nvPr>
-        </p:nvSpPr>
-        <p:spPr>
-          <a:xfrm>
-            <a:off x="3884613" y="0"/>
-            <a:ext cx="2971800" cy="458788"/>
-          </a:xfrm>
-          <a:prstGeom prst="rect">
-            <a:avLst/>
-          </a:prstGeom>
-        </p:spPr>
-        <p:txBody>
-          <a:bodyPr vert="horz" lIns="91440" tIns="45720" rIns="91440" bIns="45720" rtlCol="0"/>
-          <a:lstStyle>
-            <a:lvl1pPr algn="r">
-              <a:defRPr sz="1200"/>
-            </a:lvl1pPr>
-          </a:lstStyle>
-          <a:p>
-            <a:fld id="{5282F153-3F37-0F45-9E97-73ACFA13230C}" type="datetimeFigureOut">
-              <a:rPr lang="en-US"/>
-              <a:t>7/23/19</a:t>
-            </a:fld>
-            <a:endParaRPr lang="en-US"/>
-          </a:p>
-        </p:txBody>
-      </p:sp>
-      <p:sp>
-        <p:nvSpPr>
-          <p:cNvPr id="4" name="Slide Image Placeholder 3"/>
-          <p:cNvSpPr>
-            <a:spLocks noGrp="1" noRot="1" noChangeAspect="1"/>
-          </p:cNvSpPr>
-          <p:nvPr>
-            <p:ph type="sldImg" idx="2"/>
-          </p:nvPr>
-        </p:nvSpPr>
-        <p:spPr>
-          <a:xfrm>
-            <a:off x="685800" y="1143000"/>
-            <a:ext cx="5486400" cy="3086100"/>
-          </a:xfrm>
-          <a:prstGeom prst="rect">
-            <a:avLst/>
-          </a:prstGeom>
-          <a:noFill/>
-          <a:ln w="12700">
-            <a:solidFill>
-              <a:prstClr val="black"/>
-            </a:solidFill>
-          </a:ln>
-        </p:spPr>
-        <p:txBody>
-          <a:bodyPr vert="horz" lIns="91440" tIns="45720" rIns="91440" bIns="45720" rtlCol="0" anchor="ctr"/>
-          <a:lstStyle/>
-          <a:p>
-            <a:endParaRPr lang="en-US"/>
-          </a:p>
-        </p:txBody>
-      </p:sp>
-      <p:sp>
-        <p:nvSpPr>
-          <p:cNvPr id="5" name="Notes Placeholder 4"/>
-          <p:cNvSpPr>
-            <a:spLocks noGrp="1"/>
-          </p:cNvSpPr>
-          <p:nvPr>
-            <p:ph type="body" sz="quarter" idx="3"/>
-          </p:nvPr>
-        </p:nvSpPr>
-        <p:spPr>
-          <a:xfrm>
-            <a:off x="685800" y="4400550"/>
-            <a:ext cx="5486400" cy="3600450"/>
-          </a:xfrm>
-          <a:prstGeom prst="rect">
-            <a:avLst/>
-          </a:prstGeom>
-        </p:spPr>
-        <p:txBody>
-          <a:bodyPr vert="horz" lIns="91440" tIns="45720" rIns="91440" bIns="45720" rtlCol="0"/>
-          <a:lstStyle/>
-          <a:p>
-            <a:pPr lvl="0"/>
-            <a:r>
-              <a:rPr lang="en-US"/>
-              <a:t>Click to edit Master text styles</a:t>
-            </a:r>
-          </a:p>
-          <a:p>
-            <a:pPr lvl="1"/>
-            <a:r>
-              <a:rPr lang="en-US"/>
-              <a:t>Second level</a:t>
-            </a:r>
-          </a:p>
-          <a:p>
-            <a:pPr lvl="2"/>
-            <a:r>
-              <a:rPr lang="en-US"/>
-              <a:t>Third level</a:t>
-            </a:r>
-          </a:p>
-          <a:p>
-            <a:pPr lvl="3"/>
-            <a:r>
-              <a:rPr lang="en-US"/>
-              <a:t>Fourth level</a:t>
-            </a:r>
-          </a:p>
-          <a:p>
-            <a:pPr lvl="4"/>
-            <a:r>
-              <a:rPr lang="en-US"/>
-              <a:t>Fifth level</a:t>
-            </a:r>
-          </a:p>
-        </p:txBody>
-      </p:sp>
-      <p:sp>
-        <p:nvSpPr>
-          <p:cNvPr id="6" name="Footer Placeholder 5"/>
-          <p:cNvSpPr>
-            <a:spLocks noGrp="1"/>
-          </p:cNvSpPr>
-          <p:nvPr>
-            <p:ph type="ftr" sz="quarter" idx="4"/>
-          </p:nvPr>
-        </p:nvSpPr>
-        <p:spPr>
-          <a:xfrm>
-            <a:off x="0" y="8685213"/>
-            <a:ext cx="2971800" cy="458787"/>
-          </a:xfrm>
-          <a:prstGeom prst="rect">
-            <a:avLst/>
-          </a:prstGeom>
-        </p:spPr>
-        <p:txBody>
-          <a:bodyPr vert="horz" lIns="91440" tIns="45720" rIns="91440" bIns="45720" rtlCol="0" anchor="b"/>
-          <a:lstStyle>
-            <a:lvl1pPr algn="l">
-              <a:defRPr sz="1200"/>
-            </a:lvl1pPr>
-          </a:lstStyle>
-          <a:p>
-            <a:endParaRPr lang="en-US"/>
-          </a:p>
-        </p:txBody>
-      </p:sp>
-      <p:sp>
-        <p:nvSpPr>
-          <p:cNvPr id="7" name="Slide Number Placeholder 6"/>
-          <p:cNvSpPr>
-            <a:spLocks noGrp="1"/>
-          </p:cNvSpPr>
-          <p:nvPr>
-            <p:ph type="sldNum" sz="quarter" idx="5"/>
-          </p:nvPr>
-        </p:nvSpPr>
-        <p:spPr>
-          <a:xfrm>
-            <a:off x="3884613" y="8685213"/>
-            <a:ext cx="2971800" cy="458787"/>
-          </a:xfrm>
-          <a:prstGeom prst="rect">
-            <a:avLst/>
-          </a:prstGeom>
-        </p:spPr>
-        <p:txBody>
-          <a:bodyPr vert="horz" lIns="91440" tIns="45720" rIns="91440" bIns="45720" rtlCol="0" anchor="b"/>
-          <a:lstStyle>
-            <a:lvl1pPr algn="r">
-              <a:defRPr sz="1200"/>
-            </a:lvl1pPr>
-          </a:lstStyle>
-          <a:p>
-            <a:fld id="{CE5E9CC1-C706-0F49-92D6-E571CC5EEA8F}" type="slidenum">
-              <a:rPr lang="en-US"/>
-              <a:t>‹#›</a:t>
-            </a:fld>
-            <a:endParaRPr lang="en-US"/>
-          </a:p>
-        </p:txBody>
-      </p:sp>
     </p:spTree>
     <p:extLst>
       <p:ext uri="{BB962C8B-B14F-4D97-AF65-F5344CB8AC3E}">
-        <p14:creationId xmlns:p14="http://schemas.microsoft.com/office/powerpoint/2010/main" val="1024086991"/>
+        <p14:creationId xmlns:p14="http://schemas.microsoft.com/office/powerpoint/2010/main" val="2645721174"/>
       </p:ext>
     </p:extLst>
   </p:cSld>
@@ -520,10 +301,6 @@
           <a:bodyPr/>
           <a:lstStyle/>
           <a:p>
-            <a:r>
-              <a:rPr lang="en-US" dirty="0"/>
-              <a:t/>
-            </a:r>
             <a:endParaRPr lang="en-US" dirty="0"/>
           </a:p>
         </p:txBody>
@@ -608,10 +385,6 @@
           <a:bodyPr/>
           <a:lstStyle/>
           <a:p>
-            <a:r>
-              <a:rPr lang="en-US" dirty="0"/>
-              <a:t/>
-            </a:r>
             <a:endParaRPr lang="en-US" dirty="0"/>
           </a:p>
         </p:txBody>
@@ -696,10 +469,6 @@
           <a:bodyPr/>
           <a:lstStyle/>
           <a:p>
-            <a:r>
-              <a:rPr lang="en-US" dirty="0"/>
-              <a:t/>
-            </a:r>
             <a:endParaRPr lang="en-US" dirty="0"/>
           </a:p>
         </p:txBody>
@@ -784,10 +553,6 @@
           <a:bodyPr/>
           <a:lstStyle/>
           <a:p>
-            <a:r>
-              <a:rPr lang="en-US" dirty="0"/>
-              <a:t/>
-            </a:r>
             <a:endParaRPr lang="en-US" dirty="0"/>
           </a:p>
         </p:txBody>
@@ -872,10 +637,6 @@
           <a:bodyPr/>
           <a:lstStyle/>
           <a:p>
-            <a:r>
-              <a:rPr lang="en-US" dirty="0"/>
-              <a:t/>
-            </a:r>
             <a:endParaRPr lang="en-US" dirty="0"/>
           </a:p>
         </p:txBody>
@@ -960,10 +721,6 @@
           <a:bodyPr/>
           <a:lstStyle/>
           <a:p>
-            <a:r>
-              <a:rPr lang="en-US" dirty="0"/>
-              <a:t/>
-            </a:r>
             <a:endParaRPr lang="en-US" dirty="0"/>
           </a:p>
         </p:txBody>
@@ -1048,10 +805,6 @@
           <a:bodyPr/>
           <a:lstStyle/>
           <a:p>
-            <a:r>
-              <a:rPr lang="en-US" dirty="0"/>
-              <a:t/>
-            </a:r>
             <a:endParaRPr lang="en-US" dirty="0"/>
           </a:p>
         </p:txBody>
@@ -1136,10 +889,6 @@
           <a:bodyPr/>
           <a:lstStyle/>
           <a:p>
-            <a:r>
-              <a:rPr lang="en-US" dirty="0"/>
-              <a:t/>
-            </a:r>
             <a:endParaRPr lang="en-US" dirty="0"/>
           </a:p>
         </p:txBody>
@@ -1224,10 +973,6 @@
           <a:bodyPr/>
           <a:lstStyle/>
           <a:p>
-            <a:r>
-              <a:rPr lang="en-US" dirty="0"/>
-              <a:t/>
-            </a:r>
             <a:endParaRPr lang="en-US" dirty="0"/>
           </a:p>
         </p:txBody>
@@ -1312,10 +1057,6 @@
           <a:bodyPr/>
           <a:lstStyle/>
           <a:p>
-            <a:r>
-              <a:rPr lang="en-US" dirty="0"/>
-              <a:t/>
-            </a:r>
             <a:endParaRPr lang="en-US" dirty="0"/>
           </a:p>
         </p:txBody>
@@ -1400,10 +1141,6 @@
           <a:bodyPr/>
           <a:lstStyle/>
           <a:p>
-            <a:r>
-              <a:rPr lang="en-US" dirty="0"/>
-              <a:t/>
-            </a:r>
             <a:endParaRPr lang="en-US" dirty="0"/>
           </a:p>
         </p:txBody>
@@ -1488,10 +1225,6 @@
           <a:bodyPr/>
           <a:lstStyle/>
           <a:p>
-            <a:r>
-              <a:rPr lang="en-US" dirty="0"/>
-              <a:t/>
-            </a:r>
             <a:endParaRPr lang="en-US" dirty="0"/>
           </a:p>
         </p:txBody>
@@ -1576,10 +1309,6 @@
           <a:bodyPr/>
           <a:lstStyle/>
           <a:p>
-            <a:r>
-              <a:rPr lang="en-US" dirty="0"/>
-              <a:t/>
-            </a:r>
             <a:endParaRPr lang="en-US" dirty="0"/>
           </a:p>
         </p:txBody>
@@ -1664,10 +1393,6 @@
           <a:bodyPr/>
           <a:lstStyle/>
           <a:p>
-            <a:r>
-              <a:rPr lang="en-US" dirty="0"/>
-              <a:t/>
-            </a:r>
             <a:endParaRPr lang="en-US" dirty="0"/>
           </a:p>
         </p:txBody>
@@ -1752,10 +1477,6 @@
           <a:bodyPr/>
           <a:lstStyle/>
           <a:p>
-            <a:r>
-              <a:rPr lang="en-US" dirty="0"/>
-              <a:t/>
-            </a:r>
             <a:endParaRPr lang="en-US" dirty="0"/>
           </a:p>
         </p:txBody>
@@ -1840,10 +1561,6 @@
           <a:bodyPr/>
           <a:lstStyle/>
           <a:p>
-            <a:r>
-              <a:rPr lang="en-US" dirty="0"/>
-              <a:t/>
-            </a:r>
             <a:endParaRPr lang="en-US" dirty="0"/>
           </a:p>
         </p:txBody>
@@ -1928,10 +1645,6 @@
           <a:bodyPr/>
           <a:lstStyle/>
           <a:p>
-            <a:r>
-              <a:rPr lang="en-US" dirty="0"/>
-              <a:t/>
-            </a:r>
             <a:endParaRPr lang="en-US" dirty="0"/>
           </a:p>
         </p:txBody>
@@ -2016,10 +1729,6 @@
           <a:bodyPr/>
           <a:lstStyle/>
           <a:p>
-            <a:r>
-              <a:rPr lang="en-US" dirty="0"/>
-              <a:t/>
-            </a:r>
             <a:endParaRPr lang="en-US" dirty="0"/>
           </a:p>
         </p:txBody>
@@ -2104,10 +1813,6 @@
           <a:bodyPr/>
           <a:lstStyle/>
           <a:p>
-            <a:r>
-              <a:rPr lang="en-US" dirty="0"/>
-              <a:t/>
-            </a:r>
             <a:endParaRPr lang="en-US" dirty="0"/>
           </a:p>
         </p:txBody>
@@ -2192,10 +1897,6 @@
           <a:bodyPr/>
           <a:lstStyle/>
           <a:p>
-            <a:r>
-              <a:rPr lang="en-US" dirty="0"/>
-              <a:t/>
-            </a:r>
             <a:endParaRPr lang="en-US" dirty="0"/>
           </a:p>
         </p:txBody>
@@ -2280,10 +1981,6 @@
           <a:bodyPr/>
           <a:lstStyle/>
           <a:p>
-            <a:r>
-              <a:rPr lang="en-US" dirty="0"/>
-              <a:t/>
-            </a:r>
             <a:endParaRPr lang="en-US" dirty="0"/>
           </a:p>
         </p:txBody>
@@ -2351,12 +2048,29 @@
   <p:clrMapOvr>
     <a:masterClrMapping/>
   </p:clrMapOvr>
+  <mc:AlternateContent xmlns:mc="http://schemas.openxmlformats.org/markup-compatibility/2006" xmlns:p14="http://schemas.microsoft.com/office/powerpoint/2010/main">
+    <mc:Choice Requires="p14">
+      <p:transition spd="slow" p14:dur="3400">
+        <p14:reveal/>
+      </p:transition>
+    </mc:Choice>
+    <mc:Fallback xmlns="">
+      <p:transition spd="slow">
+        <p:fade/>
+      </p:transition>
+    </mc:Fallback>
+  </mc:AlternateContent>
 </p:sldLayout>
 </file>
 
 <file path=ppt/slideMasters/slideMaster1.xml><?xml version="1.0" encoding="utf-8"?>
 <p:sldMaster xmlns:a="http://schemas.openxmlformats.org/drawingml/2006/main" xmlns:r="http://schemas.openxmlformats.org/officeDocument/2006/relationships" xmlns:p="http://schemas.openxmlformats.org/presentationml/2006/main">
   <p:cSld>
+    <p:bg>
+      <p:bgRef idx="1001">
+        <a:schemeClr val="bg1"/>
+      </p:bgRef>
+    </p:bg>
     <p:spTree>
       <p:nvGrpSpPr>
         <p:cNvPr id="1" name=""/>
@@ -2377,6 +2091,18 @@
   <p:sldLayoutIdLst>
     <p:sldLayoutId id="2147483649" r:id="rId1"/>
   </p:sldLayoutIdLst>
+  <mc:AlternateContent xmlns:mc="http://schemas.openxmlformats.org/markup-compatibility/2006" xmlns:p14="http://schemas.microsoft.com/office/powerpoint/2010/main">
+    <mc:Choice Requires="p14">
+      <p:transition spd="slow" p14:dur="3400">
+        <p14:reveal/>
+      </p:transition>
+    </mc:Choice>
+    <mc:Fallback xmlns="">
+      <p:transition spd="slow">
+        <p:fade/>
+      </p:transition>
+    </mc:Fallback>
+  </mc:AlternateContent>
   <p:hf sldNum="0" hdr="0" ftr="0" dt="0"/>
   <p:txStyles>
     <p:titleStyle>
@@ -2639,6 +2365,7 @@
         <a:solidFill>
           <a:srgbClr val="0F2A2C"/>
         </a:solidFill>
+        <a:effectLst/>
       </p:bgPr>
     </p:bg>
     <p:spTree>
@@ -2701,11 +2428,11 @@
           <a:bodyPr wrap="square" rtlCol="0" anchor="ctr"/>
           <a:lstStyle/>
           <a:p>
-            <a:pPr indent="0" marL="0">
-              <a:buNone/>
-            </a:pPr>
-            <a:r>
-              <a:rPr lang="en-US" sz="900" b="1" spc="150" kern="0" dirty="0">
+            <a:pPr marL="0" indent="0">
+              <a:buNone/>
+            </a:pPr>
+            <a:r>
+              <a:rPr lang="en-US" sz="900" b="1" kern="0" spc="150" dirty="0">
                 <a:solidFill>
                   <a:srgbClr val="01696F"/>
                 </a:solidFill>
@@ -2740,7 +2467,7 @@
           <a:bodyPr wrap="square" rtlCol="0" anchor="ctr"/>
           <a:lstStyle/>
           <a:p>
-            <a:pPr indent="0" marL="0">
+            <a:pPr marL="0" indent="0">
               <a:buNone/>
             </a:pPr>
             <a:r>
@@ -2779,7 +2506,7 @@
           <a:bodyPr wrap="square" rtlCol="0" anchor="ctr"/>
           <a:lstStyle/>
           <a:p>
-            <a:pPr indent="0" marL="0">
+            <a:pPr marL="0" indent="0">
               <a:buNone/>
             </a:pPr>
             <a:r>
@@ -2843,7 +2570,7 @@
           <a:bodyPr wrap="square" rtlCol="0" anchor="ctr"/>
           <a:lstStyle/>
           <a:p>
-            <a:pPr indent="0" marL="0">
+            <a:pPr marL="0" indent="0">
               <a:buNone/>
             </a:pPr>
             <a:r>
@@ -2909,7 +2636,7 @@
           <a:bodyPr wrap="square" rtlCol="0" anchor="ctr"/>
           <a:lstStyle/>
           <a:p>
-            <a:pPr algn="ctr" indent="0" marL="0">
+            <a:pPr marL="0" indent="0" algn="ctr">
               <a:buNone/>
             </a:pPr>
             <a:r>
@@ -2948,7 +2675,7 @@
           <a:bodyPr wrap="square" rtlCol="0" anchor="ctr"/>
           <a:lstStyle/>
           <a:p>
-            <a:pPr algn="ctr" indent="0" marL="0">
+            <a:pPr marL="0" indent="0" algn="ctr">
               <a:buNone/>
             </a:pPr>
             <a:r>
@@ -3014,7 +2741,7 @@
           <a:bodyPr wrap="square" rtlCol="0" anchor="ctr"/>
           <a:lstStyle/>
           <a:p>
-            <a:pPr algn="ctr" indent="0" marL="0">
+            <a:pPr marL="0" indent="0" algn="ctr">
               <a:buNone/>
             </a:pPr>
             <a:r>
@@ -3053,7 +2780,7 @@
           <a:bodyPr wrap="square" rtlCol="0" anchor="ctr"/>
           <a:lstStyle/>
           <a:p>
-            <a:pPr algn="ctr" indent="0" marL="0">
+            <a:pPr marL="0" indent="0" algn="ctr">
               <a:buNone/>
             </a:pPr>
             <a:r>
@@ -3119,7 +2846,7 @@
           <a:bodyPr wrap="square" rtlCol="0" anchor="ctr"/>
           <a:lstStyle/>
           <a:p>
-            <a:pPr algn="ctr" indent="0" marL="0">
+            <a:pPr marL="0" indent="0" algn="ctr">
               <a:buNone/>
             </a:pPr>
             <a:r>
@@ -3158,7 +2885,7 @@
           <a:bodyPr wrap="square" rtlCol="0" anchor="ctr"/>
           <a:lstStyle/>
           <a:p>
-            <a:pPr algn="ctr" indent="0" marL="0">
+            <a:pPr marL="0" indent="0" algn="ctr">
               <a:buNone/>
             </a:pPr>
             <a:r>
@@ -3224,7 +2951,7 @@
           <a:bodyPr wrap="square" rtlCol="0" anchor="ctr"/>
           <a:lstStyle/>
           <a:p>
-            <a:pPr algn="ctr" indent="0" marL="0">
+            <a:pPr marL="0" indent="0" algn="ctr">
               <a:buNone/>
             </a:pPr>
             <a:r>
@@ -3263,7 +2990,7 @@
           <a:bodyPr wrap="square" rtlCol="0" anchor="ctr"/>
           <a:lstStyle/>
           <a:p>
-            <a:pPr algn="ctr" indent="0" marL="0">
+            <a:pPr marL="0" indent="0" algn="ctr">
               <a:buNone/>
             </a:pPr>
             <a:r>
@@ -3302,7 +3029,7 @@
           <a:bodyPr wrap="square" rtlCol="0" anchor="ctr"/>
           <a:lstStyle/>
           <a:p>
-            <a:pPr indent="0" marL="0">
+            <a:pPr marL="0" indent="0">
               <a:buNone/>
             </a:pPr>
             <a:r>
@@ -3325,6 +3052,18 @@
   <p:clrMapOvr>
     <a:masterClrMapping/>
   </p:clrMapOvr>
+  <mc:AlternateContent xmlns:mc="http://schemas.openxmlformats.org/markup-compatibility/2006" xmlns:p14="http://schemas.microsoft.com/office/powerpoint/2010/main">
+    <mc:Choice Requires="p14">
+      <p:transition spd="slow" p14:dur="3400">
+        <p14:reveal/>
+      </p:transition>
+    </mc:Choice>
+    <mc:Fallback xmlns="">
+      <p:transition spd="slow">
+        <p:fade/>
+      </p:transition>
+    </mc:Fallback>
+  </mc:AlternateContent>
 </p:sld>
 </file>
 
@@ -3336,6 +3075,7 @@
         <a:solidFill>
           <a:srgbClr val="F7F6F2"/>
         </a:solidFill>
+        <a:effectLst/>
       </p:bgPr>
     </p:bg>
     <p:spTree>
@@ -3373,11 +3113,11 @@
           <a:bodyPr wrap="square" rtlCol="0" anchor="ctr"/>
           <a:lstStyle/>
           <a:p>
-            <a:pPr indent="0" marL="0">
-              <a:buNone/>
-            </a:pPr>
-            <a:r>
-              <a:rPr lang="en-US" sz="900" b="1" spc="200" kern="0" dirty="0">
+            <a:pPr marL="0" indent="0">
+              <a:buNone/>
+            </a:pPr>
+            <a:r>
+              <a:rPr lang="en-US" sz="900" b="1" kern="0" spc="200" dirty="0">
                 <a:solidFill>
                   <a:srgbClr val="01696F"/>
                 </a:solidFill>
@@ -3409,7 +3149,7 @@
           <a:bodyPr wrap="square" rtlCol="0" anchor="ctr"/>
           <a:lstStyle/>
           <a:p>
-            <a:pPr indent="0" marL="0">
+            <a:pPr marL="0" indent="0">
               <a:buNone/>
             </a:pPr>
             <a:r>
@@ -3448,7 +3188,7 @@
           <a:bodyPr wrap="square" rtlCol="0" anchor="ctr"/>
           <a:lstStyle/>
           <a:p>
-            <a:pPr indent="0" marL="0">
+            <a:pPr marL="0" indent="0">
               <a:buNone/>
             </a:pPr>
             <a:r>
@@ -3514,7 +3254,7 @@
           <a:bodyPr wrap="square" rtlCol="0" anchor="ctr"/>
           <a:lstStyle/>
           <a:p>
-            <a:pPr algn="ctr" indent="0" marL="0">
+            <a:pPr marL="0" indent="0" algn="ctr">
               <a:buNone/>
             </a:pPr>
             <a:r>
@@ -3553,7 +3293,7 @@
           <a:bodyPr wrap="square" rtlCol="0" anchor="ctr"/>
           <a:lstStyle/>
           <a:p>
-            <a:pPr algn="ctr" indent="0" marL="0">
+            <a:pPr marL="0" indent="0" algn="ctr">
               <a:buNone/>
             </a:pPr>
             <a:r>
@@ -3619,7 +3359,7 @@
           <a:bodyPr wrap="square" rtlCol="0" anchor="ctr"/>
           <a:lstStyle/>
           <a:p>
-            <a:pPr algn="ctr" indent="0" marL="0">
+            <a:pPr marL="0" indent="0" algn="ctr">
               <a:buNone/>
             </a:pPr>
             <a:r>
@@ -3658,7 +3398,7 @@
           <a:bodyPr wrap="square" rtlCol="0" anchor="ctr"/>
           <a:lstStyle/>
           <a:p>
-            <a:pPr algn="ctr" indent="0" marL="0">
+            <a:pPr marL="0" indent="0" algn="ctr">
               <a:buNone/>
             </a:pPr>
             <a:r>
@@ -3724,7 +3464,7 @@
           <a:bodyPr wrap="square" rtlCol="0" anchor="ctr"/>
           <a:lstStyle/>
           <a:p>
-            <a:pPr algn="ctr" indent="0" marL="0">
+            <a:pPr marL="0" indent="0" algn="ctr">
               <a:buNone/>
             </a:pPr>
             <a:r>
@@ -3763,7 +3503,7 @@
           <a:bodyPr wrap="square" rtlCol="0" anchor="ctr"/>
           <a:lstStyle/>
           <a:p>
-            <a:pPr algn="ctr" indent="0" marL="0">
+            <a:pPr marL="0" indent="0" algn="ctr">
               <a:buNone/>
             </a:pPr>
             <a:r>
@@ -3829,7 +3569,7 @@
           <a:bodyPr wrap="square" rtlCol="0" anchor="ctr"/>
           <a:lstStyle/>
           <a:p>
-            <a:pPr algn="ctr" indent="0" marL="0">
+            <a:pPr marL="0" indent="0" algn="ctr">
               <a:buNone/>
             </a:pPr>
             <a:r>
@@ -3868,7 +3608,7 @@
           <a:bodyPr wrap="square" rtlCol="0" anchor="ctr"/>
           <a:lstStyle/>
           <a:p>
-            <a:pPr algn="ctr" indent="0" marL="0">
+            <a:pPr marL="0" indent="0" algn="ctr">
               <a:buNone/>
             </a:pPr>
             <a:r>
@@ -3888,14 +3628,14 @@
       </p:sp>
       <p:pic>
         <p:nvPicPr>
-          <p:cNvPr id="17" name="Image 0" descr="/home/user/workspace/DocSnap_WordFreq_Comparison.png">    </p:cNvPr>
+          <p:cNvPr id="17" name="Image 0" descr="/home/user/workspace/DocSnap_WordFreq_Comparison.png"/>
           <p:cNvPicPr>
             <a:picLocks noChangeAspect="1"/>
           </p:cNvPicPr>
           <p:nvPr/>
         </p:nvPicPr>
         <p:blipFill>
-          <a:blip r:embed="rId1"/>
+          <a:blip r:embed="rId3"/>
           <a:stretch>
             <a:fillRect/>
           </a:stretch>
@@ -3912,14 +3652,14 @@
       </p:pic>
       <p:pic>
         <p:nvPicPr>
-          <p:cNvPr id="18" name="Image 1" descr="/home/user/workspace/DocSnap_NER_Distribution.png">    </p:cNvPr>
+          <p:cNvPr id="18" name="Image 1" descr="/home/user/workspace/DocSnap_NER_Distribution.png"/>
           <p:cNvPicPr>
             <a:picLocks noChangeAspect="1"/>
           </p:cNvPicPr>
           <p:nvPr/>
         </p:nvPicPr>
         <p:blipFill>
-          <a:blip r:embed="rId2"/>
+          <a:blip r:embed="rId4"/>
           <a:stretch>
             <a:fillRect/>
           </a:stretch>
@@ -3955,7 +3695,7 @@
           <a:bodyPr wrap="square" rtlCol="0" anchor="ctr"/>
           <a:lstStyle/>
           <a:p>
-            <a:pPr indent="0" marL="0">
+            <a:pPr marL="0" indent="0">
               <a:buNone/>
             </a:pPr>
             <a:r>
@@ -3994,7 +3734,7 @@
           <a:bodyPr wrap="square" rtlCol="0" anchor="ctr"/>
           <a:lstStyle/>
           <a:p>
-            <a:pPr indent="0" marL="0">
+            <a:pPr marL="0" indent="0">
               <a:buNone/>
             </a:pPr>
             <a:r>
@@ -4017,6 +3757,18 @@
   <p:clrMapOvr>
     <a:masterClrMapping/>
   </p:clrMapOvr>
+  <mc:AlternateContent xmlns:mc="http://schemas.openxmlformats.org/markup-compatibility/2006" xmlns:p14="http://schemas.microsoft.com/office/powerpoint/2010/main">
+    <mc:Choice Requires="p14">
+      <p:transition spd="slow" p14:dur="3400">
+        <p14:reveal/>
+      </p:transition>
+    </mc:Choice>
+    <mc:Fallback xmlns="">
+      <p:transition spd="slow">
+        <p:fade/>
+      </p:transition>
+    </mc:Fallback>
+  </mc:AlternateContent>
 </p:sld>
 </file>
 
@@ -4028,6 +3780,7 @@
         <a:solidFill>
           <a:srgbClr val="F7F6F2"/>
         </a:solidFill>
+        <a:effectLst/>
       </p:bgPr>
     </p:bg>
     <p:spTree>
@@ -4065,11 +3818,11 @@
           <a:bodyPr wrap="square" rtlCol="0" anchor="ctr"/>
           <a:lstStyle/>
           <a:p>
-            <a:pPr indent="0" marL="0">
-              <a:buNone/>
-            </a:pPr>
-            <a:r>
-              <a:rPr lang="en-US" sz="900" b="1" spc="200" kern="0" dirty="0">
+            <a:pPr marL="0" indent="0">
+              <a:buNone/>
+            </a:pPr>
+            <a:r>
+              <a:rPr lang="en-US" sz="900" b="1" kern="0" spc="200" dirty="0">
                 <a:solidFill>
                   <a:srgbClr val="01696F"/>
                 </a:solidFill>
@@ -4101,7 +3854,7 @@
           <a:bodyPr wrap="square" rtlCol="0" anchor="ctr"/>
           <a:lstStyle/>
           <a:p>
-            <a:pPr indent="0" marL="0">
+            <a:pPr marL="0" indent="0">
               <a:buNone/>
             </a:pPr>
             <a:r>
@@ -4140,7 +3893,7 @@
           <a:bodyPr wrap="square" rtlCol="0" anchor="ctr"/>
           <a:lstStyle/>
           <a:p>
-            <a:pPr indent="0" marL="0">
+            <a:pPr marL="0" indent="0">
               <a:buNone/>
             </a:pPr>
             <a:r>
@@ -4231,7 +3984,7 @@
           <a:bodyPr wrap="square" rtlCol="0" anchor="ctr"/>
           <a:lstStyle/>
           <a:p>
-            <a:pPr indent="0" marL="0">
+            <a:pPr marL="0" indent="0">
               <a:buNone/>
             </a:pPr>
             <a:r>
@@ -4270,7 +4023,7 @@
           <a:bodyPr wrap="square" rtlCol="0" anchor="ctr"/>
           <a:lstStyle/>
           <a:p>
-            <a:pPr indent="0" marL="0">
+            <a:pPr marL="0" indent="0">
               <a:buNone/>
             </a:pPr>
             <a:r>
@@ -4309,7 +4062,7 @@
           <a:bodyPr wrap="square" rtlCol="0" anchor="ctr"/>
           <a:lstStyle/>
           <a:p>
-            <a:pPr indent="0" marL="0">
+            <a:pPr marL="0" indent="0">
               <a:buNone/>
             </a:pPr>
             <a:r>
@@ -4348,7 +4101,7 @@
           <a:bodyPr wrap="square" rtlCol="0" anchor="ctr"/>
           <a:lstStyle/>
           <a:p>
-            <a:pPr indent="0" marL="0">
+            <a:pPr marL="0" indent="0">
               <a:buNone/>
             </a:pPr>
             <a:r>
@@ -4387,7 +4140,7 @@
           <a:bodyPr wrap="square" rtlCol="0" anchor="ctr"/>
           <a:lstStyle/>
           <a:p>
-            <a:pPr indent="0" marL="0">
+            <a:pPr marL="0" indent="0">
               <a:buNone/>
             </a:pPr>
             <a:r>
@@ -4426,7 +4179,7 @@
           <a:bodyPr wrap="square" rtlCol="0" anchor="ctr"/>
           <a:lstStyle/>
           <a:p>
-            <a:pPr indent="0" marL="0">
+            <a:pPr marL="0" indent="0">
               <a:buNone/>
             </a:pPr>
             <a:r>
@@ -4490,7 +4243,7 @@
           <a:bodyPr wrap="square" rtlCol="0" anchor="ctr"/>
           <a:lstStyle/>
           <a:p>
-            <a:pPr indent="0" marL="0">
+            <a:pPr marL="0" indent="0">
               <a:buNone/>
             </a:pPr>
             <a:r>
@@ -4529,7 +4282,7 @@
           <a:bodyPr wrap="square" rtlCol="0" anchor="ctr"/>
           <a:lstStyle/>
           <a:p>
-            <a:pPr indent="0" marL="0">
+            <a:pPr marL="0" indent="0">
               <a:buNone/>
             </a:pPr>
             <a:r>
@@ -4568,7 +4321,7 @@
           <a:bodyPr wrap="square" rtlCol="0" anchor="ctr"/>
           <a:lstStyle/>
           <a:p>
-            <a:pPr indent="0" marL="0">
+            <a:pPr marL="0" indent="0">
               <a:buNone/>
             </a:pPr>
             <a:r>
@@ -4607,7 +4360,7 @@
           <a:bodyPr wrap="square" rtlCol="0" anchor="ctr"/>
           <a:lstStyle/>
           <a:p>
-            <a:pPr indent="0" marL="0">
+            <a:pPr marL="0" indent="0">
               <a:buNone/>
             </a:pPr>
             <a:r>
@@ -4646,7 +4399,7 @@
           <a:bodyPr wrap="square" rtlCol="0" anchor="ctr"/>
           <a:lstStyle/>
           <a:p>
-            <a:pPr indent="0" marL="0">
+            <a:pPr marL="0" indent="0">
               <a:buNone/>
             </a:pPr>
             <a:r>
@@ -4685,7 +4438,7 @@
           <a:bodyPr wrap="square" rtlCol="0" anchor="ctr"/>
           <a:lstStyle/>
           <a:p>
-            <a:pPr indent="0" marL="0">
+            <a:pPr marL="0" indent="0">
               <a:buNone/>
             </a:pPr>
             <a:r>
@@ -4776,7 +4529,7 @@
           <a:bodyPr wrap="square" rtlCol="0" anchor="ctr"/>
           <a:lstStyle/>
           <a:p>
-            <a:pPr indent="0" marL="0">
+            <a:pPr marL="0" indent="0">
               <a:buNone/>
             </a:pPr>
             <a:r>
@@ -4815,7 +4568,7 @@
           <a:bodyPr wrap="square" rtlCol="0" anchor="ctr"/>
           <a:lstStyle/>
           <a:p>
-            <a:pPr indent="0" marL="0">
+            <a:pPr marL="0" indent="0">
               <a:buNone/>
             </a:pPr>
             <a:r>
@@ -4854,7 +4607,7 @@
           <a:bodyPr wrap="square" rtlCol="0" anchor="ctr"/>
           <a:lstStyle/>
           <a:p>
-            <a:pPr indent="0" marL="0">
+            <a:pPr marL="0" indent="0">
               <a:buNone/>
             </a:pPr>
             <a:r>
@@ -4893,7 +4646,7 @@
           <a:bodyPr wrap="square" rtlCol="0" anchor="ctr"/>
           <a:lstStyle/>
           <a:p>
-            <a:pPr indent="0" marL="0">
+            <a:pPr marL="0" indent="0">
               <a:buNone/>
             </a:pPr>
             <a:r>
@@ -4932,7 +4685,7 @@
           <a:bodyPr wrap="square" rtlCol="0" anchor="ctr"/>
           <a:lstStyle/>
           <a:p>
-            <a:pPr indent="0" marL="0">
+            <a:pPr marL="0" indent="0">
               <a:buNone/>
             </a:pPr>
             <a:r>
@@ -4971,7 +4724,7 @@
           <a:bodyPr wrap="square" rtlCol="0" anchor="ctr"/>
           <a:lstStyle/>
           <a:p>
-            <a:pPr indent="0" marL="0">
+            <a:pPr marL="0" indent="0">
               <a:buNone/>
             </a:pPr>
             <a:r>
@@ -5035,7 +4788,7 @@
           <a:bodyPr wrap="square" rtlCol="0" anchor="ctr"/>
           <a:lstStyle/>
           <a:p>
-            <a:pPr indent="0" marL="0">
+            <a:pPr marL="0" indent="0">
               <a:buNone/>
             </a:pPr>
             <a:r>
@@ -5074,7 +4827,7 @@
           <a:bodyPr wrap="square" rtlCol="0" anchor="ctr"/>
           <a:lstStyle/>
           <a:p>
-            <a:pPr indent="0" marL="0">
+            <a:pPr marL="0" indent="0">
               <a:buNone/>
             </a:pPr>
             <a:r>
@@ -5113,7 +4866,7 @@
           <a:bodyPr wrap="square" rtlCol="0" anchor="ctr"/>
           <a:lstStyle/>
           <a:p>
-            <a:pPr indent="0" marL="0">
+            <a:pPr marL="0" indent="0">
               <a:buNone/>
             </a:pPr>
             <a:r>
@@ -5152,7 +4905,7 @@
           <a:bodyPr wrap="square" rtlCol="0" anchor="ctr"/>
           <a:lstStyle/>
           <a:p>
-            <a:pPr indent="0" marL="0">
+            <a:pPr marL="0" indent="0">
               <a:buNone/>
             </a:pPr>
             <a:r>
@@ -5191,7 +4944,7 @@
           <a:bodyPr wrap="square" rtlCol="0" anchor="ctr"/>
           <a:lstStyle/>
           <a:p>
-            <a:pPr indent="0" marL="0">
+            <a:pPr marL="0" indent="0">
               <a:buNone/>
             </a:pPr>
             <a:r>
@@ -5230,7 +4983,7 @@
           <a:bodyPr wrap="square" rtlCol="0" anchor="ctr"/>
           <a:lstStyle/>
           <a:p>
-            <a:pPr indent="0" marL="0">
+            <a:pPr marL="0" indent="0">
               <a:buNone/>
             </a:pPr>
             <a:r>
@@ -5321,7 +5074,7 @@
           <a:bodyPr wrap="square" rtlCol="0" anchor="ctr"/>
           <a:lstStyle/>
           <a:p>
-            <a:pPr indent="0" marL="0">
+            <a:pPr marL="0" indent="0">
               <a:buNone/>
             </a:pPr>
             <a:r>
@@ -5360,7 +5113,7 @@
           <a:bodyPr wrap="square" rtlCol="0" anchor="ctr"/>
           <a:lstStyle/>
           <a:p>
-            <a:pPr indent="0" marL="0">
+            <a:pPr marL="0" indent="0">
               <a:buNone/>
             </a:pPr>
             <a:r>
@@ -5399,7 +5152,7 @@
           <a:bodyPr wrap="square" rtlCol="0" anchor="ctr"/>
           <a:lstStyle/>
           <a:p>
-            <a:pPr indent="0" marL="0">
+            <a:pPr marL="0" indent="0">
               <a:buNone/>
             </a:pPr>
             <a:r>
@@ -5438,7 +5191,7 @@
           <a:bodyPr wrap="square" rtlCol="0" anchor="ctr"/>
           <a:lstStyle/>
           <a:p>
-            <a:pPr indent="0" marL="0">
+            <a:pPr marL="0" indent="0">
               <a:buNone/>
             </a:pPr>
             <a:r>
@@ -5477,7 +5230,7 @@
           <a:bodyPr wrap="square" rtlCol="0" anchor="ctr"/>
           <a:lstStyle/>
           <a:p>
-            <a:pPr indent="0" marL="0">
+            <a:pPr marL="0" indent="0">
               <a:buNone/>
             </a:pPr>
             <a:r>
@@ -5516,7 +5269,7 @@
           <a:bodyPr wrap="square" rtlCol="0" anchor="ctr"/>
           <a:lstStyle/>
           <a:p>
-            <a:pPr indent="0" marL="0">
+            <a:pPr marL="0" indent="0">
               <a:buNone/>
             </a:pPr>
             <a:r>
@@ -5580,7 +5333,7 @@
           <a:bodyPr wrap="square" rtlCol="0" anchor="ctr"/>
           <a:lstStyle/>
           <a:p>
-            <a:pPr indent="0" marL="0">
+            <a:pPr marL="0" indent="0">
               <a:buNone/>
             </a:pPr>
             <a:r>
@@ -5619,7 +5372,7 @@
           <a:bodyPr wrap="square" rtlCol="0" anchor="ctr"/>
           <a:lstStyle/>
           <a:p>
-            <a:pPr indent="0" marL="0">
+            <a:pPr marL="0" indent="0">
               <a:buNone/>
             </a:pPr>
             <a:r>
@@ -5658,7 +5411,7 @@
           <a:bodyPr wrap="square" rtlCol="0" anchor="ctr"/>
           <a:lstStyle/>
           <a:p>
-            <a:pPr indent="0" marL="0">
+            <a:pPr marL="0" indent="0">
               <a:buNone/>
             </a:pPr>
             <a:r>
@@ -5697,7 +5450,7 @@
           <a:bodyPr wrap="square" rtlCol="0" anchor="ctr"/>
           <a:lstStyle/>
           <a:p>
-            <a:pPr indent="0" marL="0">
+            <a:pPr marL="0" indent="0">
               <a:buNone/>
             </a:pPr>
             <a:r>
@@ -5736,7 +5489,7 @@
           <a:bodyPr wrap="square" rtlCol="0" anchor="ctr"/>
           <a:lstStyle/>
           <a:p>
-            <a:pPr indent="0" marL="0">
+            <a:pPr marL="0" indent="0">
               <a:buNone/>
             </a:pPr>
             <a:r>
@@ -5775,7 +5528,7 @@
           <a:bodyPr wrap="square" rtlCol="0" anchor="ctr"/>
           <a:lstStyle/>
           <a:p>
-            <a:pPr indent="0" marL="0">
+            <a:pPr marL="0" indent="0">
               <a:buNone/>
             </a:pPr>
             <a:r>
@@ -5866,7 +5619,7 @@
           <a:bodyPr wrap="square" rtlCol="0" anchor="ctr"/>
           <a:lstStyle/>
           <a:p>
-            <a:pPr indent="0" marL="0">
+            <a:pPr marL="0" indent="0">
               <a:buNone/>
             </a:pPr>
             <a:r>
@@ -5905,7 +5658,7 @@
           <a:bodyPr wrap="square" rtlCol="0" anchor="ctr"/>
           <a:lstStyle/>
           <a:p>
-            <a:pPr indent="0" marL="0">
+            <a:pPr marL="0" indent="0">
               <a:buNone/>
             </a:pPr>
             <a:r>
@@ -5944,7 +5697,7 @@
           <a:bodyPr wrap="square" rtlCol="0" anchor="ctr"/>
           <a:lstStyle/>
           <a:p>
-            <a:pPr indent="0" marL="0">
+            <a:pPr marL="0" indent="0">
               <a:buNone/>
             </a:pPr>
             <a:r>
@@ -5983,7 +5736,7 @@
           <a:bodyPr wrap="square" rtlCol="0" anchor="ctr"/>
           <a:lstStyle/>
           <a:p>
-            <a:pPr indent="0" marL="0">
+            <a:pPr marL="0" indent="0">
               <a:buNone/>
             </a:pPr>
             <a:r>
@@ -6022,7 +5775,7 @@
           <a:bodyPr wrap="square" rtlCol="0" anchor="ctr"/>
           <a:lstStyle/>
           <a:p>
-            <a:pPr indent="0" marL="0">
+            <a:pPr marL="0" indent="0">
               <a:buNone/>
             </a:pPr>
             <a:r>
@@ -6061,7 +5814,7 @@
           <a:bodyPr wrap="square" rtlCol="0" anchor="ctr"/>
           <a:lstStyle/>
           <a:p>
-            <a:pPr indent="0" marL="0">
+            <a:pPr marL="0" indent="0">
               <a:buNone/>
             </a:pPr>
             <a:r>
@@ -6125,7 +5878,7 @@
           <a:bodyPr wrap="square" rtlCol="0" anchor="ctr"/>
           <a:lstStyle/>
           <a:p>
-            <a:pPr indent="0" marL="0">
+            <a:pPr marL="0" indent="0">
               <a:buNone/>
             </a:pPr>
             <a:r>
@@ -6164,7 +5917,7 @@
           <a:bodyPr wrap="square" rtlCol="0" anchor="ctr"/>
           <a:lstStyle/>
           <a:p>
-            <a:pPr indent="0" marL="0">
+            <a:pPr marL="0" indent="0">
               <a:buNone/>
             </a:pPr>
             <a:r>
@@ -6203,7 +5956,7 @@
           <a:bodyPr wrap="square" rtlCol="0" anchor="ctr"/>
           <a:lstStyle/>
           <a:p>
-            <a:pPr indent="0" marL="0">
+            <a:pPr marL="0" indent="0">
               <a:buNone/>
             </a:pPr>
             <a:r>
@@ -6242,7 +5995,7 @@
           <a:bodyPr wrap="square" rtlCol="0" anchor="ctr"/>
           <a:lstStyle/>
           <a:p>
-            <a:pPr indent="0" marL="0">
+            <a:pPr marL="0" indent="0">
               <a:buNone/>
             </a:pPr>
             <a:r>
@@ -6281,7 +6034,7 @@
           <a:bodyPr wrap="square" rtlCol="0" anchor="ctr"/>
           <a:lstStyle/>
           <a:p>
-            <a:pPr indent="0" marL="0">
+            <a:pPr marL="0" indent="0">
               <a:buNone/>
             </a:pPr>
             <a:r>
@@ -6320,7 +6073,7 @@
           <a:bodyPr wrap="square" rtlCol="0" anchor="ctr"/>
           <a:lstStyle/>
           <a:p>
-            <a:pPr indent="0" marL="0">
+            <a:pPr marL="0" indent="0">
               <a:buNone/>
             </a:pPr>
             <a:r>
@@ -6359,11 +6112,11 @@
           <a:bodyPr wrap="square" rtlCol="0" anchor="ctr"/>
           <a:lstStyle/>
           <a:p>
-            <a:pPr algn="ctr" indent="0" marL="0">
-              <a:buNone/>
-            </a:pPr>
-            <a:r>
-              <a:rPr lang="en-US" sz="900" b="1" spc="150" kern="0" dirty="0">
+            <a:pPr marL="0" indent="0" algn="ctr">
+              <a:buNone/>
+            </a:pPr>
+            <a:r>
+              <a:rPr lang="en-US" sz="900" b="1" kern="0" spc="150" dirty="0">
                 <a:solidFill>
                   <a:srgbClr val="01696F"/>
                 </a:solidFill>
@@ -6382,6 +6135,18 @@
   <p:clrMapOvr>
     <a:masterClrMapping/>
   </p:clrMapOvr>
+  <mc:AlternateContent xmlns:mc="http://schemas.openxmlformats.org/markup-compatibility/2006" xmlns:p14="http://schemas.microsoft.com/office/powerpoint/2010/main">
+    <mc:Choice Requires="p14">
+      <p:transition spd="slow" p14:dur="3400">
+        <p14:reveal/>
+      </p:transition>
+    </mc:Choice>
+    <mc:Fallback xmlns="">
+      <p:transition spd="slow">
+        <p:fade/>
+      </p:transition>
+    </mc:Fallback>
+  </mc:AlternateContent>
 </p:sld>
 </file>
 
@@ -6393,6 +6158,7 @@
         <a:solidFill>
           <a:srgbClr val="F7F6F2"/>
         </a:solidFill>
+        <a:effectLst/>
       </p:bgPr>
     </p:bg>
     <p:spTree>
@@ -6430,11 +6196,11 @@
           <a:bodyPr wrap="square" rtlCol="0" anchor="ctr"/>
           <a:lstStyle/>
           <a:p>
-            <a:pPr indent="0" marL="0">
-              <a:buNone/>
-            </a:pPr>
-            <a:r>
-              <a:rPr lang="en-US" sz="900" b="1" spc="200" kern="0" dirty="0">
+            <a:pPr marL="0" indent="0">
+              <a:buNone/>
+            </a:pPr>
+            <a:r>
+              <a:rPr lang="en-US" sz="900" b="1" kern="0" spc="200" dirty="0">
                 <a:solidFill>
                   <a:srgbClr val="01696F"/>
                 </a:solidFill>
@@ -6466,7 +6232,7 @@
           <a:bodyPr wrap="square" rtlCol="0" anchor="ctr"/>
           <a:lstStyle/>
           <a:p>
-            <a:pPr indent="0" marL="0">
+            <a:pPr marL="0" indent="0">
               <a:buNone/>
             </a:pPr>
             <a:r>
@@ -6505,7 +6271,7 @@
           <a:bodyPr wrap="square" rtlCol="0" anchor="ctr"/>
           <a:lstStyle/>
           <a:p>
-            <a:pPr indent="0" marL="0">
+            <a:pPr marL="0" indent="0">
               <a:buNone/>
             </a:pPr>
             <a:r>
@@ -6525,14 +6291,14 @@
       </p:sp>
       <p:pic>
         <p:nvPicPr>
-          <p:cNvPr id="5" name="Image 0" descr="/home/user/workspace/DocSnap_Training_Loss.png">    </p:cNvPr>
+          <p:cNvPr id="5" name="Image 0" descr="/home/user/workspace/DocSnap_Training_Loss.png"/>
           <p:cNvPicPr>
             <a:picLocks noChangeAspect="1"/>
           </p:cNvPicPr>
           <p:nvPr/>
         </p:nvPicPr>
         <p:blipFill>
-          <a:blip r:embed="rId1"/>
+          <a:blip r:embed="rId3"/>
           <a:stretch>
             <a:fillRect/>
           </a:stretch>
@@ -6593,7 +6359,7 @@
           <a:bodyPr wrap="square" rtlCol="0" anchor="ctr"/>
           <a:lstStyle/>
           <a:p>
-            <a:pPr algn="ctr" indent="0" marL="0">
+            <a:pPr marL="0" indent="0" algn="ctr">
               <a:buNone/>
             </a:pPr>
             <a:r>
@@ -6657,7 +6423,7 @@
           <a:bodyPr wrap="square" rtlCol="0" anchor="ctr"/>
           <a:lstStyle/>
           <a:p>
-            <a:pPr algn="ctr" indent="0" marL="0">
+            <a:pPr marL="0" indent="0" algn="ctr">
               <a:buNone/>
             </a:pPr>
             <a:r>
@@ -6721,7 +6487,7 @@
           <a:bodyPr wrap="square" rtlCol="0" anchor="ctr"/>
           <a:lstStyle/>
           <a:p>
-            <a:pPr algn="ctr" indent="0" marL="0">
+            <a:pPr marL="0" indent="0" algn="ctr">
               <a:buNone/>
             </a:pPr>
             <a:r>
@@ -6785,7 +6551,7 @@
           <a:bodyPr wrap="square" rtlCol="0" anchor="ctr"/>
           <a:lstStyle/>
           <a:p>
-            <a:pPr algn="ctr" indent="0" marL="0">
+            <a:pPr marL="0" indent="0" algn="ctr">
               <a:buNone/>
             </a:pPr>
             <a:r>
@@ -6849,7 +6615,7 @@
           <a:bodyPr wrap="square" rtlCol="0" anchor="ctr"/>
           <a:lstStyle/>
           <a:p>
-            <a:pPr algn="ctr" indent="0" marL="0">
+            <a:pPr marL="0" indent="0" algn="ctr">
               <a:buNone/>
             </a:pPr>
             <a:r>
@@ -6913,7 +6679,7 @@
           <a:bodyPr wrap="square" rtlCol="0" anchor="ctr"/>
           <a:lstStyle/>
           <a:p>
-            <a:pPr algn="ctr" indent="0" marL="0">
+            <a:pPr marL="0" indent="0" algn="ctr">
               <a:buNone/>
             </a:pPr>
             <a:r>
@@ -6977,7 +6743,7 @@
           <a:bodyPr wrap="square" rtlCol="0" anchor="ctr"/>
           <a:lstStyle/>
           <a:p>
-            <a:pPr algn="ctr" indent="0" marL="0">
+            <a:pPr marL="0" indent="0" algn="ctr">
               <a:buNone/>
             </a:pPr>
             <a:r>
@@ -7041,7 +6807,7 @@
           <a:bodyPr wrap="square" rtlCol="0" anchor="ctr"/>
           <a:lstStyle/>
           <a:p>
-            <a:pPr algn="ctr" indent="0" marL="0">
+            <a:pPr marL="0" indent="0" algn="ctr">
               <a:buNone/>
             </a:pPr>
             <a:r>
@@ -7105,7 +6871,7 @@
           <a:bodyPr wrap="square" rtlCol="0" anchor="ctr"/>
           <a:lstStyle/>
           <a:p>
-            <a:pPr algn="ctr" indent="0" marL="0">
+            <a:pPr marL="0" indent="0" algn="ctr">
               <a:buNone/>
             </a:pPr>
             <a:r>
@@ -7169,7 +6935,7 @@
           <a:bodyPr wrap="square" rtlCol="0" anchor="ctr"/>
           <a:lstStyle/>
           <a:p>
-            <a:pPr algn="ctr" indent="0" marL="0">
+            <a:pPr marL="0" indent="0" algn="ctr">
               <a:buNone/>
             </a:pPr>
             <a:r>
@@ -7233,7 +6999,7 @@
           <a:bodyPr wrap="square" rtlCol="0" anchor="ctr"/>
           <a:lstStyle/>
           <a:p>
-            <a:pPr algn="ctr" indent="0" marL="0">
+            <a:pPr marL="0" indent="0" algn="ctr">
               <a:buNone/>
             </a:pPr>
             <a:r>
@@ -7297,7 +7063,7 @@
           <a:bodyPr wrap="square" rtlCol="0" anchor="ctr"/>
           <a:lstStyle/>
           <a:p>
-            <a:pPr algn="ctr" indent="0" marL="0">
+            <a:pPr marL="0" indent="0" algn="ctr">
               <a:buNone/>
             </a:pPr>
             <a:r>
@@ -7361,7 +7127,7 @@
           <a:bodyPr wrap="square" rtlCol="0" anchor="ctr"/>
           <a:lstStyle/>
           <a:p>
-            <a:pPr algn="ctr" indent="0" marL="0">
+            <a:pPr marL="0" indent="0" algn="ctr">
               <a:buNone/>
             </a:pPr>
             <a:r>
@@ -7425,7 +7191,7 @@
           <a:bodyPr wrap="square" rtlCol="0" anchor="ctr"/>
           <a:lstStyle/>
           <a:p>
-            <a:pPr algn="ctr" indent="0" marL="0">
+            <a:pPr marL="0" indent="0" algn="ctr">
               <a:buNone/>
             </a:pPr>
             <a:r>
@@ -7489,7 +7255,7 @@
           <a:bodyPr wrap="square" rtlCol="0" anchor="ctr"/>
           <a:lstStyle/>
           <a:p>
-            <a:pPr algn="ctr" indent="0" marL="0">
+            <a:pPr marL="0" indent="0" algn="ctr">
               <a:buNone/>
             </a:pPr>
             <a:r>
@@ -7553,7 +7319,7 @@
           <a:bodyPr wrap="square" rtlCol="0" anchor="ctr"/>
           <a:lstStyle/>
           <a:p>
-            <a:pPr algn="ctr" indent="0" marL="0">
+            <a:pPr marL="0" indent="0" algn="ctr">
               <a:buNone/>
             </a:pPr>
             <a:r>
@@ -7617,7 +7383,7 @@
           <a:bodyPr wrap="square" rtlCol="0" anchor="ctr"/>
           <a:lstStyle/>
           <a:p>
-            <a:pPr algn="ctr" indent="0" marL="0">
+            <a:pPr marL="0" indent="0" algn="ctr">
               <a:buNone/>
             </a:pPr>
             <a:r>
@@ -7681,7 +7447,7 @@
           <a:bodyPr wrap="square" rtlCol="0" anchor="ctr"/>
           <a:lstStyle/>
           <a:p>
-            <a:pPr algn="ctr" indent="0" marL="0">
+            <a:pPr marL="0" indent="0" algn="ctr">
               <a:buNone/>
             </a:pPr>
             <a:r>
@@ -7745,7 +7511,7 @@
           <a:bodyPr wrap="square" rtlCol="0" anchor="ctr"/>
           <a:lstStyle/>
           <a:p>
-            <a:pPr algn="ctr" indent="0" marL="0">
+            <a:pPr marL="0" indent="0" algn="ctr">
               <a:buNone/>
             </a:pPr>
             <a:r>
@@ -7809,7 +7575,7 @@
           <a:bodyPr wrap="square" rtlCol="0" anchor="ctr"/>
           <a:lstStyle/>
           <a:p>
-            <a:pPr algn="ctr" indent="0" marL="0">
+            <a:pPr marL="0" indent="0" algn="ctr">
               <a:buNone/>
             </a:pPr>
             <a:r>
@@ -7848,7 +7614,7 @@
           <a:bodyPr wrap="square" rtlCol="0" anchor="t"/>
           <a:lstStyle/>
           <a:p>
-            <a:pPr indent="0" marL="0">
+            <a:pPr marL="0" indent="0">
               <a:buNone/>
             </a:pPr>
             <a:r>
@@ -7871,6 +7637,18 @@
   <p:clrMapOvr>
     <a:masterClrMapping/>
   </p:clrMapOvr>
+  <mc:AlternateContent xmlns:mc="http://schemas.openxmlformats.org/markup-compatibility/2006" xmlns:p14="http://schemas.microsoft.com/office/powerpoint/2010/main">
+    <mc:Choice Requires="p14">
+      <p:transition spd="slow" p14:dur="3400">
+        <p14:reveal/>
+      </p:transition>
+    </mc:Choice>
+    <mc:Fallback xmlns="">
+      <p:transition spd="slow">
+        <p:fade/>
+      </p:transition>
+    </mc:Fallback>
+  </mc:AlternateContent>
 </p:sld>
 </file>
 
@@ -7882,6 +7660,7 @@
         <a:solidFill>
           <a:srgbClr val="F7F6F2"/>
         </a:solidFill>
+        <a:effectLst/>
       </p:bgPr>
     </p:bg>
     <p:spTree>
@@ -7919,11 +7698,11 @@
           <a:bodyPr wrap="square" rtlCol="0" anchor="ctr"/>
           <a:lstStyle/>
           <a:p>
-            <a:pPr indent="0" marL="0">
-              <a:buNone/>
-            </a:pPr>
-            <a:r>
-              <a:rPr lang="en-US" sz="900" b="1" spc="200" kern="0" dirty="0">
+            <a:pPr marL="0" indent="0">
+              <a:buNone/>
+            </a:pPr>
+            <a:r>
+              <a:rPr lang="en-US" sz="900" b="1" kern="0" spc="200" dirty="0">
                 <a:solidFill>
                   <a:srgbClr val="01696F"/>
                 </a:solidFill>
@@ -7955,7 +7734,7 @@
           <a:bodyPr wrap="square" rtlCol="0" anchor="ctr"/>
           <a:lstStyle/>
           <a:p>
-            <a:pPr indent="0" marL="0">
+            <a:pPr marL="0" indent="0">
               <a:buNone/>
             </a:pPr>
             <a:r>
@@ -7994,7 +7773,7 @@
           <a:bodyPr wrap="square" rtlCol="0" anchor="ctr"/>
           <a:lstStyle/>
           <a:p>
-            <a:pPr indent="0" marL="0">
+            <a:pPr marL="0" indent="0">
               <a:buNone/>
             </a:pPr>
             <a:r>
@@ -8014,14 +7793,14 @@
       </p:sp>
       <p:pic>
         <p:nvPicPr>
-          <p:cNvPr id="5" name="Image 0" descr="/home/user/workspace/DocSnap_ROUGE_Comparison.png">    </p:cNvPr>
+          <p:cNvPr id="5" name="Image 0" descr="/home/user/workspace/DocSnap_ROUGE_Comparison.png"/>
           <p:cNvPicPr>
             <a:picLocks noChangeAspect="1"/>
           </p:cNvPicPr>
           <p:nvPr/>
         </p:nvPicPr>
         <p:blipFill>
-          <a:blip r:embed="rId1"/>
+          <a:blip r:embed="rId3"/>
           <a:stretch>
             <a:fillRect/>
           </a:stretch>
@@ -8084,7 +7863,7 @@
           <a:bodyPr wrap="square" rtlCol="0" anchor="ctr"/>
           <a:lstStyle/>
           <a:p>
-            <a:pPr indent="0" marL="0">
+            <a:pPr marL="0" indent="0">
               <a:buNone/>
             </a:pPr>
             <a:r>
@@ -8123,7 +7902,7 @@
           <a:bodyPr wrap="square" rtlCol="0" anchor="ctr"/>
           <a:lstStyle/>
           <a:p>
-            <a:pPr indent="0" marL="0">
+            <a:pPr marL="0" indent="0">
               <a:buNone/>
             </a:pPr>
             <a:r>
@@ -8189,7 +7968,7 @@
           <a:bodyPr wrap="square" rtlCol="0" anchor="ctr"/>
           <a:lstStyle/>
           <a:p>
-            <a:pPr indent="0" marL="0">
+            <a:pPr marL="0" indent="0">
               <a:buNone/>
             </a:pPr>
             <a:r>
@@ -8228,7 +8007,7 @@
           <a:bodyPr wrap="square" rtlCol="0" anchor="ctr"/>
           <a:lstStyle/>
           <a:p>
-            <a:pPr indent="0" marL="0">
+            <a:pPr marL="0" indent="0">
               <a:buNone/>
             </a:pPr>
             <a:r>
@@ -8294,7 +8073,7 @@
           <a:bodyPr wrap="square" rtlCol="0" anchor="ctr"/>
           <a:lstStyle/>
           <a:p>
-            <a:pPr indent="0" marL="0">
+            <a:pPr marL="0" indent="0">
               <a:buNone/>
             </a:pPr>
             <a:r>
@@ -8333,7 +8112,7 @@
           <a:bodyPr wrap="square" rtlCol="0" anchor="ctr"/>
           <a:lstStyle/>
           <a:p>
-            <a:pPr indent="0" marL="0">
+            <a:pPr marL="0" indent="0">
               <a:buNone/>
             </a:pPr>
             <a:r>
@@ -8399,7 +8178,7 @@
           <a:bodyPr wrap="square" rtlCol="0" anchor="ctr"/>
           <a:lstStyle/>
           <a:p>
-            <a:pPr indent="0" marL="0">
+            <a:pPr marL="0" indent="0">
               <a:buNone/>
             </a:pPr>
             <a:r>
@@ -8438,7 +8217,7 @@
           <a:bodyPr wrap="square" rtlCol="0" anchor="ctr"/>
           <a:lstStyle/>
           <a:p>
-            <a:pPr indent="0" marL="0">
+            <a:pPr marL="0" indent="0">
               <a:buNone/>
             </a:pPr>
             <a:r>
@@ -8504,7 +8283,7 @@
           <a:bodyPr wrap="square" rtlCol="0" anchor="ctr"/>
           <a:lstStyle/>
           <a:p>
-            <a:pPr indent="0" marL="0">
+            <a:pPr marL="0" indent="0">
               <a:buNone/>
             </a:pPr>
             <a:r>
@@ -8543,7 +8322,7 @@
           <a:bodyPr wrap="square" rtlCol="0" anchor="ctr"/>
           <a:lstStyle/>
           <a:p>
-            <a:pPr indent="0" marL="0">
+            <a:pPr marL="0" indent="0">
               <a:buNone/>
             </a:pPr>
             <a:r>
@@ -8609,7 +8388,7 @@
           <a:bodyPr wrap="square" rtlCol="0" anchor="ctr"/>
           <a:lstStyle/>
           <a:p>
-            <a:pPr indent="0" marL="0">
+            <a:pPr marL="0" indent="0">
               <a:buNone/>
             </a:pPr>
             <a:r>
@@ -8648,7 +8427,7 @@
           <a:bodyPr wrap="square" rtlCol="0" anchor="ctr"/>
           <a:lstStyle/>
           <a:p>
-            <a:pPr indent="0" marL="0">
+            <a:pPr marL="0" indent="0">
               <a:buNone/>
             </a:pPr>
             <a:r>
@@ -8665,7 +8444,7 @@
             <a:endParaRPr lang="en-US" sz="1100" dirty="0"/>
           </a:p>
           <a:p>
-            <a:pPr indent="0" marL="0">
+            <a:pPr marL="0" indent="0">
               <a:buNone/>
             </a:pPr>
             <a:r>
@@ -8688,6 +8467,18 @@
   <p:clrMapOvr>
     <a:masterClrMapping/>
   </p:clrMapOvr>
+  <mc:AlternateContent xmlns:mc="http://schemas.openxmlformats.org/markup-compatibility/2006" xmlns:p14="http://schemas.microsoft.com/office/powerpoint/2010/main">
+    <mc:Choice Requires="p14">
+      <p:transition spd="slow" p14:dur="3400">
+        <p14:reveal/>
+      </p:transition>
+    </mc:Choice>
+    <mc:Fallback xmlns="">
+      <p:transition spd="slow">
+        <p:fade/>
+      </p:transition>
+    </mc:Fallback>
+  </mc:AlternateContent>
 </p:sld>
 </file>
 
@@ -8699,6 +8490,7 @@
         <a:solidFill>
           <a:srgbClr val="0F2A2C"/>
         </a:solidFill>
+        <a:effectLst/>
       </p:bgPr>
     </p:bg>
     <p:spTree>
@@ -8736,11 +8528,11 @@
           <a:bodyPr wrap="square" rtlCol="0" anchor="ctr"/>
           <a:lstStyle/>
           <a:p>
-            <a:pPr indent="0" marL="0">
-              <a:buNone/>
-            </a:pPr>
-            <a:r>
-              <a:rPr lang="en-US" sz="900" b="1" spc="200" kern="0" dirty="0">
+            <a:pPr marL="0" indent="0">
+              <a:buNone/>
+            </a:pPr>
+            <a:r>
+              <a:rPr lang="en-US" sz="900" b="1" kern="0" spc="200" dirty="0">
                 <a:solidFill>
                   <a:srgbClr val="01696F"/>
                 </a:solidFill>
@@ -8772,7 +8564,7 @@
           <a:bodyPr wrap="square" rtlCol="0" anchor="ctr"/>
           <a:lstStyle/>
           <a:p>
-            <a:pPr indent="0" marL="0">
+            <a:pPr marL="0" indent="0">
               <a:buNone/>
             </a:pPr>
             <a:r>
@@ -8811,7 +8603,7 @@
           <a:bodyPr wrap="square" rtlCol="0" anchor="ctr"/>
           <a:lstStyle/>
           <a:p>
-            <a:pPr indent="0" marL="0">
+            <a:pPr marL="0" indent="0">
               <a:buNone/>
             </a:pPr>
             <a:r>
@@ -8902,7 +8694,7 @@
           <a:bodyPr wrap="square" rtlCol="0" anchor="ctr"/>
           <a:lstStyle/>
           <a:p>
-            <a:pPr indent="0" marL="0">
+            <a:pPr marL="0" indent="0">
               <a:buNone/>
             </a:pPr>
             <a:r>
@@ -8941,7 +8733,7 @@
           <a:bodyPr wrap="square" rtlCol="0" anchor="ctr"/>
           <a:lstStyle/>
           <a:p>
-            <a:pPr indent="0" marL="0">
+            <a:pPr marL="0" indent="0">
               <a:buNone/>
             </a:pPr>
             <a:r>
@@ -9032,7 +8824,7 @@
           <a:bodyPr wrap="square" rtlCol="0" anchor="ctr"/>
           <a:lstStyle/>
           <a:p>
-            <a:pPr indent="0" marL="0">
+            <a:pPr marL="0" indent="0">
               <a:buNone/>
             </a:pPr>
             <a:r>
@@ -9071,7 +8863,7 @@
           <a:bodyPr wrap="square" rtlCol="0" anchor="ctr"/>
           <a:lstStyle/>
           <a:p>
-            <a:pPr indent="0" marL="0">
+            <a:pPr marL="0" indent="0">
               <a:buNone/>
             </a:pPr>
             <a:r>
@@ -9137,7 +8929,7 @@
           <a:bodyPr wrap="square" rtlCol="0" anchor="ctr"/>
           <a:lstStyle/>
           <a:p>
-            <a:pPr algn="ctr" indent="0" marL="0">
+            <a:pPr marL="0" indent="0" algn="ctr">
               <a:buNone/>
             </a:pPr>
             <a:r>
@@ -9176,7 +8968,7 @@
           <a:bodyPr wrap="square" rtlCol="0" anchor="ctr"/>
           <a:lstStyle/>
           <a:p>
-            <a:pPr algn="ctr" indent="0" marL="0">
+            <a:pPr marL="0" indent="0" algn="ctr">
               <a:buNone/>
             </a:pPr>
             <a:r>
@@ -9243,7 +9035,7 @@
           <a:bodyPr wrap="square" rtlCol="0" anchor="ctr"/>
           <a:lstStyle/>
           <a:p>
-            <a:pPr algn="ctr" indent="0" marL="0">
+            <a:pPr marL="0" indent="0" algn="ctr">
               <a:buNone/>
             </a:pPr>
             <a:r>
@@ -9282,7 +9074,7 @@
           <a:bodyPr wrap="square" rtlCol="0" anchor="ctr"/>
           <a:lstStyle/>
           <a:p>
-            <a:pPr algn="ctr" indent="0" marL="0">
+            <a:pPr marL="0" indent="0" algn="ctr">
               <a:buNone/>
             </a:pPr>
             <a:r>
@@ -9299,7 +9091,7 @@
             <a:endParaRPr lang="en-US" sz="1100" dirty="0"/>
           </a:p>
           <a:p>
-            <a:pPr algn="ctr" indent="0" marL="0">
+            <a:pPr marL="0" indent="0" algn="ctr">
               <a:buNone/>
             </a:pPr>
             <a:r>
@@ -9365,7 +9157,7 @@
           <a:bodyPr wrap="square" rtlCol="0" anchor="ctr"/>
           <a:lstStyle/>
           <a:p>
-            <a:pPr algn="ctr" indent="0" marL="0">
+            <a:pPr marL="0" indent="0" algn="ctr">
               <a:buNone/>
             </a:pPr>
             <a:r>
@@ -9404,7 +9196,7 @@
           <a:bodyPr wrap="square" rtlCol="0" anchor="ctr"/>
           <a:lstStyle/>
           <a:p>
-            <a:pPr algn="ctr" indent="0" marL="0">
+            <a:pPr marL="0" indent="0" algn="ctr">
               <a:buNone/>
             </a:pPr>
             <a:r>
@@ -9421,7 +9213,7 @@
             <a:endParaRPr lang="en-US" sz="1100" dirty="0"/>
           </a:p>
           <a:p>
-            <a:pPr algn="ctr" indent="0" marL="0">
+            <a:pPr marL="0" indent="0" algn="ctr">
               <a:buNone/>
             </a:pPr>
             <a:r>
@@ -9487,11 +9279,11 @@
           <a:bodyPr wrap="square" rtlCol="0" anchor="ctr"/>
           <a:lstStyle/>
           <a:p>
-            <a:pPr algn="ctr" indent="0" marL="0">
-              <a:buNone/>
-            </a:pPr>
-            <a:r>
-              <a:rPr lang="en-US" sz="3600" b="1" dirty="0">
+            <a:pPr marL="0" indent="0" algn="ctr">
+              <a:buNone/>
+            </a:pPr>
+            <a:r>
+              <a:rPr lang="en-US" sz="3300" b="1" dirty="0">
                 <a:solidFill>
                   <a:srgbClr val="DA7101"/>
                 </a:solidFill>
@@ -9501,7 +9293,7 @@
               </a:rPr>
               <a:t>Comparable</a:t>
             </a:r>
-            <a:endParaRPr lang="en-US" sz="3600" dirty="0"/>
+            <a:endParaRPr lang="en-US" sz="3300" dirty="0"/>
           </a:p>
         </p:txBody>
       </p:sp>
@@ -9526,7 +9318,7 @@
           <a:bodyPr wrap="square" rtlCol="0" anchor="ctr"/>
           <a:lstStyle/>
           <a:p>
-            <a:pPr algn="ctr" indent="0" marL="0">
+            <a:pPr marL="0" indent="0" algn="ctr">
               <a:buNone/>
             </a:pPr>
             <a:r>
@@ -9543,7 +9335,7 @@
             <a:endParaRPr lang="en-US" sz="1100" dirty="0"/>
           </a:p>
           <a:p>
-            <a:pPr algn="ctr" indent="0" marL="0">
+            <a:pPr marL="0" indent="0" algn="ctr">
               <a:buNone/>
             </a:pPr>
             <a:r>
@@ -9582,7 +9374,7 @@
           <a:bodyPr wrap="square" rtlCol="0" anchor="ctr"/>
           <a:lstStyle/>
           <a:p>
-            <a:pPr indent="0" marL="0">
+            <a:pPr marL="0" indent="0">
               <a:buNone/>
             </a:pPr>
             <a:r>
@@ -9605,6 +9397,18 @@
   <p:clrMapOvr>
     <a:masterClrMapping/>
   </p:clrMapOvr>
+  <mc:AlternateContent xmlns:mc="http://schemas.openxmlformats.org/markup-compatibility/2006" xmlns:p14="http://schemas.microsoft.com/office/powerpoint/2010/main">
+    <mc:Choice Requires="p14">
+      <p:transition spd="slow" p14:dur="3400">
+        <p14:reveal/>
+      </p:transition>
+    </mc:Choice>
+    <mc:Fallback xmlns="">
+      <p:transition spd="slow">
+        <p:fade/>
+      </p:transition>
+    </mc:Fallback>
+  </mc:AlternateContent>
 </p:sld>
 </file>
 
@@ -9616,6 +9420,7 @@
         <a:solidFill>
           <a:srgbClr val="F7F6F2"/>
         </a:solidFill>
+        <a:effectLst/>
       </p:bgPr>
     </p:bg>
     <p:spTree>
@@ -9653,11 +9458,11 @@
           <a:bodyPr wrap="square" rtlCol="0" anchor="ctr"/>
           <a:lstStyle/>
           <a:p>
-            <a:pPr indent="0" marL="0">
-              <a:buNone/>
-            </a:pPr>
-            <a:r>
-              <a:rPr lang="en-US" sz="900" b="1" spc="200" kern="0" dirty="0">
+            <a:pPr marL="0" indent="0">
+              <a:buNone/>
+            </a:pPr>
+            <a:r>
+              <a:rPr lang="en-US" sz="900" b="1" kern="0" spc="200" dirty="0">
                 <a:solidFill>
                   <a:srgbClr val="01696F"/>
                 </a:solidFill>
@@ -9689,7 +9494,7 @@
           <a:bodyPr wrap="square" rtlCol="0" anchor="ctr"/>
           <a:lstStyle/>
           <a:p>
-            <a:pPr indent="0" marL="0">
+            <a:pPr marL="0" indent="0">
               <a:buNone/>
             </a:pPr>
             <a:r>
@@ -9728,7 +9533,7 @@
           <a:bodyPr wrap="square" rtlCol="0" anchor="ctr"/>
           <a:lstStyle/>
           <a:p>
-            <a:pPr indent="0" marL="0">
+            <a:pPr marL="0" indent="0">
               <a:buNone/>
             </a:pPr>
             <a:r>
@@ -9794,7 +9599,7 @@
           <a:bodyPr wrap="square" rtlCol="0" anchor="ctr"/>
           <a:lstStyle/>
           <a:p>
-            <a:pPr indent="0" marL="0">
+            <a:pPr marL="0" indent="0">
               <a:buNone/>
             </a:pPr>
             <a:r>
@@ -9833,7 +9638,7 @@
           <a:bodyPr wrap="square" rtlCol="0" anchor="ctr"/>
           <a:lstStyle/>
           <a:p>
-            <a:pPr indent="0" marL="0">
+            <a:pPr marL="0" indent="0">
               <a:buNone/>
             </a:pPr>
             <a:r>
@@ -9872,7 +9677,7 @@
           <a:bodyPr wrap="square" rtlCol="0" anchor="ctr"/>
           <a:lstStyle/>
           <a:p>
-            <a:pPr indent="0" marL="0">
+            <a:pPr marL="0" indent="0">
               <a:buNone/>
             </a:pPr>
             <a:r>
@@ -9938,7 +9743,7 @@
           <a:bodyPr wrap="square" rtlCol="0" anchor="ctr"/>
           <a:lstStyle/>
           <a:p>
-            <a:pPr indent="0" marL="0">
+            <a:pPr marL="0" indent="0">
               <a:buNone/>
             </a:pPr>
             <a:r>
@@ -9977,7 +9782,7 @@
           <a:bodyPr wrap="square" rtlCol="0" anchor="ctr"/>
           <a:lstStyle/>
           <a:p>
-            <a:pPr indent="0" marL="0">
+            <a:pPr marL="0" indent="0">
               <a:buNone/>
             </a:pPr>
             <a:r>
@@ -10016,7 +9821,7 @@
           <a:bodyPr wrap="square" rtlCol="0" anchor="ctr"/>
           <a:lstStyle/>
           <a:p>
-            <a:pPr indent="0" marL="0">
+            <a:pPr marL="0" indent="0">
               <a:buNone/>
             </a:pPr>
             <a:r>
@@ -10082,7 +9887,7 @@
           <a:bodyPr wrap="square" rtlCol="0" anchor="ctr"/>
           <a:lstStyle/>
           <a:p>
-            <a:pPr indent="0" marL="0">
+            <a:pPr marL="0" indent="0">
               <a:buNone/>
             </a:pPr>
             <a:r>
@@ -10121,7 +9926,7 @@
           <a:bodyPr wrap="square" rtlCol="0" anchor="ctr"/>
           <a:lstStyle/>
           <a:p>
-            <a:pPr indent="0" marL="0">
+            <a:pPr marL="0" indent="0">
               <a:buNone/>
             </a:pPr>
             <a:r>
@@ -10160,7 +9965,7 @@
           <a:bodyPr wrap="square" rtlCol="0" anchor="ctr"/>
           <a:lstStyle/>
           <a:p>
-            <a:pPr indent="0" marL="0">
+            <a:pPr marL="0" indent="0">
               <a:buNone/>
             </a:pPr>
             <a:r>
@@ -10226,7 +10031,7 @@
           <a:bodyPr wrap="square" rtlCol="0" anchor="ctr"/>
           <a:lstStyle/>
           <a:p>
-            <a:pPr indent="0" marL="0">
+            <a:pPr marL="0" indent="0">
               <a:buNone/>
             </a:pPr>
             <a:r>
@@ -10265,7 +10070,7 @@
           <a:bodyPr wrap="square" rtlCol="0" anchor="ctr"/>
           <a:lstStyle/>
           <a:p>
-            <a:pPr indent="0" marL="0">
+            <a:pPr marL="0" indent="0">
               <a:buNone/>
             </a:pPr>
             <a:r>
@@ -10304,7 +10109,7 @@
           <a:bodyPr wrap="square" rtlCol="0" anchor="ctr"/>
           <a:lstStyle/>
           <a:p>
-            <a:pPr indent="0" marL="0">
+            <a:pPr marL="0" indent="0">
               <a:buNone/>
             </a:pPr>
             <a:r>
@@ -10327,6 +10132,18 @@
   <p:clrMapOvr>
     <a:masterClrMapping/>
   </p:clrMapOvr>
+  <mc:AlternateContent xmlns:mc="http://schemas.openxmlformats.org/markup-compatibility/2006" xmlns:p14="http://schemas.microsoft.com/office/powerpoint/2010/main">
+    <mc:Choice Requires="p14">
+      <p:transition spd="slow" p14:dur="3400">
+        <p14:reveal/>
+      </p:transition>
+    </mc:Choice>
+    <mc:Fallback xmlns="">
+      <p:transition spd="slow">
+        <p:fade/>
+      </p:transition>
+    </mc:Fallback>
+  </mc:AlternateContent>
 </p:sld>
 </file>
 
@@ -10338,6 +10155,7 @@
         <a:solidFill>
           <a:srgbClr val="F7F6F2"/>
         </a:solidFill>
+        <a:effectLst/>
       </p:bgPr>
     </p:bg>
     <p:spTree>
@@ -10375,11 +10193,11 @@
           <a:bodyPr wrap="square" rtlCol="0" anchor="ctr"/>
           <a:lstStyle/>
           <a:p>
-            <a:pPr indent="0" marL="0">
-              <a:buNone/>
-            </a:pPr>
-            <a:r>
-              <a:rPr lang="en-US" sz="900" b="1" spc="200" kern="0" dirty="0">
+            <a:pPr marL="0" indent="0">
+              <a:buNone/>
+            </a:pPr>
+            <a:r>
+              <a:rPr lang="en-US" sz="900" b="1" kern="0" spc="200" dirty="0">
                 <a:solidFill>
                   <a:srgbClr val="01696F"/>
                 </a:solidFill>
@@ -10411,7 +10229,7 @@
           <a:bodyPr wrap="square" rtlCol="0" anchor="ctr"/>
           <a:lstStyle/>
           <a:p>
-            <a:pPr indent="0" marL="0">
+            <a:pPr marL="0" indent="0">
               <a:buNone/>
             </a:pPr>
             <a:r>
@@ -10450,7 +10268,7 @@
           <a:bodyPr wrap="square" rtlCol="0" anchor="ctr"/>
           <a:lstStyle/>
           <a:p>
-            <a:pPr indent="0" marL="0">
+            <a:pPr marL="0" indent="0">
               <a:buNone/>
             </a:pPr>
             <a:r>
@@ -10516,7 +10334,7 @@
           <a:bodyPr wrap="square" rtlCol="0" anchor="ctr"/>
           <a:lstStyle/>
           <a:p>
-            <a:pPr algn="ctr" indent="0" marL="0">
+            <a:pPr marL="0" indent="0" algn="ctr">
               <a:buNone/>
             </a:pPr>
             <a:r>
@@ -10555,7 +10373,7 @@
           <a:bodyPr wrap="square" rtlCol="0" anchor="ctr"/>
           <a:lstStyle/>
           <a:p>
-            <a:pPr algn="ctr" indent="0" marL="0">
+            <a:pPr marL="0" indent="0" algn="ctr">
               <a:buNone/>
             </a:pPr>
             <a:r>
@@ -10621,7 +10439,7 @@
           <a:bodyPr wrap="square" rtlCol="0" anchor="ctr"/>
           <a:lstStyle/>
           <a:p>
-            <a:pPr algn="ctr" indent="0" marL="0">
+            <a:pPr marL="0" indent="0" algn="ctr">
               <a:buNone/>
             </a:pPr>
             <a:r>
@@ -10660,7 +10478,7 @@
           <a:bodyPr wrap="square" rtlCol="0" anchor="ctr"/>
           <a:lstStyle/>
           <a:p>
-            <a:pPr algn="ctr" indent="0" marL="0">
+            <a:pPr marL="0" indent="0" algn="ctr">
               <a:buNone/>
             </a:pPr>
             <a:r>
@@ -10726,7 +10544,7 @@
           <a:bodyPr wrap="square" rtlCol="0" anchor="ctr"/>
           <a:lstStyle/>
           <a:p>
-            <a:pPr algn="ctr" indent="0" marL="0">
+            <a:pPr marL="0" indent="0" algn="ctr">
               <a:buNone/>
             </a:pPr>
             <a:r>
@@ -10765,7 +10583,7 @@
           <a:bodyPr wrap="square" rtlCol="0" anchor="ctr"/>
           <a:lstStyle/>
           <a:p>
-            <a:pPr algn="ctr" indent="0" marL="0">
+            <a:pPr marL="0" indent="0" algn="ctr">
               <a:buNone/>
             </a:pPr>
             <a:r>
@@ -10831,7 +10649,7 @@
           <a:bodyPr wrap="square" rtlCol="0" anchor="ctr"/>
           <a:lstStyle/>
           <a:p>
-            <a:pPr algn="ctr" indent="0" marL="0">
+            <a:pPr marL="0" indent="0" algn="ctr">
               <a:buNone/>
             </a:pPr>
             <a:r>
@@ -10870,7 +10688,7 @@
           <a:bodyPr wrap="square" rtlCol="0" anchor="ctr"/>
           <a:lstStyle/>
           <a:p>
-            <a:pPr algn="ctr" indent="0" marL="0">
+            <a:pPr marL="0" indent="0" algn="ctr">
               <a:buNone/>
             </a:pPr>
             <a:r>
@@ -10961,7 +10779,7 @@
           <a:bodyPr wrap="square" rtlCol="0" anchor="ctr"/>
           <a:lstStyle/>
           <a:p>
-            <a:pPr indent="0" marL="0">
+            <a:pPr marL="0" indent="0">
               <a:buNone/>
             </a:pPr>
             <a:r>
@@ -11000,7 +10818,7 @@
           <a:bodyPr wrap="square" rtlCol="0" anchor="ctr"/>
           <a:lstStyle/>
           <a:p>
-            <a:pPr indent="0" marL="0">
+            <a:pPr marL="0" indent="0">
               <a:buNone/>
             </a:pPr>
             <a:r>
@@ -11039,7 +10857,7 @@
           <a:bodyPr wrap="square" rtlCol="0" anchor="ctr"/>
           <a:lstStyle/>
           <a:p>
-            <a:pPr indent="0" marL="0">
+            <a:pPr marL="0" indent="0">
               <a:buNone/>
             </a:pPr>
             <a:r>
@@ -11078,7 +10896,7 @@
           <a:bodyPr wrap="square" rtlCol="0" anchor="ctr"/>
           <a:lstStyle/>
           <a:p>
-            <a:pPr indent="0" marL="0">
+            <a:pPr marL="0" indent="0">
               <a:buNone/>
             </a:pPr>
             <a:r>
@@ -11169,7 +10987,7 @@
           <a:bodyPr wrap="square" rtlCol="0" anchor="ctr"/>
           <a:lstStyle/>
           <a:p>
-            <a:pPr indent="0" marL="0">
+            <a:pPr marL="0" indent="0">
               <a:buNone/>
             </a:pPr>
             <a:r>
@@ -11208,7 +11026,7 @@
           <a:bodyPr wrap="square" rtlCol="0" anchor="ctr"/>
           <a:lstStyle/>
           <a:p>
-            <a:pPr indent="0" marL="0">
+            <a:pPr marL="0" indent="0">
               <a:buNone/>
             </a:pPr>
             <a:r>
@@ -11247,7 +11065,7 @@
           <a:bodyPr wrap="square" rtlCol="0" anchor="ctr"/>
           <a:lstStyle/>
           <a:p>
-            <a:pPr indent="0" marL="0">
+            <a:pPr marL="0" indent="0">
               <a:buNone/>
             </a:pPr>
             <a:r>
@@ -11286,7 +11104,7 @@
           <a:bodyPr wrap="square" rtlCol="0" anchor="ctr"/>
           <a:lstStyle/>
           <a:p>
-            <a:pPr indent="0" marL="0">
+            <a:pPr marL="0" indent="0">
               <a:buNone/>
             </a:pPr>
             <a:r>
@@ -11377,7 +11195,7 @@
           <a:bodyPr wrap="square" rtlCol="0" anchor="ctr"/>
           <a:lstStyle/>
           <a:p>
-            <a:pPr indent="0" marL="0">
+            <a:pPr marL="0" indent="0">
               <a:buNone/>
             </a:pPr>
             <a:r>
@@ -11416,7 +11234,7 @@
           <a:bodyPr wrap="square" rtlCol="0" anchor="ctr"/>
           <a:lstStyle/>
           <a:p>
-            <a:pPr indent="0" marL="0">
+            <a:pPr marL="0" indent="0">
               <a:buNone/>
             </a:pPr>
             <a:r>
@@ -11455,7 +11273,7 @@
           <a:bodyPr wrap="square" rtlCol="0" anchor="ctr"/>
           <a:lstStyle/>
           <a:p>
-            <a:pPr indent="0" marL="0">
+            <a:pPr marL="0" indent="0">
               <a:buNone/>
             </a:pPr>
             <a:r>
@@ -11494,7 +11312,7 @@
           <a:bodyPr wrap="square" rtlCol="0" anchor="ctr"/>
           <a:lstStyle/>
           <a:p>
-            <a:pPr indent="0" marL="0">
+            <a:pPr marL="0" indent="0">
               <a:buNone/>
             </a:pPr>
             <a:r>
@@ -11585,7 +11403,7 @@
           <a:bodyPr wrap="square" rtlCol="0" anchor="ctr"/>
           <a:lstStyle/>
           <a:p>
-            <a:pPr indent="0" marL="0">
+            <a:pPr marL="0" indent="0">
               <a:buNone/>
             </a:pPr>
             <a:r>
@@ -11624,7 +11442,7 @@
           <a:bodyPr wrap="square" rtlCol="0" anchor="ctr"/>
           <a:lstStyle/>
           <a:p>
-            <a:pPr indent="0" marL="0">
+            <a:pPr marL="0" indent="0">
               <a:buNone/>
             </a:pPr>
             <a:r>
@@ -11663,7 +11481,7 @@
           <a:bodyPr wrap="square" rtlCol="0" anchor="ctr"/>
           <a:lstStyle/>
           <a:p>
-            <a:pPr indent="0" marL="0">
+            <a:pPr marL="0" indent="0">
               <a:buNone/>
             </a:pPr>
             <a:r>
@@ -11702,7 +11520,7 @@
           <a:bodyPr wrap="square" rtlCol="0" anchor="ctr"/>
           <a:lstStyle/>
           <a:p>
-            <a:pPr indent="0" marL="0">
+            <a:pPr marL="0" indent="0">
               <a:buNone/>
             </a:pPr>
             <a:r>
@@ -11741,7 +11559,7 @@
           <a:bodyPr wrap="square" rtlCol="0" anchor="ctr"/>
           <a:lstStyle/>
           <a:p>
-            <a:pPr indent="0" marL="0">
+            <a:pPr marL="0" indent="0">
               <a:buNone/>
             </a:pPr>
             <a:r>
@@ -11755,9 +11573,6 @@
               </a:rPr>
               <a:t>Live Demo: </a:t>
             </a:r>
-            <a:pPr indent="0" marL="0">
-              <a:buNone/>
-            </a:pPr>
             <a:r>
               <a:rPr lang="en-US" sz="900" u="sng" dirty="0">
                 <a:solidFill>
@@ -11766,7 +11581,7 @@
                 <a:latin typeface="Calibri" pitchFamily="34" charset="0"/>
                 <a:ea typeface="Calibri" pitchFamily="34" charset="-122"/>
                 <a:cs typeface="Calibri" pitchFamily="34" charset="-120"/>
-                <a:hlinkClick r:id="rId1" invalidUrl="" action="" tgtFrame="" tooltip="" history="1" highlightClick="0" endSnd="0">
+                <a:hlinkClick r:id="rId3">
                   <a:extLst>
                     <a:ext uri="{A12FA001-AC4F-418D-AE19-62706E023703}">
                       <ahyp:hlinkClr xmlns:ahyp="http://schemas.microsoft.com/office/drawing/2018/hyperlinkcolor" val="tx"/>
@@ -11785,6 +11600,18 @@
   <p:clrMapOvr>
     <a:masterClrMapping/>
   </p:clrMapOvr>
+  <mc:AlternateContent xmlns:mc="http://schemas.openxmlformats.org/markup-compatibility/2006" xmlns:p14="http://schemas.microsoft.com/office/powerpoint/2010/main">
+    <mc:Choice Requires="p14">
+      <p:transition spd="slow" p14:dur="3400">
+        <p14:reveal/>
+      </p:transition>
+    </mc:Choice>
+    <mc:Fallback xmlns="">
+      <p:transition spd="slow">
+        <p:fade/>
+      </p:transition>
+    </mc:Fallback>
+  </mc:AlternateContent>
 </p:sld>
 </file>
 
@@ -11796,6 +11623,7 @@
         <a:solidFill>
           <a:srgbClr val="F7F6F2"/>
         </a:solidFill>
+        <a:effectLst/>
       </p:bgPr>
     </p:bg>
     <p:spTree>
@@ -11833,11 +11661,11 @@
           <a:bodyPr wrap="square" rtlCol="0" anchor="ctr"/>
           <a:lstStyle/>
           <a:p>
-            <a:pPr indent="0" marL="0">
-              <a:buNone/>
-            </a:pPr>
-            <a:r>
-              <a:rPr lang="en-US" sz="900" b="1" spc="200" kern="0" dirty="0">
+            <a:pPr marL="0" indent="0">
+              <a:buNone/>
+            </a:pPr>
+            <a:r>
+              <a:rPr lang="en-US" sz="900" b="1" kern="0" spc="200" dirty="0">
                 <a:solidFill>
                   <a:srgbClr val="01696F"/>
                 </a:solidFill>
@@ -11869,7 +11697,7 @@
           <a:bodyPr wrap="square" rtlCol="0" anchor="ctr"/>
           <a:lstStyle/>
           <a:p>
-            <a:pPr indent="0" marL="0">
+            <a:pPr marL="0" indent="0">
               <a:buNone/>
             </a:pPr>
             <a:r>
@@ -11908,7 +11736,7 @@
           <a:bodyPr wrap="square" rtlCol="0" anchor="ctr"/>
           <a:lstStyle/>
           <a:p>
-            <a:pPr indent="0" marL="0">
+            <a:pPr marL="0" indent="0">
               <a:buNone/>
             </a:pPr>
             <a:r>
@@ -11999,7 +11827,7 @@
           <a:bodyPr wrap="square" rtlCol="0" anchor="ctr"/>
           <a:lstStyle/>
           <a:p>
-            <a:pPr indent="0" marL="0">
+            <a:pPr marL="0" indent="0">
               <a:buNone/>
             </a:pPr>
             <a:r>
@@ -12038,7 +11866,7 @@
           <a:bodyPr wrap="square" rtlCol="0" anchor="ctr"/>
           <a:lstStyle/>
           <a:p>
-            <a:pPr indent="0" marL="0">
+            <a:pPr marL="0" indent="0">
               <a:buNone/>
             </a:pPr>
             <a:r>
@@ -12077,7 +11905,7 @@
           <a:bodyPr wrap="square" rtlCol="0" anchor="ctr"/>
           <a:lstStyle/>
           <a:p>
-            <a:pPr indent="0" marL="0">
+            <a:pPr marL="0" indent="0">
               <a:buNone/>
             </a:pPr>
             <a:r>
@@ -12116,7 +11944,7 @@
           <a:bodyPr wrap="square" rtlCol="0" anchor="ctr"/>
           <a:lstStyle/>
           <a:p>
-            <a:pPr indent="0" marL="0">
+            <a:pPr marL="0" indent="0">
               <a:buNone/>
             </a:pPr>
             <a:r>
@@ -12155,7 +11983,7 @@
           <a:bodyPr wrap="square" rtlCol="0" anchor="ctr"/>
           <a:lstStyle/>
           <a:p>
-            <a:pPr indent="0" marL="0">
+            <a:pPr marL="0" indent="0">
               <a:buNone/>
             </a:pPr>
             <a:r>
@@ -12246,7 +12074,7 @@
           <a:bodyPr wrap="square" rtlCol="0" anchor="ctr"/>
           <a:lstStyle/>
           <a:p>
-            <a:pPr indent="0" marL="0">
+            <a:pPr marL="0" indent="0">
               <a:buNone/>
             </a:pPr>
             <a:r>
@@ -12285,7 +12113,7 @@
           <a:bodyPr wrap="square" rtlCol="0" anchor="ctr"/>
           <a:lstStyle/>
           <a:p>
-            <a:pPr indent="0" marL="0">
+            <a:pPr marL="0" indent="0">
               <a:buNone/>
             </a:pPr>
             <a:r>
@@ -12324,7 +12152,7 @@
           <a:bodyPr wrap="square" rtlCol="0" anchor="ctr"/>
           <a:lstStyle/>
           <a:p>
-            <a:pPr indent="0" marL="0">
+            <a:pPr marL="0" indent="0">
               <a:buNone/>
             </a:pPr>
             <a:r>
@@ -12363,7 +12191,7 @@
           <a:bodyPr wrap="square" rtlCol="0" anchor="ctr"/>
           <a:lstStyle/>
           <a:p>
-            <a:pPr indent="0" marL="0">
+            <a:pPr marL="0" indent="0">
               <a:buNone/>
             </a:pPr>
             <a:r>
@@ -12402,7 +12230,7 @@
           <a:bodyPr wrap="square" rtlCol="0" anchor="ctr"/>
           <a:lstStyle/>
           <a:p>
-            <a:pPr indent="0" marL="0">
+            <a:pPr marL="0" indent="0">
               <a:buNone/>
             </a:pPr>
             <a:r>
@@ -12493,7 +12321,7 @@
           <a:bodyPr wrap="square" rtlCol="0" anchor="ctr"/>
           <a:lstStyle/>
           <a:p>
-            <a:pPr indent="0" marL="0">
+            <a:pPr marL="0" indent="0">
               <a:buNone/>
             </a:pPr>
             <a:r>
@@ -12532,7 +12360,7 @@
           <a:bodyPr wrap="square" rtlCol="0" anchor="ctr"/>
           <a:lstStyle/>
           <a:p>
-            <a:pPr indent="0" marL="0">
+            <a:pPr marL="0" indent="0">
               <a:buNone/>
             </a:pPr>
             <a:r>
@@ -12571,7 +12399,7 @@
           <a:bodyPr wrap="square" rtlCol="0" anchor="ctr"/>
           <a:lstStyle/>
           <a:p>
-            <a:pPr indent="0" marL="0">
+            <a:pPr marL="0" indent="0">
               <a:buNone/>
             </a:pPr>
             <a:r>
@@ -12610,7 +12438,7 @@
           <a:bodyPr wrap="square" rtlCol="0" anchor="ctr"/>
           <a:lstStyle/>
           <a:p>
-            <a:pPr indent="0" marL="0">
+            <a:pPr marL="0" indent="0">
               <a:buNone/>
             </a:pPr>
             <a:r>
@@ -12649,7 +12477,7 @@
           <a:bodyPr wrap="square" rtlCol="0" anchor="ctr"/>
           <a:lstStyle/>
           <a:p>
-            <a:pPr indent="0" marL="0">
+            <a:pPr marL="0" indent="0">
               <a:buNone/>
             </a:pPr>
             <a:r>
@@ -12672,6 +12500,18 @@
   <p:clrMapOvr>
     <a:masterClrMapping/>
   </p:clrMapOvr>
+  <mc:AlternateContent xmlns:mc="http://schemas.openxmlformats.org/markup-compatibility/2006" xmlns:p14="http://schemas.microsoft.com/office/powerpoint/2010/main">
+    <mc:Choice Requires="p14">
+      <p:transition spd="slow" p14:dur="3400">
+        <p14:reveal/>
+      </p:transition>
+    </mc:Choice>
+    <mc:Fallback xmlns="">
+      <p:transition spd="slow">
+        <p:fade/>
+      </p:transition>
+    </mc:Fallback>
+  </mc:AlternateContent>
 </p:sld>
 </file>
 
@@ -12683,6 +12523,7 @@
         <a:solidFill>
           <a:srgbClr val="F7F6F2"/>
         </a:solidFill>
+        <a:effectLst/>
       </p:bgPr>
     </p:bg>
     <p:spTree>
@@ -12720,11 +12561,11 @@
           <a:bodyPr wrap="square" rtlCol="0" anchor="ctr"/>
           <a:lstStyle/>
           <a:p>
-            <a:pPr indent="0" marL="0">
-              <a:buNone/>
-            </a:pPr>
-            <a:r>
-              <a:rPr lang="en-US" sz="900" b="1" spc="200" kern="0" dirty="0">
+            <a:pPr marL="0" indent="0">
+              <a:buNone/>
+            </a:pPr>
+            <a:r>
+              <a:rPr lang="en-US" sz="900" b="1" kern="0" spc="200" dirty="0">
                 <a:solidFill>
                   <a:srgbClr val="01696F"/>
                 </a:solidFill>
@@ -12756,7 +12597,7 @@
           <a:bodyPr wrap="square" rtlCol="0" anchor="ctr"/>
           <a:lstStyle/>
           <a:p>
-            <a:pPr indent="0" marL="0">
+            <a:pPr marL="0" indent="0">
               <a:buNone/>
             </a:pPr>
             <a:r>
@@ -12795,7 +12636,7 @@
           <a:bodyPr wrap="square" rtlCol="0" anchor="ctr"/>
           <a:lstStyle/>
           <a:p>
-            <a:pPr indent="0" marL="0">
+            <a:pPr marL="0" indent="0">
               <a:buNone/>
             </a:pPr>
             <a:r>
@@ -12886,7 +12727,7 @@
           <a:bodyPr wrap="square" rtlCol="0" anchor="ctr"/>
           <a:lstStyle/>
           <a:p>
-            <a:pPr indent="0" marL="0">
+            <a:pPr marL="0" indent="0">
               <a:buNone/>
             </a:pPr>
             <a:r>
@@ -12925,7 +12766,7 @@
           <a:bodyPr wrap="square" rtlCol="0" anchor="ctr"/>
           <a:lstStyle/>
           <a:p>
-            <a:pPr indent="0" marL="0">
+            <a:pPr marL="0" indent="0">
               <a:buNone/>
             </a:pPr>
             <a:r>
@@ -12964,7 +12805,7 @@
           <a:bodyPr wrap="square" rtlCol="0" anchor="ctr"/>
           <a:lstStyle/>
           <a:p>
-            <a:pPr indent="0" marL="0">
+            <a:pPr marL="0" indent="0">
               <a:buNone/>
             </a:pPr>
             <a:r>
@@ -13003,7 +12844,7 @@
           <a:bodyPr wrap="square" rtlCol="0" anchor="ctr"/>
           <a:lstStyle/>
           <a:p>
-            <a:pPr indent="0" marL="0">
+            <a:pPr marL="0" indent="0">
               <a:buNone/>
             </a:pPr>
             <a:r>
@@ -13094,7 +12935,7 @@
           <a:bodyPr wrap="square" rtlCol="0" anchor="ctr"/>
           <a:lstStyle/>
           <a:p>
-            <a:pPr indent="0" marL="0">
+            <a:pPr marL="0" indent="0">
               <a:buNone/>
             </a:pPr>
             <a:r>
@@ -13133,7 +12974,7 @@
           <a:bodyPr wrap="square" rtlCol="0" anchor="ctr"/>
           <a:lstStyle/>
           <a:p>
-            <a:pPr indent="0" marL="0">
+            <a:pPr marL="0" indent="0">
               <a:buNone/>
             </a:pPr>
             <a:r>
@@ -13172,7 +13013,7 @@
           <a:bodyPr wrap="square" rtlCol="0" anchor="ctr"/>
           <a:lstStyle/>
           <a:p>
-            <a:pPr indent="0" marL="0">
+            <a:pPr marL="0" indent="0">
               <a:buNone/>
             </a:pPr>
             <a:r>
@@ -13211,7 +13052,7 @@
           <a:bodyPr wrap="square" rtlCol="0" anchor="ctr"/>
           <a:lstStyle/>
           <a:p>
-            <a:pPr indent="0" marL="0">
+            <a:pPr marL="0" indent="0">
               <a:buNone/>
             </a:pPr>
             <a:r>
@@ -13302,7 +13143,7 @@
           <a:bodyPr wrap="square" rtlCol="0" anchor="ctr"/>
           <a:lstStyle/>
           <a:p>
-            <a:pPr indent="0" marL="0">
+            <a:pPr marL="0" indent="0">
               <a:buNone/>
             </a:pPr>
             <a:r>
@@ -13341,7 +13182,7 @@
           <a:bodyPr wrap="square" rtlCol="0" anchor="ctr"/>
           <a:lstStyle/>
           <a:p>
-            <a:pPr indent="0" marL="0">
+            <a:pPr marL="0" indent="0">
               <a:buNone/>
             </a:pPr>
             <a:r>
@@ -13380,7 +13221,7 @@
           <a:bodyPr wrap="square" rtlCol="0" anchor="ctr"/>
           <a:lstStyle/>
           <a:p>
-            <a:pPr indent="0" marL="0">
+            <a:pPr marL="0" indent="0">
               <a:buNone/>
             </a:pPr>
             <a:r>
@@ -13419,7 +13260,7 @@
           <a:bodyPr wrap="square" rtlCol="0" anchor="ctr"/>
           <a:lstStyle/>
           <a:p>
-            <a:pPr indent="0" marL="0">
+            <a:pPr marL="0" indent="0">
               <a:buNone/>
             </a:pPr>
             <a:r>
@@ -13510,7 +13351,7 @@
           <a:bodyPr wrap="square" rtlCol="0" anchor="ctr"/>
           <a:lstStyle/>
           <a:p>
-            <a:pPr indent="0" marL="0">
+            <a:pPr marL="0" indent="0">
               <a:buNone/>
             </a:pPr>
             <a:r>
@@ -13549,7 +13390,7 @@
           <a:bodyPr wrap="square" rtlCol="0" anchor="ctr"/>
           <a:lstStyle/>
           <a:p>
-            <a:pPr indent="0" marL="0">
+            <a:pPr marL="0" indent="0">
               <a:buNone/>
             </a:pPr>
             <a:r>
@@ -13588,7 +13429,7 @@
           <a:bodyPr wrap="square" rtlCol="0" anchor="ctr"/>
           <a:lstStyle/>
           <a:p>
-            <a:pPr indent="0" marL="0">
+            <a:pPr marL="0" indent="0">
               <a:buNone/>
             </a:pPr>
             <a:r>
@@ -13627,7 +13468,7 @@
           <a:bodyPr wrap="square" rtlCol="0" anchor="ctr"/>
           <a:lstStyle/>
           <a:p>
-            <a:pPr indent="0" marL="0">
+            <a:pPr marL="0" indent="0">
               <a:buNone/>
             </a:pPr>
             <a:r>
@@ -13650,6 +13491,18 @@
   <p:clrMapOvr>
     <a:masterClrMapping/>
   </p:clrMapOvr>
+  <mc:AlternateContent xmlns:mc="http://schemas.openxmlformats.org/markup-compatibility/2006" xmlns:p14="http://schemas.microsoft.com/office/powerpoint/2010/main">
+    <mc:Choice Requires="p14">
+      <p:transition spd="slow" p14:dur="3400">
+        <p14:reveal/>
+      </p:transition>
+    </mc:Choice>
+    <mc:Fallback xmlns="">
+      <p:transition spd="slow">
+        <p:fade/>
+      </p:transition>
+    </mc:Fallback>
+  </mc:AlternateContent>
 </p:sld>
 </file>
 
@@ -13661,6 +13514,7 @@
         <a:solidFill>
           <a:srgbClr val="0F2A2C"/>
         </a:solidFill>
+        <a:effectLst/>
       </p:bgPr>
     </p:bg>
     <p:spTree>
@@ -13723,11 +13577,11 @@
           <a:bodyPr wrap="square" rtlCol="0" anchor="ctr"/>
           <a:lstStyle/>
           <a:p>
-            <a:pPr indent="0" marL="0">
-              <a:buNone/>
-            </a:pPr>
-            <a:r>
-              <a:rPr lang="en-US" sz="900" b="1" spc="200" kern="0" dirty="0">
+            <a:pPr marL="0" indent="0">
+              <a:buNone/>
+            </a:pPr>
+            <a:r>
+              <a:rPr lang="en-US" sz="900" b="1" kern="0" spc="200" dirty="0">
                 <a:solidFill>
                   <a:srgbClr val="01696F"/>
                 </a:solidFill>
@@ -13759,7 +13613,7 @@
           <a:bodyPr wrap="square" rtlCol="0" anchor="ctr"/>
           <a:lstStyle/>
           <a:p>
-            <a:pPr indent="0" marL="0">
+            <a:pPr marL="0" indent="0">
               <a:buNone/>
             </a:pPr>
             <a:r>
@@ -13798,7 +13652,7 @@
           <a:bodyPr wrap="square" rtlCol="0" anchor="ctr"/>
           <a:lstStyle/>
           <a:p>
-            <a:pPr indent="0" marL="0">
+            <a:pPr marL="0" indent="0">
               <a:buNone/>
             </a:pPr>
             <a:r>
@@ -13889,7 +13743,7 @@
           <a:bodyPr wrap="square" rtlCol="0" anchor="ctr"/>
           <a:lstStyle/>
           <a:p>
-            <a:pPr indent="0" marL="0">
+            <a:pPr marL="0" indent="0">
               <a:buNone/>
             </a:pPr>
             <a:r>
@@ -13928,7 +13782,7 @@
           <a:bodyPr wrap="square" rtlCol="0" anchor="ctr"/>
           <a:lstStyle/>
           <a:p>
-            <a:pPr indent="0" marL="0">
+            <a:pPr marL="0" indent="0">
               <a:buNone/>
             </a:pPr>
             <a:r>
@@ -14019,7 +13873,7 @@
           <a:bodyPr wrap="square" rtlCol="0" anchor="ctr"/>
           <a:lstStyle/>
           <a:p>
-            <a:pPr indent="0" marL="0">
+            <a:pPr marL="0" indent="0">
               <a:buNone/>
             </a:pPr>
             <a:r>
@@ -14058,7 +13912,7 @@
           <a:bodyPr wrap="square" rtlCol="0" anchor="ctr"/>
           <a:lstStyle/>
           <a:p>
-            <a:pPr indent="0" marL="0">
+            <a:pPr marL="0" indent="0">
               <a:buNone/>
             </a:pPr>
             <a:r>
@@ -14149,7 +14003,7 @@
           <a:bodyPr wrap="square" rtlCol="0" anchor="ctr"/>
           <a:lstStyle/>
           <a:p>
-            <a:pPr indent="0" marL="0">
+            <a:pPr marL="0" indent="0">
               <a:buNone/>
             </a:pPr>
             <a:r>
@@ -14188,7 +14042,7 @@
           <a:bodyPr wrap="square" rtlCol="0" anchor="ctr"/>
           <a:lstStyle/>
           <a:p>
-            <a:pPr indent="0" marL="0">
+            <a:pPr marL="0" indent="0">
               <a:buNone/>
             </a:pPr>
             <a:r>
@@ -14254,7 +14108,7 @@
           <a:bodyPr wrap="square" rtlCol="0" anchor="ctr"/>
           <a:lstStyle/>
           <a:p>
-            <a:pPr algn="ctr" indent="0" marL="0">
+            <a:pPr marL="0" indent="0" algn="ctr">
               <a:buNone/>
             </a:pPr>
             <a:r>
@@ -14293,7 +14147,7 @@
           <a:bodyPr wrap="square" rtlCol="0" anchor="ctr"/>
           <a:lstStyle/>
           <a:p>
-            <a:pPr algn="ctr" indent="0" marL="0">
+            <a:pPr marL="0" indent="0" algn="ctr">
               <a:buNone/>
             </a:pPr>
             <a:r>
@@ -14359,7 +14213,7 @@
           <a:bodyPr wrap="square" rtlCol="0" anchor="ctr"/>
           <a:lstStyle/>
           <a:p>
-            <a:pPr algn="ctr" indent="0" marL="0">
+            <a:pPr marL="0" indent="0" algn="ctr">
               <a:buNone/>
             </a:pPr>
             <a:r>
@@ -14398,7 +14252,7 @@
           <a:bodyPr wrap="square" rtlCol="0" anchor="ctr"/>
           <a:lstStyle/>
           <a:p>
-            <a:pPr algn="ctr" indent="0" marL="0">
+            <a:pPr marL="0" indent="0" algn="ctr">
               <a:buNone/>
             </a:pPr>
             <a:r>
@@ -14464,7 +14318,7 @@
           <a:bodyPr wrap="square" rtlCol="0" anchor="ctr"/>
           <a:lstStyle/>
           <a:p>
-            <a:pPr algn="ctr" indent="0" marL="0">
+            <a:pPr marL="0" indent="0" algn="ctr">
               <a:buNone/>
             </a:pPr>
             <a:r>
@@ -14503,7 +14357,7 @@
           <a:bodyPr wrap="square" rtlCol="0" anchor="ctr"/>
           <a:lstStyle/>
           <a:p>
-            <a:pPr algn="ctr" indent="0" marL="0">
+            <a:pPr marL="0" indent="0" algn="ctr">
               <a:buNone/>
             </a:pPr>
             <a:r>
@@ -14526,6 +14380,18 @@
   <p:clrMapOvr>
     <a:masterClrMapping/>
   </p:clrMapOvr>
+  <mc:AlternateContent xmlns:mc="http://schemas.openxmlformats.org/markup-compatibility/2006" xmlns:p14="http://schemas.microsoft.com/office/powerpoint/2010/main">
+    <mc:Choice Requires="p14">
+      <p:transition spd="slow" p14:dur="3400">
+        <p14:reveal/>
+      </p:transition>
+    </mc:Choice>
+    <mc:Fallback xmlns="">
+      <p:transition spd="slow">
+        <p:fade/>
+      </p:transition>
+    </mc:Fallback>
+  </mc:AlternateContent>
 </p:sld>
 </file>
 
@@ -14537,6 +14403,7 @@
         <a:solidFill>
           <a:srgbClr val="F7F6F2"/>
         </a:solidFill>
+        <a:effectLst/>
       </p:bgPr>
     </p:bg>
     <p:spTree>
@@ -14574,11 +14441,11 @@
           <a:bodyPr wrap="square" rtlCol="0" anchor="ctr"/>
           <a:lstStyle/>
           <a:p>
-            <a:pPr indent="0" marL="0">
-              <a:buNone/>
-            </a:pPr>
-            <a:r>
-              <a:rPr lang="en-US" sz="900" b="1" spc="200" kern="0" dirty="0">
+            <a:pPr marL="0" indent="0">
+              <a:buNone/>
+            </a:pPr>
+            <a:r>
+              <a:rPr lang="en-US" sz="900" b="1" kern="0" spc="200" dirty="0">
                 <a:solidFill>
                   <a:srgbClr val="01696F"/>
                 </a:solidFill>
@@ -14610,7 +14477,7 @@
           <a:bodyPr wrap="square" rtlCol="0" anchor="ctr"/>
           <a:lstStyle/>
           <a:p>
-            <a:pPr indent="0" marL="0">
+            <a:pPr marL="0" indent="0">
               <a:buNone/>
             </a:pPr>
             <a:r>
@@ -14649,7 +14516,7 @@
           <a:bodyPr wrap="square" rtlCol="0" anchor="ctr"/>
           <a:lstStyle/>
           <a:p>
-            <a:pPr indent="0" marL="0">
+            <a:pPr marL="0" indent="0">
               <a:buNone/>
             </a:pPr>
             <a:r>
@@ -14715,7 +14582,7 @@
           <a:bodyPr wrap="square" rtlCol="0" anchor="ctr"/>
           <a:lstStyle/>
           <a:p>
-            <a:pPr indent="0" marL="0">
+            <a:pPr marL="0" indent="0">
               <a:buNone/>
             </a:pPr>
             <a:r>
@@ -14754,7 +14621,7 @@
           <a:bodyPr wrap="square" rtlCol="0" anchor="ctr"/>
           <a:lstStyle/>
           <a:p>
-            <a:pPr indent="0" marL="0">
+            <a:pPr marL="0" indent="0">
               <a:buNone/>
             </a:pPr>
             <a:r>
@@ -14820,7 +14687,7 @@
           <a:bodyPr wrap="square" rtlCol="0" anchor="ctr"/>
           <a:lstStyle/>
           <a:p>
-            <a:pPr indent="0" marL="0">
+            <a:pPr marL="0" indent="0">
               <a:buNone/>
             </a:pPr>
             <a:r>
@@ -14859,7 +14726,7 @@
           <a:bodyPr wrap="square" rtlCol="0" anchor="ctr"/>
           <a:lstStyle/>
           <a:p>
-            <a:pPr indent="0" marL="0">
+            <a:pPr marL="0" indent="0">
               <a:buNone/>
             </a:pPr>
             <a:r>
@@ -14925,7 +14792,7 @@
           <a:bodyPr wrap="square" rtlCol="0" anchor="ctr"/>
           <a:lstStyle/>
           <a:p>
-            <a:pPr indent="0" marL="0">
+            <a:pPr marL="0" indent="0">
               <a:buNone/>
             </a:pPr>
             <a:r>
@@ -14964,7 +14831,7 @@
           <a:bodyPr wrap="square" rtlCol="0" anchor="ctr"/>
           <a:lstStyle/>
           <a:p>
-            <a:pPr indent="0" marL="0">
+            <a:pPr marL="0" indent="0">
               <a:buNone/>
             </a:pPr>
             <a:r>
@@ -15030,7 +14897,7 @@
           <a:bodyPr wrap="square" rtlCol="0" anchor="ctr"/>
           <a:lstStyle/>
           <a:p>
-            <a:pPr indent="0" marL="0">
+            <a:pPr marL="0" indent="0">
               <a:buNone/>
             </a:pPr>
             <a:r>
@@ -15069,7 +14936,7 @@
           <a:bodyPr wrap="square" rtlCol="0" anchor="ctr"/>
           <a:lstStyle/>
           <a:p>
-            <a:pPr indent="0" marL="0">
+            <a:pPr marL="0" indent="0">
               <a:buNone/>
             </a:pPr>
             <a:r>
@@ -15135,7 +15002,7 @@
           <a:bodyPr wrap="square" rtlCol="0" anchor="ctr"/>
           <a:lstStyle/>
           <a:p>
-            <a:pPr indent="0" marL="0">
+            <a:pPr marL="0" indent="0">
               <a:buNone/>
             </a:pPr>
             <a:r>
@@ -15174,7 +15041,7 @@
           <a:bodyPr wrap="square" rtlCol="0" anchor="ctr"/>
           <a:lstStyle/>
           <a:p>
-            <a:pPr indent="0" marL="0">
+            <a:pPr marL="0" indent="0">
               <a:buNone/>
             </a:pPr>
             <a:r>
@@ -15240,7 +15107,7 @@
           <a:bodyPr wrap="square" rtlCol="0" anchor="ctr"/>
           <a:lstStyle/>
           <a:p>
-            <a:pPr indent="0" marL="0">
+            <a:pPr marL="0" indent="0">
               <a:buNone/>
             </a:pPr>
             <a:r>
@@ -15279,7 +15146,7 @@
           <a:bodyPr wrap="square" rtlCol="0" anchor="ctr"/>
           <a:lstStyle/>
           <a:p>
-            <a:pPr indent="0" marL="0">
+            <a:pPr marL="0" indent="0">
               <a:buNone/>
             </a:pPr>
             <a:r>
@@ -15345,7 +15212,7 @@
           <a:bodyPr wrap="square" rtlCol="0" anchor="ctr"/>
           <a:lstStyle/>
           <a:p>
-            <a:pPr indent="0" marL="0">
+            <a:pPr marL="0" indent="0">
               <a:buNone/>
             </a:pPr>
             <a:r>
@@ -15384,7 +15251,7 @@
           <a:bodyPr wrap="square" rtlCol="0" anchor="ctr"/>
           <a:lstStyle/>
           <a:p>
-            <a:pPr indent="0" marL="0">
+            <a:pPr marL="0" indent="0">
               <a:buNone/>
             </a:pPr>
             <a:r>
@@ -15407,6 +15274,18 @@
   <p:clrMapOvr>
     <a:masterClrMapping/>
   </p:clrMapOvr>
+  <mc:AlternateContent xmlns:mc="http://schemas.openxmlformats.org/markup-compatibility/2006" xmlns:p14="http://schemas.microsoft.com/office/powerpoint/2010/main">
+    <mc:Choice Requires="p14">
+      <p:transition spd="slow" p14:dur="3400">
+        <p14:reveal/>
+      </p:transition>
+    </mc:Choice>
+    <mc:Fallback xmlns="">
+      <p:transition spd="slow">
+        <p:fade/>
+      </p:transition>
+    </mc:Fallback>
+  </mc:AlternateContent>
 </p:sld>
 </file>
 
@@ -15418,6 +15297,7 @@
         <a:solidFill>
           <a:srgbClr val="F7F6F2"/>
         </a:solidFill>
+        <a:effectLst/>
       </p:bgPr>
     </p:bg>
     <p:spTree>
@@ -15455,11 +15335,11 @@
           <a:bodyPr wrap="square" rtlCol="0" anchor="ctr"/>
           <a:lstStyle/>
           <a:p>
-            <a:pPr indent="0" marL="0">
-              <a:buNone/>
-            </a:pPr>
-            <a:r>
-              <a:rPr lang="en-US" sz="900" b="1" spc="200" kern="0" dirty="0">
+            <a:pPr marL="0" indent="0">
+              <a:buNone/>
+            </a:pPr>
+            <a:r>
+              <a:rPr lang="en-US" sz="900" b="1" kern="0" spc="200" dirty="0">
                 <a:solidFill>
                   <a:srgbClr val="01696F"/>
                 </a:solidFill>
@@ -15491,7 +15371,7 @@
           <a:bodyPr wrap="square" rtlCol="0" anchor="ctr"/>
           <a:lstStyle/>
           <a:p>
-            <a:pPr indent="0" marL="0">
+            <a:pPr marL="0" indent="0">
               <a:buNone/>
             </a:pPr>
             <a:r>
@@ -15530,7 +15410,7 @@
           <a:bodyPr wrap="square" rtlCol="0" anchor="ctr"/>
           <a:lstStyle/>
           <a:p>
-            <a:pPr indent="0" marL="0">
+            <a:pPr marL="0" indent="0">
               <a:buNone/>
             </a:pPr>
             <a:r>
@@ -15621,7 +15501,7 @@
           <a:bodyPr wrap="square" rtlCol="0" anchor="ctr"/>
           <a:lstStyle/>
           <a:p>
-            <a:pPr indent="0" marL="0">
+            <a:pPr marL="0" indent="0">
               <a:buNone/>
             </a:pPr>
             <a:r>
@@ -15660,7 +15540,7 @@
           <a:bodyPr wrap="square" rtlCol="0" anchor="ctr"/>
           <a:lstStyle/>
           <a:p>
-            <a:pPr indent="0" marL="0">
+            <a:pPr marL="0" indent="0">
               <a:buNone/>
             </a:pPr>
             <a:r>
@@ -15751,7 +15631,7 @@
           <a:bodyPr wrap="square" rtlCol="0" anchor="ctr"/>
           <a:lstStyle/>
           <a:p>
-            <a:pPr indent="0" marL="0">
+            <a:pPr marL="0" indent="0">
               <a:buNone/>
             </a:pPr>
             <a:r>
@@ -15790,7 +15670,7 @@
           <a:bodyPr wrap="square" rtlCol="0" anchor="ctr"/>
           <a:lstStyle/>
           <a:p>
-            <a:pPr indent="0" marL="0">
+            <a:pPr marL="0" indent="0">
               <a:buNone/>
             </a:pPr>
             <a:r>
@@ -15881,7 +15761,7 @@
           <a:bodyPr wrap="square" rtlCol="0" anchor="ctr"/>
           <a:lstStyle/>
           <a:p>
-            <a:pPr indent="0" marL="0">
+            <a:pPr marL="0" indent="0">
               <a:buNone/>
             </a:pPr>
             <a:r>
@@ -15920,7 +15800,7 @@
           <a:bodyPr wrap="square" rtlCol="0" anchor="ctr"/>
           <a:lstStyle/>
           <a:p>
-            <a:pPr indent="0" marL="0">
+            <a:pPr marL="0" indent="0">
               <a:buNone/>
             </a:pPr>
             <a:r>
@@ -16011,7 +15891,7 @@
           <a:bodyPr wrap="square" rtlCol="0" anchor="ctr"/>
           <a:lstStyle/>
           <a:p>
-            <a:pPr indent="0" marL="0">
+            <a:pPr marL="0" indent="0">
               <a:buNone/>
             </a:pPr>
             <a:r>
@@ -16050,7 +15930,7 @@
           <a:bodyPr wrap="square" rtlCol="0" anchor="ctr"/>
           <a:lstStyle/>
           <a:p>
-            <a:pPr indent="0" marL="0">
+            <a:pPr marL="0" indent="0">
               <a:buNone/>
             </a:pPr>
             <a:r>
@@ -16089,7 +15969,7 @@
           <a:bodyPr wrap="square" rtlCol="0" anchor="ctr"/>
           <a:lstStyle/>
           <a:p>
-            <a:pPr indent="0" marL="0">
+            <a:pPr marL="0" indent="0">
               <a:buNone/>
             </a:pPr>
             <a:r>
@@ -16103,9 +15983,6 @@
               </a:rPr>
               <a:t>Full details: </a:t>
             </a:r>
-            <a:pPr indent="0" marL="0">
-              <a:buNone/>
-            </a:pPr>
             <a:r>
               <a:rPr lang="en-US" sz="900" u="sng" dirty="0">
                 <a:solidFill>
@@ -16114,7 +15991,7 @@
                 <a:latin typeface="Calibri" pitchFamily="34" charset="0"/>
                 <a:ea typeface="Calibri" pitchFamily="34" charset="-122"/>
                 <a:cs typeface="Calibri" pitchFamily="34" charset="-120"/>
-                <a:hlinkClick r:id="rId1" invalidUrl="" action="" tgtFrame="" tooltip="" history="1" highlightClick="0" endSnd="0">
+                <a:hlinkClick r:id="rId3">
                   <a:extLst>
                     <a:ext uri="{A12FA001-AC4F-418D-AE19-62706E023703}">
                       <ahyp:hlinkClr xmlns:ahyp="http://schemas.microsoft.com/office/drawing/2018/hyperlinkcolor" val="tx"/>
@@ -16133,6 +16010,18 @@
   <p:clrMapOvr>
     <a:masterClrMapping/>
   </p:clrMapOvr>
+  <mc:AlternateContent xmlns:mc="http://schemas.openxmlformats.org/markup-compatibility/2006" xmlns:p14="http://schemas.microsoft.com/office/powerpoint/2010/main">
+    <mc:Choice Requires="p14">
+      <p:transition spd="slow" p14:dur="3400">
+        <p14:reveal/>
+      </p:transition>
+    </mc:Choice>
+    <mc:Fallback xmlns="">
+      <p:transition spd="slow">
+        <p:fade/>
+      </p:transition>
+    </mc:Fallback>
+  </mc:AlternateContent>
 </p:sld>
 </file>
 
@@ -16144,6 +16033,7 @@
         <a:solidFill>
           <a:srgbClr val="0F2A2C"/>
         </a:solidFill>
+        <a:effectLst/>
       </p:bgPr>
     </p:bg>
     <p:spTree>
@@ -16206,7 +16096,7 @@
           <a:bodyPr wrap="square" rtlCol="0" anchor="ctr"/>
           <a:lstStyle/>
           <a:p>
-            <a:pPr indent="0" marL="0">
+            <a:pPr marL="0" indent="0">
               <a:buNone/>
             </a:pPr>
             <a:r>
@@ -16245,7 +16135,7 @@
           <a:bodyPr wrap="square" rtlCol="0" anchor="ctr"/>
           <a:lstStyle/>
           <a:p>
-            <a:pPr indent="0" marL="0">
+            <a:pPr marL="0" indent="0">
               <a:buNone/>
             </a:pPr>
             <a:r>
@@ -16309,7 +16199,7 @@
           <a:bodyPr wrap="square" rtlCol="0" anchor="ctr"/>
           <a:lstStyle/>
           <a:p>
-            <a:pPr indent="0" marL="0">
+            <a:pPr marL="0" indent="0">
               <a:buNone/>
             </a:pPr>
             <a:r>
@@ -16348,7 +16238,7 @@
           <a:bodyPr wrap="square" rtlCol="0" anchor="ctr"/>
           <a:lstStyle/>
           <a:p>
-            <a:pPr indent="0" marL="0">
+            <a:pPr marL="0" indent="0">
               <a:buNone/>
             </a:pPr>
             <a:r>
@@ -16387,7 +16277,7 @@
           <a:bodyPr wrap="square" rtlCol="0" anchor="ctr"/>
           <a:lstStyle/>
           <a:p>
-            <a:pPr indent="0" marL="0">
+            <a:pPr marL="0" indent="0">
               <a:buNone/>
             </a:pPr>
             <a:r>
@@ -16453,7 +16343,7 @@
           <a:bodyPr wrap="square" rtlCol="0" anchor="ctr"/>
           <a:lstStyle/>
           <a:p>
-            <a:pPr algn="ctr" indent="0" marL="0">
+            <a:pPr marL="0" indent="0" algn="ctr">
               <a:buNone/>
             </a:pPr>
             <a:r>
@@ -16464,7 +16354,7 @@
                 <a:latin typeface="Calibri" pitchFamily="34" charset="0"/>
                 <a:ea typeface="Calibri" pitchFamily="34" charset="-122"/>
                 <a:cs typeface="Calibri" pitchFamily="34" charset="-120"/>
-                <a:hlinkClick r:id="rId1" invalidUrl="" action="" tgtFrame="" tooltip="" history="1" highlightClick="0" endSnd="0">
+                <a:hlinkClick r:id="rId3">
                   <a:extLst>
                     <a:ext uri="{A12FA001-AC4F-418D-AE19-62706E023703}">
                       <ahyp:hlinkClr xmlns:ahyp="http://schemas.microsoft.com/office/drawing/2018/hyperlinkcolor" val="tx"/>
@@ -16526,7 +16416,7 @@
           <a:bodyPr wrap="square" rtlCol="0" anchor="ctr"/>
           <a:lstStyle/>
           <a:p>
-            <a:pPr algn="ctr" indent="0" marL="0">
+            <a:pPr marL="0" indent="0" algn="ctr">
               <a:buNone/>
             </a:pPr>
             <a:r>
@@ -16537,7 +16427,7 @@
                 <a:latin typeface="Calibri" pitchFamily="34" charset="0"/>
                 <a:ea typeface="Calibri" pitchFamily="34" charset="-122"/>
                 <a:cs typeface="Calibri" pitchFamily="34" charset="-120"/>
-                <a:hlinkClick r:id="rId2" invalidUrl="" action="" tgtFrame="" tooltip="" history="1" highlightClick="0" endSnd="0">
+                <a:hlinkClick r:id="rId4">
                   <a:extLst>
                     <a:ext uri="{A12FA001-AC4F-418D-AE19-62706E023703}">
                       <ahyp:hlinkClr xmlns:ahyp="http://schemas.microsoft.com/office/drawing/2018/hyperlinkcolor" val="tx"/>
@@ -16599,7 +16489,7 @@
           <a:bodyPr wrap="square" rtlCol="0" anchor="ctr"/>
           <a:lstStyle/>
           <a:p>
-            <a:pPr algn="ctr" indent="0" marL="0">
+            <a:pPr marL="0" indent="0" algn="ctr">
               <a:buNone/>
             </a:pPr>
             <a:r>
@@ -16610,7 +16500,7 @@
                 <a:latin typeface="Calibri" pitchFamily="34" charset="0"/>
                 <a:ea typeface="Calibri" pitchFamily="34" charset="-122"/>
                 <a:cs typeface="Calibri" pitchFamily="34" charset="-120"/>
-                <a:hlinkClick r:id="rId3" invalidUrl="" action="" tgtFrame="" tooltip="" history="1" highlightClick="0" endSnd="0">
+                <a:hlinkClick r:id="rId5">
                   <a:extLst>
                     <a:ext uri="{A12FA001-AC4F-418D-AE19-62706E023703}">
                       <ahyp:hlinkClr xmlns:ahyp="http://schemas.microsoft.com/office/drawing/2018/hyperlinkcolor" val="tx"/>
@@ -16672,7 +16562,7 @@
           <a:bodyPr wrap="square" rtlCol="0" anchor="ctr"/>
           <a:lstStyle/>
           <a:p>
-            <a:pPr algn="ctr" indent="0" marL="0">
+            <a:pPr marL="0" indent="0" algn="ctr">
               <a:buNone/>
             </a:pPr>
             <a:r>
@@ -16683,7 +16573,7 @@
                 <a:latin typeface="Calibri" pitchFamily="34" charset="0"/>
                 <a:ea typeface="Calibri" pitchFamily="34" charset="-122"/>
                 <a:cs typeface="Calibri" pitchFamily="34" charset="-120"/>
-                <a:hlinkClick r:id="rId4" invalidUrl="" action="" tgtFrame="" tooltip="" history="1" highlightClick="0" endSnd="0">
+                <a:hlinkClick r:id="rId6">
                   <a:extLst>
                     <a:ext uri="{A12FA001-AC4F-418D-AE19-62706E023703}">
                       <ahyp:hlinkClr xmlns:ahyp="http://schemas.microsoft.com/office/drawing/2018/hyperlinkcolor" val="tx"/>
@@ -16718,7 +16608,7 @@
           <a:bodyPr wrap="square" rtlCol="0" anchor="ctr"/>
           <a:lstStyle/>
           <a:p>
-            <a:pPr indent="0" marL="0">
+            <a:pPr marL="0" indent="0">
               <a:buNone/>
             </a:pPr>
             <a:r>
@@ -16757,7 +16647,7 @@
           <a:bodyPr wrap="square" rtlCol="0" anchor="ctr"/>
           <a:lstStyle/>
           <a:p>
-            <a:pPr indent="0" marL="0">
+            <a:pPr marL="0" indent="0">
               <a:buNone/>
             </a:pPr>
             <a:r>
@@ -16796,7 +16686,7 @@
           <a:bodyPr wrap="square" rtlCol="0" anchor="ctr"/>
           <a:lstStyle/>
           <a:p>
-            <a:pPr indent="0" marL="0">
+            <a:pPr marL="0" indent="0">
               <a:buNone/>
             </a:pPr>
             <a:r>
@@ -16835,7 +16725,7 @@
           <a:bodyPr wrap="square" rtlCol="0" anchor="ctr"/>
           <a:lstStyle/>
           <a:p>
-            <a:pPr indent="0" marL="0">
+            <a:pPr marL="0" indent="0">
               <a:buNone/>
             </a:pPr>
             <a:r>
@@ -16874,7 +16764,7 @@
           <a:bodyPr wrap="square" rtlCol="0" anchor="ctr"/>
           <a:lstStyle/>
           <a:p>
-            <a:pPr indent="0" marL="0">
+            <a:pPr marL="0" indent="0">
               <a:buNone/>
             </a:pPr>
             <a:r>
@@ -16913,7 +16803,7 @@
           <a:bodyPr wrap="square" rtlCol="0" anchor="ctr"/>
           <a:lstStyle/>
           <a:p>
-            <a:pPr indent="0" marL="0">
+            <a:pPr marL="0" indent="0">
               <a:buNone/>
             </a:pPr>
             <a:r>
@@ -16936,6 +16826,18 @@
   <p:clrMapOvr>
     <a:masterClrMapping/>
   </p:clrMapOvr>
+  <mc:AlternateContent xmlns:mc="http://schemas.openxmlformats.org/markup-compatibility/2006" xmlns:p14="http://schemas.microsoft.com/office/powerpoint/2010/main">
+    <mc:Choice Requires="p14">
+      <p:transition spd="slow" p14:dur="3400">
+        <p14:reveal/>
+      </p:transition>
+    </mc:Choice>
+    <mc:Fallback xmlns="">
+      <p:transition spd="slow">
+        <p:fade/>
+      </p:transition>
+    </mc:Fallback>
+  </mc:AlternateContent>
 </p:sld>
 </file>
 
@@ -16947,6 +16849,7 @@
         <a:solidFill>
           <a:srgbClr val="F7F6F2"/>
         </a:solidFill>
+        <a:effectLst/>
       </p:bgPr>
     </p:bg>
     <p:spTree>
@@ -16984,11 +16887,11 @@
           <a:bodyPr wrap="square" rtlCol="0" anchor="ctr"/>
           <a:lstStyle/>
           <a:p>
-            <a:pPr indent="0" marL="0">
-              <a:buNone/>
-            </a:pPr>
-            <a:r>
-              <a:rPr lang="en-US" sz="900" b="1" spc="200" kern="0" dirty="0">
+            <a:pPr marL="0" indent="0">
+              <a:buNone/>
+            </a:pPr>
+            <a:r>
+              <a:rPr lang="en-US" sz="900" b="1" kern="0" spc="200" dirty="0">
                 <a:solidFill>
                   <a:srgbClr val="01696F"/>
                 </a:solidFill>
@@ -17020,7 +16923,7 @@
           <a:bodyPr wrap="square" rtlCol="0" anchor="ctr"/>
           <a:lstStyle/>
           <a:p>
-            <a:pPr indent="0" marL="0">
+            <a:pPr marL="0" indent="0">
               <a:buNone/>
             </a:pPr>
             <a:r>
@@ -17059,7 +16962,7 @@
           <a:bodyPr wrap="square" rtlCol="0" anchor="ctr"/>
           <a:lstStyle/>
           <a:p>
-            <a:pPr indent="0" marL="0">
+            <a:pPr marL="0" indent="0">
               <a:buNone/>
             </a:pPr>
             <a:r>
@@ -17098,7 +17001,7 @@
           <a:bodyPr wrap="square" rtlCol="0" anchor="t"/>
           <a:lstStyle/>
           <a:p>
-            <a:pPr indent="0" marL="0">
+            <a:pPr marL="0" indent="0">
               <a:buNone/>
             </a:pPr>
             <a:r>
@@ -17112,7 +17015,7 @@
             <a:endParaRPr lang="en-US" sz="1500" dirty="0"/>
           </a:p>
           <a:p>
-            <a:pPr indent="0" marL="0">
+            <a:pPr marL="0" indent="0">
               <a:buNone/>
             </a:pPr>
             <a:r>
@@ -17124,9 +17027,6 @@
               <a:t>
 </a:t>
             </a:r>
-            <a:pPr indent="0" marL="0">
-              <a:buNone/>
-            </a:pPr>
             <a:r>
               <a:rPr lang="en-US" sz="1300" dirty="0">
                 <a:solidFill>
@@ -17134,47 +17034,11 @@
                 </a:solidFill>
               </a:rPr>
               <a:t>• Exponential growth in unstructured textual data
+• Manual reading bottlenecks in decision pipelines
+• Existing tools lack domain flexibility
+• Gap between NLP research and production deployment
 </a:t>
             </a:r>
-            <a:pPr indent="0" marL="0">
-              <a:buNone/>
-            </a:pPr>
-            <a:r>
-              <a:rPr lang="en-US" sz="1300" dirty="0">
-                <a:solidFill>
-                  <a:srgbClr val="28251D"/>
-                </a:solidFill>
-              </a:rPr>
-              <a:t>• Manual reading bottlenecks in decision pipelines
-</a:t>
-            </a:r>
-            <a:pPr indent="0" marL="0">
-              <a:buNone/>
-            </a:pPr>
-            <a:r>
-              <a:rPr lang="en-US" sz="1300" dirty="0">
-                <a:solidFill>
-                  <a:srgbClr val="28251D"/>
-                </a:solidFill>
-              </a:rPr>
-              <a:t>• Existing tools lack domain flexibility
-</a:t>
-            </a:r>
-            <a:pPr indent="0" marL="0">
-              <a:buNone/>
-            </a:pPr>
-            <a:r>
-              <a:rPr lang="en-US" sz="1300" dirty="0">
-                <a:solidFill>
-                  <a:srgbClr val="28251D"/>
-                </a:solidFill>
-              </a:rPr>
-              <a:t>• Gap between NLP research and production deployment
-</a:t>
-            </a:r>
-            <a:pPr indent="0" marL="0">
-              <a:buNone/>
-            </a:pPr>
             <a:r>
               <a:rPr lang="en-US" sz="600" dirty="0">
                 <a:solidFill>
@@ -17184,9 +17048,6 @@
               <a:t>
 </a:t>
             </a:r>
-            <a:pPr indent="0" marL="0">
-              <a:buNone/>
-            </a:pPr>
             <a:r>
               <a:rPr lang="en-US" sz="1300" i="1" dirty="0">
                 <a:solidFill>
@@ -17272,7 +17133,7 @@
           <a:bodyPr wrap="square" rtlCol="0" anchor="ctr"/>
           <a:lstStyle/>
           <a:p>
-            <a:pPr algn="ctr" indent="0" marL="0">
+            <a:pPr marL="0" indent="0" algn="ctr">
               <a:buNone/>
             </a:pPr>
             <a:r>
@@ -17289,7 +17150,7 @@
             <a:endParaRPr lang="en-US" sz="2200" dirty="0"/>
           </a:p>
           <a:p>
-            <a:pPr algn="ctr" indent="0" marL="0">
+            <a:pPr marL="0" indent="0" algn="ctr">
               <a:buNone/>
             </a:pPr>
             <a:r>
@@ -17328,7 +17189,7 @@
           <a:bodyPr wrap="square" rtlCol="0" anchor="ctr"/>
           <a:lstStyle/>
           <a:p>
-            <a:pPr algn="ctr" indent="0" marL="0">
+            <a:pPr marL="0" indent="0" algn="ctr">
               <a:buNone/>
             </a:pPr>
             <a:r>
@@ -17419,7 +17280,7 @@
           <a:bodyPr wrap="square" rtlCol="0" anchor="ctr"/>
           <a:lstStyle/>
           <a:p>
-            <a:pPr algn="ctr" indent="0" marL="0">
+            <a:pPr marL="0" indent="0" algn="ctr">
               <a:buNone/>
             </a:pPr>
             <a:r>
@@ -17436,7 +17297,7 @@
             <a:endParaRPr lang="en-US" sz="2200" dirty="0"/>
           </a:p>
           <a:p>
-            <a:pPr algn="ctr" indent="0" marL="0">
+            <a:pPr marL="0" indent="0" algn="ctr">
               <a:buNone/>
             </a:pPr>
             <a:r>
@@ -17475,7 +17336,7 @@
           <a:bodyPr wrap="square" rtlCol="0" anchor="ctr"/>
           <a:lstStyle/>
           <a:p>
-            <a:pPr algn="ctr" indent="0" marL="0">
+            <a:pPr marL="0" indent="0" algn="ctr">
               <a:buNone/>
             </a:pPr>
             <a:r>
@@ -17566,7 +17427,7 @@
           <a:bodyPr wrap="square" rtlCol="0" anchor="ctr"/>
           <a:lstStyle/>
           <a:p>
-            <a:pPr algn="ctr" indent="0" marL="0">
+            <a:pPr marL="0" indent="0" algn="ctr">
               <a:buNone/>
             </a:pPr>
             <a:r>
@@ -17583,7 +17444,7 @@
             <a:endParaRPr lang="en-US" sz="2200" dirty="0"/>
           </a:p>
           <a:p>
-            <a:pPr algn="ctr" indent="0" marL="0">
+            <a:pPr marL="0" indent="0" algn="ctr">
               <a:buNone/>
             </a:pPr>
             <a:r>
@@ -17622,7 +17483,7 @@
           <a:bodyPr wrap="square" rtlCol="0" anchor="ctr"/>
           <a:lstStyle/>
           <a:p>
-            <a:pPr algn="ctr" indent="0" marL="0">
+            <a:pPr marL="0" indent="0" algn="ctr">
               <a:buNone/>
             </a:pPr>
             <a:r>
@@ -17713,7 +17574,7 @@
           <a:bodyPr wrap="square" rtlCol="0" anchor="ctr"/>
           <a:lstStyle/>
           <a:p>
-            <a:pPr algn="ctr" indent="0" marL="0">
+            <a:pPr marL="0" indent="0" algn="ctr">
               <a:buNone/>
             </a:pPr>
             <a:r>
@@ -17730,7 +17591,7 @@
             <a:endParaRPr lang="en-US" sz="2200" dirty="0"/>
           </a:p>
           <a:p>
-            <a:pPr algn="ctr" indent="0" marL="0">
+            <a:pPr marL="0" indent="0" algn="ctr">
               <a:buNone/>
             </a:pPr>
             <a:r>
@@ -17769,7 +17630,7 @@
           <a:bodyPr wrap="square" rtlCol="0" anchor="ctr"/>
           <a:lstStyle/>
           <a:p>
-            <a:pPr algn="ctr" indent="0" marL="0">
+            <a:pPr marL="0" indent="0" algn="ctr">
               <a:buNone/>
             </a:pPr>
             <a:r>
@@ -17792,6 +17653,18 @@
   <p:clrMapOvr>
     <a:masterClrMapping/>
   </p:clrMapOvr>
+  <mc:AlternateContent xmlns:mc="http://schemas.openxmlformats.org/markup-compatibility/2006" xmlns:p14="http://schemas.microsoft.com/office/powerpoint/2010/main">
+    <mc:Choice Requires="p14">
+      <p:transition spd="slow" p14:dur="3400">
+        <p14:reveal/>
+      </p:transition>
+    </mc:Choice>
+    <mc:Fallback xmlns="">
+      <p:transition spd="slow">
+        <p:fade/>
+      </p:transition>
+    </mc:Fallback>
+  </mc:AlternateContent>
 </p:sld>
 </file>
 
@@ -17803,6 +17676,7 @@
         <a:solidFill>
           <a:srgbClr val="F7F6F2"/>
         </a:solidFill>
+        <a:effectLst/>
       </p:bgPr>
     </p:bg>
     <p:spTree>
@@ -17840,11 +17714,11 @@
           <a:bodyPr wrap="square" rtlCol="0" anchor="ctr"/>
           <a:lstStyle/>
           <a:p>
-            <a:pPr indent="0" marL="0">
-              <a:buNone/>
-            </a:pPr>
-            <a:r>
-              <a:rPr lang="en-US" sz="900" b="1" spc="200" kern="0" dirty="0">
+            <a:pPr marL="0" indent="0">
+              <a:buNone/>
+            </a:pPr>
+            <a:r>
+              <a:rPr lang="en-US" sz="900" b="1" kern="0" spc="200" dirty="0">
                 <a:solidFill>
                   <a:srgbClr val="01696F"/>
                 </a:solidFill>
@@ -17876,7 +17750,7 @@
           <a:bodyPr wrap="square" rtlCol="0" anchor="ctr"/>
           <a:lstStyle/>
           <a:p>
-            <a:pPr indent="0" marL="0">
+            <a:pPr marL="0" indent="0">
               <a:buNone/>
             </a:pPr>
             <a:r>
@@ -17915,7 +17789,7 @@
           <a:bodyPr wrap="square" rtlCol="0" anchor="ctr"/>
           <a:lstStyle/>
           <a:p>
-            <a:pPr indent="0" marL="0">
+            <a:pPr marL="0" indent="0">
               <a:buNone/>
             </a:pPr>
             <a:r>
@@ -17935,14 +17809,14 @@
       </p:sp>
       <p:pic>
         <p:nvPicPr>
-          <p:cNvPr id="5" name="Image 0" descr="/home/user/workspace/DocSnap_Architecture_Diagram_HD.png">    </p:cNvPr>
+          <p:cNvPr id="5" name="Image 0" descr="/home/user/workspace/DocSnap_Architecture_Diagram_HD.png"/>
           <p:cNvPicPr>
             <a:picLocks noChangeAspect="1"/>
           </p:cNvPicPr>
           <p:nvPr/>
         </p:nvPicPr>
         <p:blipFill>
-          <a:blip r:embed="rId1"/>
+          <a:blip r:embed="rId3"/>
           <a:stretch>
             <a:fillRect/>
           </a:stretch>
@@ -17962,6 +17836,18 @@
   <p:clrMapOvr>
     <a:masterClrMapping/>
   </p:clrMapOvr>
+  <mc:AlternateContent xmlns:mc="http://schemas.openxmlformats.org/markup-compatibility/2006" xmlns:p14="http://schemas.microsoft.com/office/powerpoint/2010/main">
+    <mc:Choice Requires="p14">
+      <p:transition spd="slow" p14:dur="3400">
+        <p14:reveal/>
+      </p:transition>
+    </mc:Choice>
+    <mc:Fallback xmlns="">
+      <p:transition spd="slow">
+        <p:fade/>
+      </p:transition>
+    </mc:Fallback>
+  </mc:AlternateContent>
 </p:sld>
 </file>
 
@@ -17973,6 +17859,7 @@
         <a:solidFill>
           <a:srgbClr val="F7F6F2"/>
         </a:solidFill>
+        <a:effectLst/>
       </p:bgPr>
     </p:bg>
     <p:spTree>
@@ -18010,11 +17897,11 @@
           <a:bodyPr wrap="square" rtlCol="0" anchor="ctr"/>
           <a:lstStyle/>
           <a:p>
-            <a:pPr indent="0" marL="0">
-              <a:buNone/>
-            </a:pPr>
-            <a:r>
-              <a:rPr lang="en-US" sz="900" b="1" spc="200" kern="0" dirty="0">
+            <a:pPr marL="0" indent="0">
+              <a:buNone/>
+            </a:pPr>
+            <a:r>
+              <a:rPr lang="en-US" sz="900" b="1" kern="0" spc="200" dirty="0">
                 <a:solidFill>
                   <a:srgbClr val="01696F"/>
                 </a:solidFill>
@@ -18046,7 +17933,7 @@
           <a:bodyPr wrap="square" rtlCol="0" anchor="ctr"/>
           <a:lstStyle/>
           <a:p>
-            <a:pPr indent="0" marL="0">
+            <a:pPr marL="0" indent="0">
               <a:buNone/>
             </a:pPr>
             <a:r>
@@ -18085,7 +17972,7 @@
           <a:bodyPr wrap="square" rtlCol="0" anchor="ctr"/>
           <a:lstStyle/>
           <a:p>
-            <a:pPr indent="0" marL="0">
+            <a:pPr marL="0" indent="0">
               <a:buNone/>
             </a:pPr>
             <a:r>
@@ -18176,7 +18063,7 @@
           <a:bodyPr wrap="square" rtlCol="0" anchor="ctr"/>
           <a:lstStyle/>
           <a:p>
-            <a:pPr indent="0" marL="0">
+            <a:pPr marL="0" indent="0">
               <a:buNone/>
             </a:pPr>
             <a:r>
@@ -18215,7 +18102,7 @@
           <a:bodyPr wrap="square" rtlCol="0" anchor="ctr"/>
           <a:lstStyle/>
           <a:p>
-            <a:pPr indent="0" marL="0">
+            <a:pPr marL="0" indent="0">
               <a:buNone/>
             </a:pPr>
             <a:r>
@@ -18254,7 +18141,7 @@
           <a:bodyPr wrap="square" rtlCol="0" anchor="ctr"/>
           <a:lstStyle/>
           <a:p>
-            <a:pPr indent="0" marL="0">
+            <a:pPr marL="0" indent="0">
               <a:buNone/>
             </a:pPr>
             <a:r>
@@ -18293,7 +18180,7 @@
           <a:bodyPr wrap="square" rtlCol="0" anchor="ctr"/>
           <a:lstStyle/>
           <a:p>
-            <a:pPr indent="0" marL="0">
+            <a:pPr marL="0" indent="0">
               <a:buNone/>
             </a:pPr>
             <a:r>
@@ -18332,7 +18219,7 @@
           <a:bodyPr wrap="square" rtlCol="0" anchor="ctr"/>
           <a:lstStyle/>
           <a:p>
-            <a:pPr indent="0" marL="0">
+            <a:pPr marL="0" indent="0">
               <a:buNone/>
             </a:pPr>
             <a:r>
@@ -18371,7 +18258,7 @@
           <a:bodyPr wrap="square" rtlCol="0" anchor="ctr"/>
           <a:lstStyle/>
           <a:p>
-            <a:pPr indent="0" marL="0">
+            <a:pPr marL="0" indent="0">
               <a:buNone/>
             </a:pPr>
             <a:r>
@@ -18410,7 +18297,7 @@
           <a:bodyPr wrap="square" rtlCol="0" anchor="ctr"/>
           <a:lstStyle/>
           <a:p>
-            <a:pPr indent="0" marL="0">
+            <a:pPr marL="0" indent="0">
               <a:buNone/>
             </a:pPr>
             <a:r>
@@ -18449,7 +18336,7 @@
           <a:bodyPr wrap="square" rtlCol="0" anchor="ctr"/>
           <a:lstStyle/>
           <a:p>
-            <a:pPr indent="0" marL="0">
+            <a:pPr marL="0" indent="0">
               <a:buNone/>
             </a:pPr>
             <a:r>
@@ -18488,7 +18375,7 @@
           <a:bodyPr wrap="square" rtlCol="0" anchor="ctr"/>
           <a:lstStyle/>
           <a:p>
-            <a:pPr indent="0" marL="0">
+            <a:pPr marL="0" indent="0">
               <a:buNone/>
             </a:pPr>
             <a:r>
@@ -18527,7 +18414,7 @@
           <a:bodyPr wrap="square" rtlCol="0" anchor="ctr"/>
           <a:lstStyle/>
           <a:p>
-            <a:pPr indent="0" marL="0">
+            <a:pPr marL="0" indent="0">
               <a:buNone/>
             </a:pPr>
             <a:r>
@@ -18566,7 +18453,7 @@
           <a:bodyPr wrap="square" rtlCol="0" anchor="ctr"/>
           <a:lstStyle/>
           <a:p>
-            <a:pPr indent="0" marL="0">
+            <a:pPr marL="0" indent="0">
               <a:buNone/>
             </a:pPr>
             <a:r>
@@ -18605,7 +18492,7 @@
           <a:bodyPr wrap="square" rtlCol="0" anchor="ctr"/>
           <a:lstStyle/>
           <a:p>
-            <a:pPr indent="0" marL="0">
+            <a:pPr marL="0" indent="0">
               <a:buNone/>
             </a:pPr>
             <a:r>
@@ -18644,7 +18531,7 @@
           <a:bodyPr wrap="square" rtlCol="0" anchor="ctr"/>
           <a:lstStyle/>
           <a:p>
-            <a:pPr indent="0" marL="0">
+            <a:pPr marL="0" indent="0">
               <a:buNone/>
             </a:pPr>
             <a:r>
@@ -18683,7 +18570,7 @@
           <a:bodyPr wrap="square" rtlCol="0" anchor="ctr"/>
           <a:lstStyle/>
           <a:p>
-            <a:pPr indent="0" marL="0">
+            <a:pPr marL="0" indent="0">
               <a:buNone/>
             </a:pPr>
             <a:r>
@@ -18722,7 +18609,7 @@
           <a:bodyPr wrap="square" rtlCol="0" anchor="ctr"/>
           <a:lstStyle/>
           <a:p>
-            <a:pPr indent="0" marL="0">
+            <a:pPr marL="0" indent="0">
               <a:buNone/>
             </a:pPr>
             <a:r>
@@ -18813,7 +18700,7 @@
           <a:bodyPr wrap="square" rtlCol="0" anchor="ctr"/>
           <a:lstStyle/>
           <a:p>
-            <a:pPr indent="0" marL="0">
+            <a:pPr marL="0" indent="0">
               <a:buNone/>
             </a:pPr>
             <a:r>
@@ -18852,7 +18739,7 @@
           <a:bodyPr wrap="square" rtlCol="0" anchor="ctr"/>
           <a:lstStyle/>
           <a:p>
-            <a:pPr indent="0" marL="0">
+            <a:pPr marL="0" indent="0">
               <a:buNone/>
             </a:pPr>
             <a:r>
@@ -18891,7 +18778,7 @@
           <a:bodyPr wrap="square" rtlCol="0" anchor="ctr"/>
           <a:lstStyle/>
           <a:p>
-            <a:pPr indent="0" marL="0">
+            <a:pPr marL="0" indent="0">
               <a:buNone/>
             </a:pPr>
             <a:r>
@@ -18930,7 +18817,7 @@
           <a:bodyPr wrap="square" rtlCol="0" anchor="ctr"/>
           <a:lstStyle/>
           <a:p>
-            <a:pPr indent="0" marL="0">
+            <a:pPr marL="0" indent="0">
               <a:buNone/>
             </a:pPr>
             <a:r>
@@ -18969,7 +18856,7 @@
           <a:bodyPr wrap="square" rtlCol="0" anchor="ctr"/>
           <a:lstStyle/>
           <a:p>
-            <a:pPr indent="0" marL="0">
+            <a:pPr marL="0" indent="0">
               <a:buNone/>
             </a:pPr>
             <a:r>
@@ -19008,7 +18895,7 @@
           <a:bodyPr wrap="square" rtlCol="0" anchor="ctr"/>
           <a:lstStyle/>
           <a:p>
-            <a:pPr indent="0" marL="0">
+            <a:pPr marL="0" indent="0">
               <a:buNone/>
             </a:pPr>
             <a:r>
@@ -19047,7 +18934,7 @@
           <a:bodyPr wrap="square" rtlCol="0" anchor="ctr"/>
           <a:lstStyle/>
           <a:p>
-            <a:pPr indent="0" marL="0">
+            <a:pPr marL="0" indent="0">
               <a:buNone/>
             </a:pPr>
             <a:r>
@@ -19086,7 +18973,7 @@
           <a:bodyPr wrap="square" rtlCol="0" anchor="ctr"/>
           <a:lstStyle/>
           <a:p>
-            <a:pPr indent="0" marL="0">
+            <a:pPr marL="0" indent="0">
               <a:buNone/>
             </a:pPr>
             <a:r>
@@ -19125,7 +19012,7 @@
           <a:bodyPr wrap="square" rtlCol="0" anchor="ctr"/>
           <a:lstStyle/>
           <a:p>
-            <a:pPr indent="0" marL="0">
+            <a:pPr marL="0" indent="0">
               <a:buNone/>
             </a:pPr>
             <a:r>
@@ -19164,7 +19051,7 @@
           <a:bodyPr wrap="square" rtlCol="0" anchor="ctr"/>
           <a:lstStyle/>
           <a:p>
-            <a:pPr indent="0" marL="0">
+            <a:pPr marL="0" indent="0">
               <a:buNone/>
             </a:pPr>
             <a:r>
@@ -19203,7 +19090,7 @@
           <a:bodyPr wrap="square" rtlCol="0" anchor="ctr"/>
           <a:lstStyle/>
           <a:p>
-            <a:pPr indent="0" marL="0">
+            <a:pPr marL="0" indent="0">
               <a:buNone/>
             </a:pPr>
             <a:r>
@@ -19242,7 +19129,7 @@
           <a:bodyPr wrap="square" rtlCol="0" anchor="ctr"/>
           <a:lstStyle/>
           <a:p>
-            <a:pPr indent="0" marL="0">
+            <a:pPr marL="0" indent="0">
               <a:buNone/>
             </a:pPr>
             <a:r>
@@ -19281,7 +19168,7 @@
           <a:bodyPr wrap="square" rtlCol="0" anchor="ctr"/>
           <a:lstStyle/>
           <a:p>
-            <a:pPr indent="0" marL="0">
+            <a:pPr marL="0" indent="0">
               <a:buNone/>
             </a:pPr>
             <a:r>
@@ -19320,7 +19207,7 @@
           <a:bodyPr wrap="square" rtlCol="0" anchor="ctr"/>
           <a:lstStyle/>
           <a:p>
-            <a:pPr indent="0" marL="0">
+            <a:pPr marL="0" indent="0">
               <a:buNone/>
             </a:pPr>
             <a:r>
@@ -19359,7 +19246,7 @@
           <a:bodyPr wrap="square" rtlCol="0" anchor="ctr"/>
           <a:lstStyle/>
           <a:p>
-            <a:pPr indent="0" marL="0">
+            <a:pPr marL="0" indent="0">
               <a:buNone/>
             </a:pPr>
             <a:r>
@@ -19398,7 +19285,7 @@
           <a:bodyPr wrap="square" rtlCol="0" anchor="ctr"/>
           <a:lstStyle/>
           <a:p>
-            <a:pPr indent="0" marL="0">
+            <a:pPr marL="0" indent="0">
               <a:buNone/>
             </a:pPr>
             <a:r>
@@ -19412,9 +19299,6 @@
               </a:rPr>
               <a:t>Source: </a:t>
             </a:r>
-            <a:pPr indent="0" marL="0">
-              <a:buNone/>
-            </a:pPr>
             <a:r>
               <a:rPr lang="en-US" sz="900" u="sng" dirty="0">
                 <a:solidFill>
@@ -19423,7 +19307,7 @@
                 <a:latin typeface="Calibri" pitchFamily="34" charset="0"/>
                 <a:ea typeface="Calibri" pitchFamily="34" charset="-122"/>
                 <a:cs typeface="Calibri" pitchFamily="34" charset="-120"/>
-                <a:hlinkClick r:id="rId1" invalidUrl="" action="" tgtFrame="" tooltip="" history="1" highlightClick="0" endSnd="0">
+                <a:hlinkClick r:id="rId3">
                   <a:extLst>
                     <a:ext uri="{A12FA001-AC4F-418D-AE19-62706E023703}">
                       <ahyp:hlinkClr xmlns:ahyp="http://schemas.microsoft.com/office/drawing/2018/hyperlinkcolor" val="tx"/>
@@ -19442,6 +19326,18 @@
   <p:clrMapOvr>
     <a:masterClrMapping/>
   </p:clrMapOvr>
+  <mc:AlternateContent xmlns:mc="http://schemas.openxmlformats.org/markup-compatibility/2006" xmlns:p14="http://schemas.microsoft.com/office/powerpoint/2010/main">
+    <mc:Choice Requires="p14">
+      <p:transition spd="slow" p14:dur="3400">
+        <p14:reveal/>
+      </p:transition>
+    </mc:Choice>
+    <mc:Fallback xmlns="">
+      <p:transition spd="slow">
+        <p:fade/>
+      </p:transition>
+    </mc:Fallback>
+  </mc:AlternateContent>
 </p:sld>
 </file>
 
@@ -19453,6 +19349,7 @@
         <a:solidFill>
           <a:srgbClr val="F7F6F2"/>
         </a:solidFill>
+        <a:effectLst/>
       </p:bgPr>
     </p:bg>
     <p:spTree>
@@ -19490,11 +19387,11 @@
           <a:bodyPr wrap="square" rtlCol="0" anchor="ctr"/>
           <a:lstStyle/>
           <a:p>
-            <a:pPr indent="0" marL="0">
-              <a:buNone/>
-            </a:pPr>
-            <a:r>
-              <a:rPr lang="en-US" sz="900" b="1" spc="200" kern="0" dirty="0">
+            <a:pPr marL="0" indent="0">
+              <a:buNone/>
+            </a:pPr>
+            <a:r>
+              <a:rPr lang="en-US" sz="900" b="1" kern="0" spc="200" dirty="0">
                 <a:solidFill>
                   <a:srgbClr val="01696F"/>
                 </a:solidFill>
@@ -19526,7 +19423,7 @@
           <a:bodyPr wrap="square" rtlCol="0" anchor="ctr"/>
           <a:lstStyle/>
           <a:p>
-            <a:pPr indent="0" marL="0">
+            <a:pPr marL="0" indent="0">
               <a:buNone/>
             </a:pPr>
             <a:r>
@@ -19565,7 +19462,7 @@
           <a:bodyPr wrap="square" rtlCol="0" anchor="ctr"/>
           <a:lstStyle/>
           <a:p>
-            <a:pPr indent="0" marL="0">
+            <a:pPr marL="0" indent="0">
               <a:buNone/>
             </a:pPr>
             <a:r>
@@ -19585,14 +19482,14 @@
       </p:sp>
       <p:pic>
         <p:nvPicPr>
-          <p:cNvPr id="5" name="Image 0" descr="/home/user/workspace/DocSnap_NLP_Timeline_HD.png">    </p:cNvPr>
+          <p:cNvPr id="5" name="Image 0" descr="/home/user/workspace/DocSnap_NLP_Timeline_HD.png"/>
           <p:cNvPicPr>
             <a:picLocks noChangeAspect="1"/>
           </p:cNvPicPr>
           <p:nvPr/>
         </p:nvPicPr>
         <p:blipFill>
-          <a:blip r:embed="rId1"/>
+          <a:blip r:embed="rId3"/>
           <a:stretch>
             <a:fillRect/>
           </a:stretch>
@@ -19655,7 +19552,7 @@
           <a:bodyPr wrap="square" rtlCol="0" anchor="ctr"/>
           <a:lstStyle/>
           <a:p>
-            <a:pPr algn="ctr" indent="0" marL="0">
+            <a:pPr marL="0" indent="0" algn="ctr">
               <a:buNone/>
             </a:pPr>
             <a:r>
@@ -19694,7 +19591,7 @@
           <a:bodyPr wrap="square" rtlCol="0" anchor="ctr"/>
           <a:lstStyle/>
           <a:p>
-            <a:pPr indent="0" marL="0">
+            <a:pPr marL="0" indent="0">
               <a:buNone/>
             </a:pPr>
             <a:r>
@@ -19760,7 +19657,7 @@
           <a:bodyPr wrap="square" rtlCol="0" anchor="ctr"/>
           <a:lstStyle/>
           <a:p>
-            <a:pPr algn="ctr" indent="0" marL="0">
+            <a:pPr marL="0" indent="0" algn="ctr">
               <a:buNone/>
             </a:pPr>
             <a:r>
@@ -19799,7 +19696,7 @@
           <a:bodyPr wrap="square" rtlCol="0" anchor="ctr"/>
           <a:lstStyle/>
           <a:p>
-            <a:pPr indent="0" marL="0">
+            <a:pPr marL="0" indent="0">
               <a:buNone/>
             </a:pPr>
             <a:r>
@@ -19865,7 +19762,7 @@
           <a:bodyPr wrap="square" rtlCol="0" anchor="ctr"/>
           <a:lstStyle/>
           <a:p>
-            <a:pPr algn="ctr" indent="0" marL="0">
+            <a:pPr marL="0" indent="0" algn="ctr">
               <a:buNone/>
             </a:pPr>
             <a:r>
@@ -19904,7 +19801,7 @@
           <a:bodyPr wrap="square" rtlCol="0" anchor="ctr"/>
           <a:lstStyle/>
           <a:p>
-            <a:pPr indent="0" marL="0">
+            <a:pPr marL="0" indent="0">
               <a:buNone/>
             </a:pPr>
             <a:r>
@@ -19970,7 +19867,7 @@
           <a:bodyPr wrap="square" rtlCol="0" anchor="ctr"/>
           <a:lstStyle/>
           <a:p>
-            <a:pPr algn="ctr" indent="0" marL="0">
+            <a:pPr marL="0" indent="0" algn="ctr">
               <a:buNone/>
             </a:pPr>
             <a:r>
@@ -20009,7 +19906,7 @@
           <a:bodyPr wrap="square" rtlCol="0" anchor="ctr"/>
           <a:lstStyle/>
           <a:p>
-            <a:pPr indent="0" marL="0">
+            <a:pPr marL="0" indent="0">
               <a:buNone/>
             </a:pPr>
             <a:r>
@@ -20075,7 +19972,7 @@
           <a:bodyPr wrap="square" rtlCol="0" anchor="ctr"/>
           <a:lstStyle/>
           <a:p>
-            <a:pPr algn="ctr" indent="0" marL="0">
+            <a:pPr marL="0" indent="0" algn="ctr">
               <a:buNone/>
             </a:pPr>
             <a:r>
@@ -20114,7 +20011,7 @@
           <a:bodyPr wrap="square" rtlCol="0" anchor="ctr"/>
           <a:lstStyle/>
           <a:p>
-            <a:pPr indent="0" marL="0">
+            <a:pPr marL="0" indent="0">
               <a:buNone/>
             </a:pPr>
             <a:r>
@@ -20180,7 +20077,7 @@
           <a:bodyPr wrap="square" rtlCol="0" anchor="ctr"/>
           <a:lstStyle/>
           <a:p>
-            <a:pPr algn="ctr" indent="0" marL="0">
+            <a:pPr marL="0" indent="0" algn="ctr">
               <a:buNone/>
             </a:pPr>
             <a:r>
@@ -20219,7 +20116,7 @@
           <a:bodyPr wrap="square" rtlCol="0" anchor="ctr"/>
           <a:lstStyle/>
           <a:p>
-            <a:pPr indent="0" marL="0">
+            <a:pPr marL="0" indent="0">
               <a:buNone/>
             </a:pPr>
             <a:r>
@@ -20285,7 +20182,7 @@
           <a:bodyPr wrap="square" rtlCol="0" anchor="ctr"/>
           <a:lstStyle/>
           <a:p>
-            <a:pPr algn="ctr" indent="0" marL="0">
+            <a:pPr marL="0" indent="0" algn="ctr">
               <a:buNone/>
             </a:pPr>
             <a:r>
@@ -20324,7 +20221,7 @@
           <a:bodyPr wrap="square" rtlCol="0" anchor="ctr"/>
           <a:lstStyle/>
           <a:p>
-            <a:pPr indent="0" marL="0">
+            <a:pPr marL="0" indent="0">
               <a:buNone/>
             </a:pPr>
             <a:r>
@@ -20347,6 +20244,18 @@
   <p:clrMapOvr>
     <a:masterClrMapping/>
   </p:clrMapOvr>
+  <mc:AlternateContent xmlns:mc="http://schemas.openxmlformats.org/markup-compatibility/2006" xmlns:p14="http://schemas.microsoft.com/office/powerpoint/2010/main">
+    <mc:Choice Requires="p14">
+      <p:transition spd="slow" p14:dur="3400">
+        <p14:reveal/>
+      </p:transition>
+    </mc:Choice>
+    <mc:Fallback xmlns="">
+      <p:transition spd="slow">
+        <p:fade/>
+      </p:transition>
+    </mc:Fallback>
+  </mc:AlternateContent>
 </p:sld>
 </file>
 
@@ -20358,6 +20267,7 @@
         <a:solidFill>
           <a:srgbClr val="F7F6F2"/>
         </a:solidFill>
+        <a:effectLst/>
       </p:bgPr>
     </p:bg>
     <p:spTree>
@@ -20395,11 +20305,11 @@
           <a:bodyPr wrap="square" rtlCol="0" anchor="ctr"/>
           <a:lstStyle/>
           <a:p>
-            <a:pPr indent="0" marL="0">
-              <a:buNone/>
-            </a:pPr>
-            <a:r>
-              <a:rPr lang="en-US" sz="900" b="1" spc="200" kern="0" dirty="0">
+            <a:pPr marL="0" indent="0">
+              <a:buNone/>
+            </a:pPr>
+            <a:r>
+              <a:rPr lang="en-US" sz="900" b="1" kern="0" spc="200" dirty="0">
                 <a:solidFill>
                   <a:srgbClr val="01696F"/>
                 </a:solidFill>
@@ -20431,7 +20341,7 @@
           <a:bodyPr wrap="square" rtlCol="0" anchor="ctr"/>
           <a:lstStyle/>
           <a:p>
-            <a:pPr indent="0" marL="0">
+            <a:pPr marL="0" indent="0">
               <a:buNone/>
             </a:pPr>
             <a:r>
@@ -20470,7 +20380,7 @@
           <a:bodyPr wrap="square" rtlCol="0" anchor="ctr"/>
           <a:lstStyle/>
           <a:p>
-            <a:pPr indent="0" marL="0">
+            <a:pPr marL="0" indent="0">
               <a:buNone/>
             </a:pPr>
             <a:r>
@@ -20490,14 +20400,14 @@
       </p:sp>
       <p:pic>
         <p:nvPicPr>
-          <p:cNvPr id="5" name="Image 0" descr="/home/user/workspace/DocSnap_Extractive_vs_Abstractive.png">    </p:cNvPr>
+          <p:cNvPr id="5" name="Image 0" descr="/home/user/workspace/DocSnap_Extractive_vs_Abstractive.png"/>
           <p:cNvPicPr>
             <a:picLocks noChangeAspect="1"/>
           </p:cNvPicPr>
           <p:nvPr/>
         </p:nvPicPr>
         <p:blipFill>
-          <a:blip r:embed="rId1"/>
+          <a:blip r:embed="rId3"/>
           <a:stretch>
             <a:fillRect/>
           </a:stretch>
@@ -20560,7 +20470,7 @@
           <a:bodyPr wrap="square" rtlCol="0" anchor="ctr"/>
           <a:lstStyle/>
           <a:p>
-            <a:pPr algn="ctr" indent="0" marL="0">
+            <a:pPr marL="0" indent="0" algn="ctr">
               <a:buNone/>
             </a:pPr>
             <a:r>
@@ -20626,7 +20536,7 @@
           <a:bodyPr wrap="square" rtlCol="0" anchor="ctr"/>
           <a:lstStyle/>
           <a:p>
-            <a:pPr algn="ctr" indent="0" marL="0">
+            <a:pPr marL="0" indent="0" algn="ctr">
               <a:buNone/>
             </a:pPr>
             <a:r>
@@ -20692,7 +20602,7 @@
           <a:bodyPr wrap="square" rtlCol="0" anchor="ctr"/>
           <a:lstStyle/>
           <a:p>
-            <a:pPr algn="ctr" indent="0" marL="0">
+            <a:pPr marL="0" indent="0" algn="ctr">
               <a:buNone/>
             </a:pPr>
             <a:r>
@@ -20758,7 +20668,7 @@
           <a:bodyPr wrap="square" rtlCol="0" anchor="ctr"/>
           <a:lstStyle/>
           <a:p>
-            <a:pPr algn="ctr" indent="0" marL="0">
+            <a:pPr marL="0" indent="0" algn="ctr">
               <a:buNone/>
             </a:pPr>
             <a:r>
@@ -20781,6 +20691,18 @@
   <p:clrMapOvr>
     <a:masterClrMapping/>
   </p:clrMapOvr>
+  <mc:AlternateContent xmlns:mc="http://schemas.openxmlformats.org/markup-compatibility/2006" xmlns:p14="http://schemas.microsoft.com/office/powerpoint/2010/main">
+    <mc:Choice Requires="p14">
+      <p:transition spd="slow" p14:dur="3400">
+        <p14:reveal/>
+      </p:transition>
+    </mc:Choice>
+    <mc:Fallback xmlns="">
+      <p:transition spd="slow">
+        <p:fade/>
+      </p:transition>
+    </mc:Fallback>
+  </mc:AlternateContent>
 </p:sld>
 </file>
 
@@ -20792,6 +20714,7 @@
         <a:solidFill>
           <a:srgbClr val="F7F6F2"/>
         </a:solidFill>
+        <a:effectLst/>
       </p:bgPr>
     </p:bg>
     <p:spTree>
@@ -20829,11 +20752,11 @@
           <a:bodyPr wrap="square" rtlCol="0" anchor="ctr"/>
           <a:lstStyle/>
           <a:p>
-            <a:pPr indent="0" marL="0">
-              <a:buNone/>
-            </a:pPr>
-            <a:r>
-              <a:rPr lang="en-US" sz="900" b="1" spc="200" kern="0" dirty="0">
+            <a:pPr marL="0" indent="0">
+              <a:buNone/>
+            </a:pPr>
+            <a:r>
+              <a:rPr lang="en-US" sz="900" b="1" kern="0" spc="200" dirty="0">
                 <a:solidFill>
                   <a:srgbClr val="01696F"/>
                 </a:solidFill>
@@ -20865,7 +20788,7 @@
           <a:bodyPr wrap="square" rtlCol="0" anchor="ctr"/>
           <a:lstStyle/>
           <a:p>
-            <a:pPr indent="0" marL="0">
+            <a:pPr marL="0" indent="0">
               <a:buNone/>
             </a:pPr>
             <a:r>
@@ -20904,7 +20827,7 @@
           <a:bodyPr wrap="square" rtlCol="0" anchor="ctr"/>
           <a:lstStyle/>
           <a:p>
-            <a:pPr indent="0" marL="0">
+            <a:pPr marL="0" indent="0">
               <a:buNone/>
             </a:pPr>
             <a:r>
@@ -20924,14 +20847,14 @@
       </p:sp>
       <p:pic>
         <p:nvPicPr>
-          <p:cNvPr id="5" name="Image 0" descr="/home/user/workspace/DocSnap_Methodology_Flow.png">    </p:cNvPr>
+          <p:cNvPr id="5" name="Image 0" descr="/home/user/workspace/DocSnap_Methodology_Flow.png"/>
           <p:cNvPicPr>
             <a:picLocks noChangeAspect="1"/>
           </p:cNvPicPr>
           <p:nvPr/>
         </p:nvPicPr>
         <p:blipFill>
-          <a:blip r:embed="rId1"/>
+          <a:blip r:embed="rId3"/>
           <a:stretch>
             <a:fillRect/>
           </a:stretch>
@@ -20994,7 +20917,7 @@
           <a:bodyPr wrap="square" rtlCol="0" anchor="ctr"/>
           <a:lstStyle/>
           <a:p>
-            <a:pPr indent="0" marL="0">
+            <a:pPr marL="0" indent="0">
               <a:buNone/>
             </a:pPr>
             <a:r>
@@ -21033,7 +20956,7 @@
           <a:bodyPr wrap="square" rtlCol="0" anchor="ctr"/>
           <a:lstStyle/>
           <a:p>
-            <a:pPr indent="0" marL="0">
+            <a:pPr marL="0" indent="0">
               <a:buNone/>
             </a:pPr>
             <a:r>
@@ -21099,7 +21022,7 @@
           <a:bodyPr wrap="square" rtlCol="0" anchor="ctr"/>
           <a:lstStyle/>
           <a:p>
-            <a:pPr indent="0" marL="0">
+            <a:pPr marL="0" indent="0">
               <a:buNone/>
             </a:pPr>
             <a:r>
@@ -21138,7 +21061,7 @@
           <a:bodyPr wrap="square" rtlCol="0" anchor="ctr"/>
           <a:lstStyle/>
           <a:p>
-            <a:pPr indent="0" marL="0">
+            <a:pPr marL="0" indent="0">
               <a:buNone/>
             </a:pPr>
             <a:r>
@@ -21204,7 +21127,7 @@
           <a:bodyPr wrap="square" rtlCol="0" anchor="ctr"/>
           <a:lstStyle/>
           <a:p>
-            <a:pPr indent="0" marL="0">
+            <a:pPr marL="0" indent="0">
               <a:buNone/>
             </a:pPr>
             <a:r>
@@ -21243,7 +21166,7 @@
           <a:bodyPr wrap="square" rtlCol="0" anchor="ctr"/>
           <a:lstStyle/>
           <a:p>
-            <a:pPr indent="0" marL="0">
+            <a:pPr marL="0" indent="0">
               <a:buNone/>
             </a:pPr>
             <a:r>
@@ -21309,7 +21232,7 @@
           <a:bodyPr wrap="square" rtlCol="0" anchor="ctr"/>
           <a:lstStyle/>
           <a:p>
-            <a:pPr indent="0" marL="0">
+            <a:pPr marL="0" indent="0">
               <a:buNone/>
             </a:pPr>
             <a:r>
@@ -21348,7 +21271,7 @@
           <a:bodyPr wrap="square" rtlCol="0" anchor="ctr"/>
           <a:lstStyle/>
           <a:p>
-            <a:pPr indent="0" marL="0">
+            <a:pPr marL="0" indent="0">
               <a:buNone/>
             </a:pPr>
             <a:r>
@@ -21414,7 +21337,7 @@
           <a:bodyPr wrap="square" rtlCol="0" anchor="ctr"/>
           <a:lstStyle/>
           <a:p>
-            <a:pPr indent="0" marL="0">
+            <a:pPr marL="0" indent="0">
               <a:buNone/>
             </a:pPr>
             <a:r>
@@ -21453,7 +21376,7 @@
           <a:bodyPr wrap="square" rtlCol="0" anchor="ctr"/>
           <a:lstStyle/>
           <a:p>
-            <a:pPr indent="0" marL="0">
+            <a:pPr marL="0" indent="0">
               <a:buNone/>
             </a:pPr>
             <a:r>
@@ -21519,7 +21442,7 @@
           <a:bodyPr wrap="square" rtlCol="0" anchor="ctr"/>
           <a:lstStyle/>
           <a:p>
-            <a:pPr indent="0" marL="0">
+            <a:pPr marL="0" indent="0">
               <a:buNone/>
             </a:pPr>
             <a:r>
@@ -21558,7 +21481,7 @@
           <a:bodyPr wrap="square" rtlCol="0" anchor="ctr"/>
           <a:lstStyle/>
           <a:p>
-            <a:pPr indent="0" marL="0">
+            <a:pPr marL="0" indent="0">
               <a:buNone/>
             </a:pPr>
             <a:r>
@@ -21624,7 +21547,7 @@
           <a:bodyPr wrap="square" rtlCol="0" anchor="ctr"/>
           <a:lstStyle/>
           <a:p>
-            <a:pPr indent="0" marL="0">
+            <a:pPr marL="0" indent="0">
               <a:buNone/>
             </a:pPr>
             <a:r>
@@ -21663,7 +21586,7 @@
           <a:bodyPr wrap="square" rtlCol="0" anchor="ctr"/>
           <a:lstStyle/>
           <a:p>
-            <a:pPr indent="0" marL="0">
+            <a:pPr marL="0" indent="0">
               <a:buNone/>
             </a:pPr>
             <a:r>
@@ -21686,6 +21609,18 @@
   <p:clrMapOvr>
     <a:masterClrMapping/>
   </p:clrMapOvr>
+  <mc:AlternateContent xmlns:mc="http://schemas.openxmlformats.org/markup-compatibility/2006" xmlns:p14="http://schemas.microsoft.com/office/powerpoint/2010/main">
+    <mc:Choice Requires="p14">
+      <p:transition spd="slow" p14:dur="3400">
+        <p14:reveal/>
+      </p:transition>
+    </mc:Choice>
+    <mc:Fallback xmlns="">
+      <p:transition spd="slow">
+        <p:fade/>
+      </p:transition>
+    </mc:Fallback>
+  </mc:AlternateContent>
 </p:sld>
 </file>
 
@@ -21697,6 +21632,7 @@
         <a:solidFill>
           <a:srgbClr val="F7F6F2"/>
         </a:solidFill>
+        <a:effectLst/>
       </p:bgPr>
     </p:bg>
     <p:spTree>
@@ -21734,11 +21670,11 @@
           <a:bodyPr wrap="square" rtlCol="0" anchor="ctr"/>
           <a:lstStyle/>
           <a:p>
-            <a:pPr indent="0" marL="0">
-              <a:buNone/>
-            </a:pPr>
-            <a:r>
-              <a:rPr lang="en-US" sz="900" b="1" spc="200" kern="0" dirty="0">
+            <a:pPr marL="0" indent="0">
+              <a:buNone/>
+            </a:pPr>
+            <a:r>
+              <a:rPr lang="en-US" sz="900" b="1" kern="0" spc="200" dirty="0">
                 <a:solidFill>
                   <a:srgbClr val="01696F"/>
                 </a:solidFill>
@@ -21770,7 +21706,7 @@
           <a:bodyPr wrap="square" rtlCol="0" anchor="ctr"/>
           <a:lstStyle/>
           <a:p>
-            <a:pPr indent="0" marL="0">
+            <a:pPr marL="0" indent="0">
               <a:buNone/>
             </a:pPr>
             <a:r>
@@ -21809,7 +21745,7 @@
           <a:bodyPr wrap="square" rtlCol="0" anchor="ctr"/>
           <a:lstStyle/>
           <a:p>
-            <a:pPr indent="0" marL="0">
+            <a:pPr marL="0" indent="0">
               <a:buNone/>
             </a:pPr>
             <a:r>
@@ -21829,14 +21765,14 @@
       </p:sp>
       <p:pic>
         <p:nvPicPr>
-          <p:cNvPr id="5" name="Image 0" descr="/home/user/workspace/DocSnap_Data_Pipeline.png">    </p:cNvPr>
+          <p:cNvPr id="5" name="Image 0" descr="/home/user/workspace/DocSnap_Data_Pipeline.png"/>
           <p:cNvPicPr>
             <a:picLocks noChangeAspect="1"/>
           </p:cNvPicPr>
           <p:nvPr/>
         </p:nvPicPr>
         <p:blipFill>
-          <a:blip r:embed="rId1"/>
+          <a:blip r:embed="rId3"/>
           <a:stretch>
             <a:fillRect/>
           </a:stretch>
@@ -21856,6 +21792,18 @@
   <p:clrMapOvr>
     <a:masterClrMapping/>
   </p:clrMapOvr>
+  <mc:AlternateContent xmlns:mc="http://schemas.openxmlformats.org/markup-compatibility/2006" xmlns:p14="http://schemas.microsoft.com/office/powerpoint/2010/main">
+    <mc:Choice Requires="p14">
+      <p:transition spd="slow" p14:dur="3400">
+        <p14:reveal/>
+      </p:transition>
+    </mc:Choice>
+    <mc:Fallback xmlns="">
+      <p:transition spd="slow">
+        <p:fade/>
+      </p:transition>
+    </mc:Fallback>
+  </mc:AlternateContent>
 </p:sld>
 </file>
 
@@ -22152,4 +22100,299 @@
     </a:ext>
   </a:extLst>
 </a:theme>
+</file>
+
+<file path=ppt/theme/theme2.xml><?xml version="1.0" encoding="utf-8"?>
+<a:theme xmlns:a="http://schemas.openxmlformats.org/drawingml/2006/main" name="Office Theme">
+  <a:themeElements>
+    <a:clrScheme name="Office">
+      <a:dk1>
+        <a:sysClr val="windowText" lastClr="000000"/>
+      </a:dk1>
+      <a:lt1>
+        <a:sysClr val="window" lastClr="FFFFFF"/>
+      </a:lt1>
+      <a:dk2>
+        <a:srgbClr val="44546A"/>
+      </a:dk2>
+      <a:lt2>
+        <a:srgbClr val="E7E6E6"/>
+      </a:lt2>
+      <a:accent1>
+        <a:srgbClr val="4472C4"/>
+      </a:accent1>
+      <a:accent2>
+        <a:srgbClr val="ED7D31"/>
+      </a:accent2>
+      <a:accent3>
+        <a:srgbClr val="A5A5A5"/>
+      </a:accent3>
+      <a:accent4>
+        <a:srgbClr val="FFC000"/>
+      </a:accent4>
+      <a:accent5>
+        <a:srgbClr val="5B9BD5"/>
+      </a:accent5>
+      <a:accent6>
+        <a:srgbClr val="70AD47"/>
+      </a:accent6>
+      <a:hlink>
+        <a:srgbClr val="0563C1"/>
+      </a:hlink>
+      <a:folHlink>
+        <a:srgbClr val="954F72"/>
+      </a:folHlink>
+    </a:clrScheme>
+    <a:fontScheme name="Office">
+      <a:majorFont>
+        <a:latin typeface="Calibri Light" panose="020F0302020204030204"/>
+        <a:ea typeface=""/>
+        <a:cs typeface=""/>
+        <a:font script="Jpan" typeface="游ゴシック Light"/>
+        <a:font script="Hang" typeface="맑은 고딕"/>
+        <a:font script="Hans" typeface="等线 Light"/>
+        <a:font script="Hant" typeface="新細明體"/>
+        <a:font script="Arab" typeface="Times New Roman"/>
+        <a:font script="Hebr" typeface="Times New Roman"/>
+        <a:font script="Thai" typeface="Angsana New"/>
+        <a:font script="Ethi" typeface="Nyala"/>
+        <a:font script="Beng" typeface="Vrinda"/>
+        <a:font script="Gujr" typeface="Shruti"/>
+        <a:font script="Khmr" typeface="MoolBoran"/>
+        <a:font script="Knda" typeface="Tunga"/>
+        <a:font script="Guru" typeface="Raavi"/>
+        <a:font script="Cans" typeface="Euphemia"/>
+        <a:font script="Cher" typeface="Plantagenet Cherokee"/>
+        <a:font script="Yiii" typeface="Microsoft Yi Baiti"/>
+        <a:font script="Tibt" typeface="Microsoft Himalaya"/>
+        <a:font script="Thaa" typeface="MV Boli"/>
+        <a:font script="Deva" typeface="Mangal"/>
+        <a:font script="Telu" typeface="Gautami"/>
+        <a:font script="Taml" typeface="Latha"/>
+        <a:font script="Syrc" typeface="Estrangelo Edessa"/>
+        <a:font script="Orya" typeface="Kalinga"/>
+        <a:font script="Mlym" typeface="Kartika"/>
+        <a:font script="Laoo" typeface="DokChampa"/>
+        <a:font script="Sinh" typeface="Iskoola Pota"/>
+        <a:font script="Mong" typeface="Mongolian Baiti"/>
+        <a:font script="Viet" typeface="Times New Roman"/>
+        <a:font script="Uigh" typeface="Microsoft Uighur"/>
+        <a:font script="Geor" typeface="Sylfaen"/>
+        <a:font script="Armn" typeface="Arial"/>
+        <a:font script="Bugi" typeface="Leelawadee UI"/>
+        <a:font script="Bopo" typeface="Microsoft JhengHei"/>
+        <a:font script="Java" typeface="Javanese Text"/>
+        <a:font script="Lisu" typeface="Segoe UI"/>
+        <a:font script="Mymr" typeface="Myanmar Text"/>
+        <a:font script="Nkoo" typeface="Ebrima"/>
+        <a:font script="Olck" typeface="Nirmala UI"/>
+        <a:font script="Osma" typeface="Ebrima"/>
+        <a:font script="Phag" typeface="Phagspa"/>
+        <a:font script="Syrn" typeface="Estrangelo Edessa"/>
+        <a:font script="Syrj" typeface="Estrangelo Edessa"/>
+        <a:font script="Syre" typeface="Estrangelo Edessa"/>
+        <a:font script="Sora" typeface="Nirmala UI"/>
+        <a:font script="Tale" typeface="Microsoft Tai Le"/>
+        <a:font script="Talu" typeface="Microsoft New Tai Lue"/>
+        <a:font script="Tfng" typeface="Ebrima"/>
+      </a:majorFont>
+      <a:minorFont>
+        <a:latin typeface="Calibri" panose="020F0502020204030204"/>
+        <a:ea typeface=""/>
+        <a:cs typeface=""/>
+        <a:font script="Jpan" typeface="游ゴシック"/>
+        <a:font script="Hang" typeface="맑은 고딕"/>
+        <a:font script="Hans" typeface="等线"/>
+        <a:font script="Hant" typeface="新細明體"/>
+        <a:font script="Arab" typeface="Arial"/>
+        <a:font script="Hebr" typeface="Arial"/>
+        <a:font script="Thai" typeface="Cordia New"/>
+        <a:font script="Ethi" typeface="Nyala"/>
+        <a:font script="Beng" typeface="Vrinda"/>
+        <a:font script="Gujr" typeface="Shruti"/>
+        <a:font script="Khmr" typeface="DaunPenh"/>
+        <a:font script="Knda" typeface="Tunga"/>
+        <a:font script="Guru" typeface="Raavi"/>
+        <a:font script="Cans" typeface="Euphemia"/>
+        <a:font script="Cher" typeface="Plantagenet Cherokee"/>
+        <a:font script="Yiii" typeface="Microsoft Yi Baiti"/>
+        <a:font script="Tibt" typeface="Microsoft Himalaya"/>
+        <a:font script="Thaa" typeface="MV Boli"/>
+        <a:font script="Deva" typeface="Mangal"/>
+        <a:font script="Telu" typeface="Gautami"/>
+        <a:font script="Taml" typeface="Latha"/>
+        <a:font script="Syrc" typeface="Estrangelo Edessa"/>
+        <a:font script="Orya" typeface="Kalinga"/>
+        <a:font script="Mlym" typeface="Kartika"/>
+        <a:font script="Laoo" typeface="DokChampa"/>
+        <a:font script="Sinh" typeface="Iskoola Pota"/>
+        <a:font script="Mong" typeface="Mongolian Baiti"/>
+        <a:font script="Viet" typeface="Arial"/>
+        <a:font script="Uigh" typeface="Microsoft Uighur"/>
+        <a:font script="Geor" typeface="Sylfaen"/>
+        <a:font script="Armn" typeface="Arial"/>
+        <a:font script="Bugi" typeface="Leelawadee UI"/>
+        <a:font script="Bopo" typeface="Microsoft JhengHei"/>
+        <a:font script="Java" typeface="Javanese Text"/>
+        <a:font script="Lisu" typeface="Segoe UI"/>
+        <a:font script="Mymr" typeface="Myanmar Text"/>
+        <a:font script="Nkoo" typeface="Ebrima"/>
+        <a:font script="Olck" typeface="Nirmala UI"/>
+        <a:font script="Osma" typeface="Ebrima"/>
+        <a:font script="Phag" typeface="Phagspa"/>
+        <a:font script="Syrn" typeface="Estrangelo Edessa"/>
+        <a:font script="Syrj" typeface="Estrangelo Edessa"/>
+        <a:font script="Syre" typeface="Estrangelo Edessa"/>
+        <a:font script="Sora" typeface="Nirmala UI"/>
+        <a:font script="Tale" typeface="Microsoft Tai Le"/>
+        <a:font script="Talu" typeface="Microsoft New Tai Lue"/>
+        <a:font script="Tfng" typeface="Ebrima"/>
+      </a:minorFont>
+    </a:fontScheme>
+    <a:fmtScheme name="Office">
+      <a:fillStyleLst>
+        <a:solidFill>
+          <a:schemeClr val="phClr"/>
+        </a:solidFill>
+        <a:gradFill rotWithShape="1">
+          <a:gsLst>
+            <a:gs pos="0">
+              <a:schemeClr val="phClr">
+                <a:lumMod val="110000"/>
+                <a:satMod val="105000"/>
+                <a:tint val="67000"/>
+              </a:schemeClr>
+            </a:gs>
+            <a:gs pos="50000">
+              <a:schemeClr val="phClr">
+                <a:lumMod val="105000"/>
+                <a:satMod val="103000"/>
+                <a:tint val="73000"/>
+              </a:schemeClr>
+            </a:gs>
+            <a:gs pos="100000">
+              <a:schemeClr val="phClr">
+                <a:lumMod val="105000"/>
+                <a:satMod val="109000"/>
+                <a:tint val="81000"/>
+              </a:schemeClr>
+            </a:gs>
+          </a:gsLst>
+          <a:lin ang="5400000" scaled="0"/>
+        </a:gradFill>
+        <a:gradFill rotWithShape="1">
+          <a:gsLst>
+            <a:gs pos="0">
+              <a:schemeClr val="phClr">
+                <a:satMod val="103000"/>
+                <a:lumMod val="102000"/>
+                <a:tint val="94000"/>
+              </a:schemeClr>
+            </a:gs>
+            <a:gs pos="50000">
+              <a:schemeClr val="phClr">
+                <a:satMod val="110000"/>
+                <a:lumMod val="100000"/>
+                <a:shade val="100000"/>
+              </a:schemeClr>
+            </a:gs>
+            <a:gs pos="100000">
+              <a:schemeClr val="phClr">
+                <a:lumMod val="99000"/>
+                <a:satMod val="120000"/>
+                <a:shade val="78000"/>
+              </a:schemeClr>
+            </a:gs>
+          </a:gsLst>
+          <a:lin ang="5400000" scaled="0"/>
+        </a:gradFill>
+      </a:fillStyleLst>
+      <a:lnStyleLst>
+        <a:ln w="6350" cap="flat" cmpd="sng" algn="ctr">
+          <a:solidFill>
+            <a:schemeClr val="phClr"/>
+          </a:solidFill>
+          <a:prstDash val="solid"/>
+          <a:miter lim="800000"/>
+        </a:ln>
+        <a:ln w="12700" cap="flat" cmpd="sng" algn="ctr">
+          <a:solidFill>
+            <a:schemeClr val="phClr"/>
+          </a:solidFill>
+          <a:prstDash val="solid"/>
+          <a:miter lim="800000"/>
+        </a:ln>
+        <a:ln w="19050" cap="flat" cmpd="sng" algn="ctr">
+          <a:solidFill>
+            <a:schemeClr val="phClr"/>
+          </a:solidFill>
+          <a:prstDash val="solid"/>
+          <a:miter lim="800000"/>
+        </a:ln>
+      </a:lnStyleLst>
+      <a:effectStyleLst>
+        <a:effectStyle>
+          <a:effectLst/>
+        </a:effectStyle>
+        <a:effectStyle>
+          <a:effectLst/>
+        </a:effectStyle>
+        <a:effectStyle>
+          <a:effectLst>
+            <a:outerShdw blurRad="57150" dist="19050" dir="5400000" algn="ctr" rotWithShape="0">
+              <a:srgbClr val="000000">
+                <a:alpha val="63000"/>
+              </a:srgbClr>
+            </a:outerShdw>
+          </a:effectLst>
+        </a:effectStyle>
+      </a:effectStyleLst>
+      <a:bgFillStyleLst>
+        <a:solidFill>
+          <a:schemeClr val="phClr"/>
+        </a:solidFill>
+        <a:solidFill>
+          <a:schemeClr val="phClr">
+            <a:tint val="95000"/>
+            <a:satMod val="170000"/>
+          </a:schemeClr>
+        </a:solidFill>
+        <a:gradFill rotWithShape="1">
+          <a:gsLst>
+            <a:gs pos="0">
+              <a:schemeClr val="phClr">
+                <a:tint val="93000"/>
+                <a:satMod val="150000"/>
+                <a:shade val="98000"/>
+                <a:lumMod val="102000"/>
+              </a:schemeClr>
+            </a:gs>
+            <a:gs pos="50000">
+              <a:schemeClr val="phClr">
+                <a:tint val="98000"/>
+                <a:satMod val="130000"/>
+                <a:shade val="90000"/>
+                <a:lumMod val="103000"/>
+              </a:schemeClr>
+            </a:gs>
+            <a:gs pos="100000">
+              <a:schemeClr val="phClr">
+                <a:shade val="63000"/>
+                <a:satMod val="120000"/>
+              </a:schemeClr>
+            </a:gs>
+          </a:gsLst>
+          <a:lin ang="5400000" scaled="0"/>
+        </a:gradFill>
+      </a:bgFillStyleLst>
+    </a:fmtScheme>
+  </a:themeElements>
+  <a:objectDefaults/>
+  <a:extraClrSchemeLst/>
+  <a:extLst>
+    <a:ext uri="{05A4C25C-085E-4340-85A3-A5531E510DB2}">
+      <thm15:themeFamily xmlns:thm15="http://schemas.microsoft.com/office/thememl/2012/main" name="Office Theme" id="{62F939B6-93AF-4DB8-9C6B-D6C7DFDC589F}" vid="{4A3C46E8-61CC-4603-A589-7422A47A8E4A}"/>
+    </a:ext>
+  </a:extLst>
+</a:theme>
 </file>